--- a/docs/seminar/slides/세션3_공유메모리와_병렬리덕션.pptx
+++ b/docs/seminar/slides/세션3_공유메모리와_병렬리덕션.pptx
@@ -15,9 +15,10 @@
     <p:sldId id="263" r:id="rId9"/>
     <p:sldId id="264" r:id="rId10"/>
     <p:sldId id="265" r:id="rId11"/>
+    <p:sldId id="266" r:id="rId12"/>
   </p:sldIdLst>
   <p:notesMasterIdLst>
-    <p:notesMasterId r:id="rId12"/>
+    <p:notesMasterId r:id="rId13"/>
   </p:notesMasterIdLst>
   <p:sldSz cx="12192000" cy="6858000"/>
   <p:notesSz cx="6858000" cy="12192000"/>
@@ -599,7 +600,7 @@
           <a:p>
             <a:r>
               <a:rPr lang="en-US" dirty="0"/>
-              <a:t/>
+              <a:t>Ex 1은 이 세션의 하이라이트 — 동기화의 필요성을 몸으로 배웁니다. 반드시 원복하도록 안내하세요.</a:t>
             </a:r>
             <a:endParaRPr lang="en-US" dirty="0"/>
           </a:p>
@@ -623,6 +624,94 @@
             <a:fld id="{F7021451-1387-4CA6-816F-3879F97B5CBC}" type="slidenum">
               <a:rPr lang="en-US"/>
               <a:t>10</a:t>
+            </a:fld>
+            <a:endParaRPr lang="en-US"/>
+          </a:p>
+        </p:txBody>
+      </p:sp>
+    </p:spTree>
+    <p:extLst>
+      <p:ext uri="{BB962C8B-B14F-4D97-AF65-F5344CB8AC3E}">
+        <p14:creationId xmlns:p14="http://schemas.microsoft.com/office/powerpoint/2010/main" val="1024086991"/>
+      </p:ext>
+    </p:extLst>
+  </p:cSld>
+  <p:clrMapOvr>
+    <a:masterClrMapping/>
+  </p:clrMapOvr>
+</p:notes>
+</file>
+
+<file path=ppt/notesSlides/notesSlide11.xml><?xml version="1.0" encoding="utf-8"?>
+<p:notes xmlns:a="http://schemas.openxmlformats.org/drawingml/2006/main" xmlns:r="http://schemas.openxmlformats.org/officeDocument/2006/relationships" xmlns:p="http://schemas.openxmlformats.org/presentationml/2006/main">
+  <p:cSld>
+    <p:spTree>
+      <p:nvGrpSpPr>
+        <p:cNvPr id="1" name=""/>
+        <p:cNvGrpSpPr/>
+        <p:nvPr/>
+      </p:nvGrpSpPr>
+      <p:grpSpPr>
+        <a:xfrm>
+          <a:off x="0" y="0"/>
+          <a:ext cx="0" cy="0"/>
+          <a:chOff x="0" y="0"/>
+          <a:chExt cx="0" cy="0"/>
+        </a:xfrm>
+      </p:grpSpPr>
+      <p:sp>
+        <p:nvSpPr>
+          <p:cNvPr id="2" name="Slide Image Placeholder 1"/>
+          <p:cNvSpPr>
+            <a:spLocks noGrp="1" noRot="1" noChangeAspect="1"/>
+          </p:cNvSpPr>
+          <p:nvPr>
+            <p:ph type="sldImg"/>
+          </p:nvPr>
+        </p:nvSpPr>
+        <p:spPr/>
+      </p:sp>
+      <p:sp>
+        <p:nvSpPr>
+          <p:cNvPr id="3" name="Notes Placeholder 2"/>
+          <p:cNvSpPr>
+            <a:spLocks noGrp="1"/>
+          </p:cNvSpPr>
+          <p:nvPr>
+            <p:ph type="body" idx="1"/>
+          </p:nvPr>
+        </p:nvSpPr>
+        <p:spPr/>
+        <p:txBody>
+          <a:bodyPr/>
+          <a:lstStyle/>
+          <a:p>
+            <a:r>
+              <a:rPr lang="en-US" dirty="0"/>
+              <a:t/>
+            </a:r>
+            <a:endParaRPr lang="en-US" dirty="0"/>
+          </a:p>
+        </p:txBody>
+      </p:sp>
+      <p:sp>
+        <p:nvSpPr>
+          <p:cNvPr id="4" name="Slide Number Placeholder 3"/>
+          <p:cNvSpPr>
+            <a:spLocks noGrp="1"/>
+          </p:cNvSpPr>
+          <p:nvPr>
+            <p:ph type="sldNum" sz="quarter" idx="10"/>
+          </p:nvPr>
+        </p:nvSpPr>
+        <p:spPr/>
+        <p:txBody>
+          <a:bodyPr/>
+          <a:lstStyle/>
+          <a:p>
+            <a:fld id="{F7021451-1387-4CA6-816F-3879F97B5CBC}" type="slidenum">
+              <a:rPr lang="en-US"/>
+              <a:t>11</a:t>
             </a:fld>
             <a:endParaRPr lang="en-US"/>
           </a:p>
@@ -863,7 +952,7 @@
           <a:p>
             <a:r>
               <a:rPr lang="en-US" dirty="0"/>
-              <a:t>__popc는 하드웨어 인트린식(단일 명령). XOR로 다른 비트만 남기고 그 개수를 센다는 흐름을 짚으세요.</a:t>
+              <a:t>왼쪽의 병목(모든 화살표가 한 점으로)과 오른쪽의 분산(계층적으로 좁아짐)을 시각적으로 대비시키세요.</a:t>
             </a:r>
             <a:endParaRPr lang="en-US" dirty="0"/>
           </a:p>
@@ -951,7 +1040,7 @@
           <a:p>
             <a:r>
               <a:rPr lang="en-US" dirty="0"/>
-              <a:t>8개 예시로 3단계면 끝. 512개면 9단계(log2 512). '절반씩 접는다'는 이미지를 손으로 그려 보이세요.</a:t>
+              <a:t>__popc는 하드웨어 인트린식(단일 명령). XOR로 다른 비트만 남기고 그 개수를 센다는 흐름을 짚으세요.</a:t>
             </a:r>
             <a:endParaRPr lang="en-US" dirty="0"/>
           </a:p>
@@ -1039,7 +1128,7 @@
           <a:p>
             <a:r>
               <a:rPr lang="en-US" dirty="0"/>
-              <a:t>한 줄씩: 0으로 초기화 → 부분합 → 트리로 접기 → 대표 스레드(0)가 저장. 4*blockDim.x 바이트 공유 메모리를 launch에서 지정(core.cu:198).</a:t>
+              <a:t>8개 예시로 3단계면 끝. 512개면 9단계(log2 512). '절반씩 접는다'는 이미지를 손으로 그려 보이세요.</a:t>
             </a:r>
             <a:endParaRPr lang="en-US" dirty="0"/>
           </a:p>
@@ -1127,7 +1216,7 @@
           <a:p>
             <a:r>
               <a:rPr lang="en-US" dirty="0"/>
-              <a:t>배리어 = '모두 여기서 만나자'. 공유 메모리 협업에는 반드시 필요. 실습 랩에서 직접 빼보고 결과 흔들림을 관찰합니다.</a:t>
+              <a:t>한 줄씩: 0으로 초기화 → 부분합 → 트리로 접기 → 대표 스레드(0)가 저장. 4*blockDim.x 바이트 공유 메모리를 launch에서 지정(core.cu:198).</a:t>
             </a:r>
             <a:endParaRPr lang="en-US" dirty="0"/>
           </a:p>
@@ -1215,7 +1304,7 @@
           <a:p>
             <a:r>
               <a:rPr lang="en-US" dirty="0"/>
-              <a:t>공유 메모리는 리덕션뿐 아니라 '협업 버퍼'로도 쓰인다는 확장. 리덕션이 핵심이지만 두 사례로 일반화하세요.</a:t>
+              <a:t>배리어 = '모두 여기서 만나자'. 공유 메모리 협업에는 반드시 필요. 실습 랩에서 직접 빼보고 결과 흔들림을 관찰합니다.</a:t>
             </a:r>
             <a:endParaRPr lang="en-US" dirty="0"/>
           </a:p>
@@ -1303,7 +1392,7 @@
           <a:p>
             <a:r>
               <a:rPr lang="en-US" dirty="0"/>
-              <a:t>Ex 1은 이 세션의 하이라이트 — 동기화의 필요성을 몸으로 배웁니다. 반드시 원복하도록 안내하세요.</a:t>
+              <a:t>공유 메모리는 리덕션뿐 아니라 '협업 버퍼'로도 쓰인다는 확장. 리덕션이 핵심이지만 두 사례로 일반화하세요.</a:t>
             </a:r>
             <a:endParaRPr lang="en-US" dirty="0"/>
           </a:p>
@@ -1984,6 +2073,704 @@
         </p:nvSpPr>
         <p:spPr>
           <a:xfrm>
+            <a:off x="548640" y="411480"/>
+            <a:ext cx="658368" cy="658368"/>
+          </a:xfrm>
+          <a:prstGeom prst="roundRect">
+            <a:avLst>
+              <a:gd name="adj" fmla="val 13889"/>
+            </a:avLst>
+          </a:prstGeom>
+          <a:solidFill>
+            <a:srgbClr val="E8A33D"/>
+          </a:solidFill>
+          <a:ln/>
+        </p:spPr>
+        <p:txBody>
+          <a:bodyPr wrap="square" rtlCol="0" anchor="ctr"/>
+          <a:lstStyle/>
+          <a:p>
+            <a:pPr algn="ctr" indent="0" marL="0">
+              <a:buNone/>
+            </a:pPr>
+            <a:r>
+              <a:rPr lang="en-US" sz="2200" b="1" dirty="0">
+                <a:solidFill>
+                  <a:srgbClr val="101722"/>
+                </a:solidFill>
+                <a:latin typeface="Courier New" pitchFamily="34" charset="0"/>
+                <a:ea typeface="Courier New" pitchFamily="34" charset="-122"/>
+                <a:cs typeface="Courier New" pitchFamily="34" charset="-120"/>
+              </a:rPr>
+              <a:t>8</a:t>
+            </a:r>
+            <a:endParaRPr lang="en-US" sz="2200" dirty="0"/>
+          </a:p>
+        </p:txBody>
+      </p:sp>
+      <p:sp>
+        <p:nvSpPr>
+          <p:cNvPr id="3" name="Text 1"/>
+          <p:cNvSpPr/>
+          <p:nvPr/>
+        </p:nvSpPr>
+        <p:spPr>
+          <a:xfrm>
+            <a:off x="1371600" y="384048"/>
+            <a:ext cx="10241280" cy="713232"/>
+          </a:xfrm>
+          <a:prstGeom prst="rect">
+            <a:avLst/>
+          </a:prstGeom>
+          <a:noFill/>
+          <a:ln/>
+        </p:spPr>
+        <p:txBody>
+          <a:bodyPr wrap="square" lIns="0" tIns="0" rIns="0" bIns="0" rtlCol="0" anchor="ctr"/>
+          <a:lstStyle/>
+          <a:p>
+            <a:pPr algn="l" indent="0" marL="0">
+              <a:buNone/>
+            </a:pPr>
+            <a:r>
+              <a:rPr lang="en-US" sz="2900" b="1" dirty="0">
+                <a:solidFill>
+                  <a:srgbClr val="E7EDF5"/>
+                </a:solidFill>
+                <a:latin typeface="Malgun Gothic" pitchFamily="34" charset="0"/>
+                <a:ea typeface="Malgun Gothic" pitchFamily="34" charset="-122"/>
+                <a:cs typeface="Malgun Gothic" pitchFamily="34" charset="-120"/>
+              </a:rPr>
+              <a:t>실습 미리보기 · Lab 3</a:t>
+            </a:r>
+            <a:endParaRPr lang="en-US" sz="2900" dirty="0"/>
+          </a:p>
+        </p:txBody>
+      </p:sp>
+      <p:sp>
+        <p:nvSpPr>
+          <p:cNvPr id="4" name="Shape 2"/>
+          <p:cNvSpPr/>
+          <p:nvPr/>
+        </p:nvSpPr>
+        <p:spPr>
+          <a:xfrm>
+            <a:off x="548640" y="1600200"/>
+            <a:ext cx="5303520" cy="1920240"/>
+          </a:xfrm>
+          <a:prstGeom prst="roundRect">
+            <a:avLst>
+              <a:gd name="adj" fmla="val 3810"/>
+            </a:avLst>
+          </a:prstGeom>
+          <a:solidFill>
+            <a:srgbClr val="18212E"/>
+          </a:solidFill>
+          <a:ln/>
+        </p:spPr>
+      </p:sp>
+      <p:sp>
+        <p:nvSpPr>
+          <p:cNvPr id="5" name="Text 3"/>
+          <p:cNvSpPr/>
+          <p:nvPr/>
+        </p:nvSpPr>
+        <p:spPr>
+          <a:xfrm>
+            <a:off x="804672" y="1801368"/>
+            <a:ext cx="1417320" cy="502920"/>
+          </a:xfrm>
+          <a:prstGeom prst="roundRect">
+            <a:avLst>
+              <a:gd name="adj" fmla="val 14545"/>
+            </a:avLst>
+          </a:prstGeom>
+          <a:solidFill>
+            <a:srgbClr val="E6604F"/>
+          </a:solidFill>
+          <a:ln/>
+        </p:spPr>
+        <p:txBody>
+          <a:bodyPr wrap="square" rtlCol="0" anchor="ctr"/>
+          <a:lstStyle/>
+          <a:p>
+            <a:pPr algn="ctr" indent="0" marL="0">
+              <a:buNone/>
+            </a:pPr>
+            <a:r>
+              <a:rPr lang="en-US" sz="1500" b="1" dirty="0">
+                <a:solidFill>
+                  <a:srgbClr val="101722"/>
+                </a:solidFill>
+                <a:latin typeface="Courier New" pitchFamily="34" charset="0"/>
+                <a:ea typeface="Courier New" pitchFamily="34" charset="-122"/>
+                <a:cs typeface="Courier New" pitchFamily="34" charset="-120"/>
+              </a:rPr>
+              <a:t>Ex 1</a:t>
+            </a:r>
+            <a:endParaRPr lang="en-US" sz="1500" dirty="0"/>
+          </a:p>
+        </p:txBody>
+      </p:sp>
+      <p:sp>
+        <p:nvSpPr>
+          <p:cNvPr id="6" name="Text 4"/>
+          <p:cNvSpPr/>
+          <p:nvPr/>
+        </p:nvSpPr>
+        <p:spPr>
+          <a:xfrm>
+            <a:off x="2377440" y="1819656"/>
+            <a:ext cx="3246120" cy="822960"/>
+          </a:xfrm>
+          <a:prstGeom prst="rect">
+            <a:avLst/>
+          </a:prstGeom>
+          <a:noFill/>
+          <a:ln/>
+        </p:spPr>
+        <p:txBody>
+          <a:bodyPr wrap="square" lIns="0" tIns="0" rIns="0" bIns="0" rtlCol="0" anchor="t"/>
+          <a:lstStyle/>
+          <a:p>
+            <a:pPr indent="0" marL="0">
+              <a:buNone/>
+            </a:pPr>
+            <a:r>
+              <a:rPr lang="en-US" sz="1700" b="1" dirty="0">
+                <a:solidFill>
+                  <a:srgbClr val="E7EDF5"/>
+                </a:solidFill>
+                <a:latin typeface="Malgun Gothic" pitchFamily="34" charset="0"/>
+                <a:ea typeface="Malgun Gothic" pitchFamily="34" charset="-122"/>
+                <a:cs typeface="Malgun Gothic" pitchFamily="34" charset="-120"/>
+              </a:rPr>
+              <a:t>__syncthreads 빼보기</a:t>
+            </a:r>
+            <a:endParaRPr lang="en-US" sz="1700" dirty="0"/>
+          </a:p>
+        </p:txBody>
+      </p:sp>
+      <p:sp>
+        <p:nvSpPr>
+          <p:cNvPr id="7" name="Text 5"/>
+          <p:cNvSpPr/>
+          <p:nvPr/>
+        </p:nvSpPr>
+        <p:spPr>
+          <a:xfrm>
+            <a:off x="804672" y="2697480"/>
+            <a:ext cx="4791456" cy="731520"/>
+          </a:xfrm>
+          <a:prstGeom prst="rect">
+            <a:avLst/>
+          </a:prstGeom>
+          <a:noFill/>
+          <a:ln/>
+        </p:spPr>
+        <p:txBody>
+          <a:bodyPr wrap="square" lIns="0" tIns="0" rIns="0" bIns="0" rtlCol="0" anchor="t"/>
+          <a:lstStyle/>
+          <a:p>
+            <a:pPr indent="0" marL="0">
+              <a:lnSpc>
+                <a:spcPct val="110000"/>
+              </a:lnSpc>
+              <a:buNone/>
+            </a:pPr>
+            <a:r>
+              <a:rPr lang="en-US" sz="1350" dirty="0">
+                <a:solidFill>
+                  <a:srgbClr val="9FB0C4"/>
+                </a:solidFill>
+                <a:latin typeface="Malgun Gothic" pitchFamily="34" charset="0"/>
+                <a:ea typeface="Malgun Gothic" pitchFamily="34" charset="-122"/>
+                <a:cs typeface="Malgun Gothic" pitchFamily="34" charset="-120"/>
+              </a:rPr>
+              <a:t>리덕션 동기화를 지워 합계가 흔들리는지 관찰</a:t>
+            </a:r>
+            <a:endParaRPr lang="en-US" sz="1350" dirty="0"/>
+          </a:p>
+        </p:txBody>
+      </p:sp>
+      <p:sp>
+        <p:nvSpPr>
+          <p:cNvPr id="8" name="Shape 6"/>
+          <p:cNvSpPr/>
+          <p:nvPr/>
+        </p:nvSpPr>
+        <p:spPr>
+          <a:xfrm>
+            <a:off x="6309360" y="1600200"/>
+            <a:ext cx="5303520" cy="1920240"/>
+          </a:xfrm>
+          <a:prstGeom prst="roundRect">
+            <a:avLst>
+              <a:gd name="adj" fmla="val 3810"/>
+            </a:avLst>
+          </a:prstGeom>
+          <a:solidFill>
+            <a:srgbClr val="18212E"/>
+          </a:solidFill>
+          <a:ln/>
+        </p:spPr>
+      </p:sp>
+      <p:sp>
+        <p:nvSpPr>
+          <p:cNvPr id="9" name="Text 7"/>
+          <p:cNvSpPr/>
+          <p:nvPr/>
+        </p:nvSpPr>
+        <p:spPr>
+          <a:xfrm>
+            <a:off x="6565392" y="1801368"/>
+            <a:ext cx="1417320" cy="502920"/>
+          </a:xfrm>
+          <a:prstGeom prst="roundRect">
+            <a:avLst>
+              <a:gd name="adj" fmla="val 14545"/>
+            </a:avLst>
+          </a:prstGeom>
+          <a:solidFill>
+            <a:srgbClr val="E8A33D"/>
+          </a:solidFill>
+          <a:ln/>
+        </p:spPr>
+        <p:txBody>
+          <a:bodyPr wrap="square" rtlCol="0" anchor="ctr"/>
+          <a:lstStyle/>
+          <a:p>
+            <a:pPr algn="ctr" indent="0" marL="0">
+              <a:buNone/>
+            </a:pPr>
+            <a:r>
+              <a:rPr lang="en-US" sz="1500" b="1" dirty="0">
+                <a:solidFill>
+                  <a:srgbClr val="101722"/>
+                </a:solidFill>
+                <a:latin typeface="Courier New" pitchFamily="34" charset="0"/>
+                <a:ea typeface="Courier New" pitchFamily="34" charset="-122"/>
+                <a:cs typeface="Courier New" pitchFamily="34" charset="-120"/>
+              </a:rPr>
+              <a:t>Ex 2</a:t>
+            </a:r>
+            <a:endParaRPr lang="en-US" sz="1500" dirty="0"/>
+          </a:p>
+        </p:txBody>
+      </p:sp>
+      <p:sp>
+        <p:nvSpPr>
+          <p:cNvPr id="10" name="Text 8"/>
+          <p:cNvSpPr/>
+          <p:nvPr/>
+        </p:nvSpPr>
+        <p:spPr>
+          <a:xfrm>
+            <a:off x="8138160" y="1819656"/>
+            <a:ext cx="3246120" cy="822960"/>
+          </a:xfrm>
+          <a:prstGeom prst="rect">
+            <a:avLst/>
+          </a:prstGeom>
+          <a:noFill/>
+          <a:ln/>
+        </p:spPr>
+        <p:txBody>
+          <a:bodyPr wrap="square" lIns="0" tIns="0" rIns="0" bIns="0" rtlCol="0" anchor="t"/>
+          <a:lstStyle/>
+          <a:p>
+            <a:pPr indent="0" marL="0">
+              <a:buNone/>
+            </a:pPr>
+            <a:r>
+              <a:rPr lang="en-US" sz="1700" b="1" dirty="0">
+                <a:solidFill>
+                  <a:srgbClr val="E7EDF5"/>
+                </a:solidFill>
+                <a:latin typeface="Malgun Gothic" pitchFamily="34" charset="0"/>
+                <a:ea typeface="Malgun Gothic" pitchFamily="34" charset="-122"/>
+                <a:cs typeface="Malgun Gothic" pitchFamily="34" charset="-120"/>
+              </a:rPr>
+              <a:t>__popc 확인</a:t>
+            </a:r>
+            <a:endParaRPr lang="en-US" sz="1700" dirty="0"/>
+          </a:p>
+        </p:txBody>
+      </p:sp>
+      <p:sp>
+        <p:nvSpPr>
+          <p:cNvPr id="11" name="Text 9"/>
+          <p:cNvSpPr/>
+          <p:nvPr/>
+        </p:nvSpPr>
+        <p:spPr>
+          <a:xfrm>
+            <a:off x="6565392" y="2697480"/>
+            <a:ext cx="4791456" cy="731520"/>
+          </a:xfrm>
+          <a:prstGeom prst="rect">
+            <a:avLst/>
+          </a:prstGeom>
+          <a:noFill/>
+          <a:ln/>
+        </p:spPr>
+        <p:txBody>
+          <a:bodyPr wrap="square" lIns="0" tIns="0" rIns="0" bIns="0" rtlCol="0" anchor="t"/>
+          <a:lstStyle/>
+          <a:p>
+            <a:pPr indent="0" marL="0">
+              <a:lnSpc>
+                <a:spcPct val="110000"/>
+              </a:lnSpc>
+              <a:buNone/>
+            </a:pPr>
+            <a:r>
+              <a:rPr lang="en-US" sz="1350" dirty="0">
+                <a:solidFill>
+                  <a:srgbClr val="9FB0C4"/>
+                </a:solidFill>
+                <a:latin typeface="Malgun Gothic" pitchFamily="34" charset="0"/>
+                <a:ea typeface="Malgun Gothic" pitchFamily="34" charset="-122"/>
+                <a:cs typeface="Malgun Gothic" pitchFamily="34" charset="-120"/>
+              </a:rPr>
+              <a:t>손상 비트 수와 집계 오류 수가 일치하는지</a:t>
+            </a:r>
+            <a:endParaRPr lang="en-US" sz="1350" dirty="0"/>
+          </a:p>
+        </p:txBody>
+      </p:sp>
+      <p:sp>
+        <p:nvSpPr>
+          <p:cNvPr id="12" name="Shape 10"/>
+          <p:cNvSpPr/>
+          <p:nvPr/>
+        </p:nvSpPr>
+        <p:spPr>
+          <a:xfrm>
+            <a:off x="548640" y="3840480"/>
+            <a:ext cx="5303520" cy="1920240"/>
+          </a:xfrm>
+          <a:prstGeom prst="roundRect">
+            <a:avLst>
+              <a:gd name="adj" fmla="val 3810"/>
+            </a:avLst>
+          </a:prstGeom>
+          <a:solidFill>
+            <a:srgbClr val="18212E"/>
+          </a:solidFill>
+          <a:ln/>
+        </p:spPr>
+      </p:sp>
+      <p:sp>
+        <p:nvSpPr>
+          <p:cNvPr id="13" name="Text 11"/>
+          <p:cNvSpPr/>
+          <p:nvPr/>
+        </p:nvSpPr>
+        <p:spPr>
+          <a:xfrm>
+            <a:off x="804672" y="4041648"/>
+            <a:ext cx="1417320" cy="502920"/>
+          </a:xfrm>
+          <a:prstGeom prst="roundRect">
+            <a:avLst>
+              <a:gd name="adj" fmla="val 14545"/>
+            </a:avLst>
+          </a:prstGeom>
+          <a:solidFill>
+            <a:srgbClr val="3FB8C4"/>
+          </a:solidFill>
+          <a:ln/>
+        </p:spPr>
+        <p:txBody>
+          <a:bodyPr wrap="square" rtlCol="0" anchor="ctr"/>
+          <a:lstStyle/>
+          <a:p>
+            <a:pPr algn="ctr" indent="0" marL="0">
+              <a:buNone/>
+            </a:pPr>
+            <a:r>
+              <a:rPr lang="en-US" sz="1500" b="1" dirty="0">
+                <a:solidFill>
+                  <a:srgbClr val="101722"/>
+                </a:solidFill>
+                <a:latin typeface="Courier New" pitchFamily="34" charset="0"/>
+                <a:ea typeface="Courier New" pitchFamily="34" charset="-122"/>
+                <a:cs typeface="Courier New" pitchFamily="34" charset="-120"/>
+              </a:rPr>
+              <a:t>Ex 3</a:t>
+            </a:r>
+            <a:endParaRPr lang="en-US" sz="1500" dirty="0"/>
+          </a:p>
+        </p:txBody>
+      </p:sp>
+      <p:sp>
+        <p:nvSpPr>
+          <p:cNvPr id="14" name="Text 12"/>
+          <p:cNvSpPr/>
+          <p:nvPr/>
+        </p:nvSpPr>
+        <p:spPr>
+          <a:xfrm>
+            <a:off x="2377440" y="4059936"/>
+            <a:ext cx="3246120" cy="822960"/>
+          </a:xfrm>
+          <a:prstGeom prst="rect">
+            <a:avLst/>
+          </a:prstGeom>
+          <a:noFill/>
+          <a:ln/>
+        </p:spPr>
+        <p:txBody>
+          <a:bodyPr wrap="square" lIns="0" tIns="0" rIns="0" bIns="0" rtlCol="0" anchor="t"/>
+          <a:lstStyle/>
+          <a:p>
+            <a:pPr indent="0" marL="0">
+              <a:buNone/>
+            </a:pPr>
+            <a:r>
+              <a:rPr lang="en-US" sz="1700" b="1" dirty="0">
+                <a:solidFill>
+                  <a:srgbClr val="E7EDF5"/>
+                </a:solidFill>
+                <a:latin typeface="Malgun Gothic" pitchFamily="34" charset="0"/>
+                <a:ea typeface="Malgun Gothic" pitchFamily="34" charset="-122"/>
+                <a:cs typeface="Malgun Gothic" pitchFamily="34" charset="-120"/>
+              </a:rPr>
+              <a:t>블록 합 훔쳐보기</a:t>
+            </a:r>
+            <a:endParaRPr lang="en-US" sz="1700" dirty="0"/>
+          </a:p>
+        </p:txBody>
+      </p:sp>
+      <p:sp>
+        <p:nvSpPr>
+          <p:cNvPr id="15" name="Text 13"/>
+          <p:cNvSpPr/>
+          <p:nvPr/>
+        </p:nvSpPr>
+        <p:spPr>
+          <a:xfrm>
+            <a:off x="804672" y="4937760"/>
+            <a:ext cx="4791456" cy="731520"/>
+          </a:xfrm>
+          <a:prstGeom prst="rect">
+            <a:avLst/>
+          </a:prstGeom>
+          <a:noFill/>
+          <a:ln/>
+        </p:spPr>
+        <p:txBody>
+          <a:bodyPr wrap="square" lIns="0" tIns="0" rIns="0" bIns="0" rtlCol="0" anchor="t"/>
+          <a:lstStyle/>
+          <a:p>
+            <a:pPr indent="0" marL="0">
+              <a:lnSpc>
+                <a:spcPct val="110000"/>
+              </a:lnSpc>
+              <a:buNone/>
+            </a:pPr>
+            <a:r>
+              <a:rPr lang="en-US" sz="1350" dirty="0">
+                <a:solidFill>
+                  <a:srgbClr val="9FB0C4"/>
+                </a:solidFill>
+                <a:latin typeface="Malgun Gothic" pitchFamily="34" charset="0"/>
+                <a:ea typeface="Malgun Gothic" pitchFamily="34" charset="-122"/>
+                <a:cs typeface="Malgun Gothic" pitchFamily="34" charset="-120"/>
+              </a:rPr>
+              <a:t>blockErrorCount를 출력해 분포 확인</a:t>
+            </a:r>
+            <a:endParaRPr lang="en-US" sz="1350" dirty="0"/>
+          </a:p>
+        </p:txBody>
+      </p:sp>
+      <p:sp>
+        <p:nvSpPr>
+          <p:cNvPr id="16" name="Shape 14"/>
+          <p:cNvSpPr/>
+          <p:nvPr/>
+        </p:nvSpPr>
+        <p:spPr>
+          <a:xfrm>
+            <a:off x="6309360" y="3840480"/>
+            <a:ext cx="5303520" cy="1920240"/>
+          </a:xfrm>
+          <a:prstGeom prst="roundRect">
+            <a:avLst>
+              <a:gd name="adj" fmla="val 3810"/>
+            </a:avLst>
+          </a:prstGeom>
+          <a:solidFill>
+            <a:srgbClr val="18212E"/>
+          </a:solidFill>
+          <a:ln/>
+        </p:spPr>
+      </p:sp>
+      <p:sp>
+        <p:nvSpPr>
+          <p:cNvPr id="17" name="Text 15"/>
+          <p:cNvSpPr/>
+          <p:nvPr/>
+        </p:nvSpPr>
+        <p:spPr>
+          <a:xfrm>
+            <a:off x="6565392" y="4041648"/>
+            <a:ext cx="1417320" cy="502920"/>
+          </a:xfrm>
+          <a:prstGeom prst="roundRect">
+            <a:avLst>
+              <a:gd name="adj" fmla="val 14545"/>
+            </a:avLst>
+          </a:prstGeom>
+          <a:solidFill>
+            <a:srgbClr val="E8A33D"/>
+          </a:solidFill>
+          <a:ln/>
+        </p:spPr>
+        <p:txBody>
+          <a:bodyPr wrap="square" rtlCol="0" anchor="ctr"/>
+          <a:lstStyle/>
+          <a:p>
+            <a:pPr algn="ctr" indent="0" marL="0">
+              <a:buNone/>
+            </a:pPr>
+            <a:r>
+              <a:rPr lang="en-US" sz="1500" b="1" dirty="0">
+                <a:solidFill>
+                  <a:srgbClr val="101722"/>
+                </a:solidFill>
+                <a:latin typeface="Courier New" pitchFamily="34" charset="0"/>
+                <a:ea typeface="Courier New" pitchFamily="34" charset="-122"/>
+                <a:cs typeface="Courier New" pitchFamily="34" charset="-120"/>
+              </a:rPr>
+              <a:t>Ex 4</a:t>
+            </a:r>
+            <a:endParaRPr lang="en-US" sz="1500" dirty="0"/>
+          </a:p>
+        </p:txBody>
+      </p:sp>
+      <p:sp>
+        <p:nvSpPr>
+          <p:cNvPr id="18" name="Text 16"/>
+          <p:cNvSpPr/>
+          <p:nvPr/>
+        </p:nvSpPr>
+        <p:spPr>
+          <a:xfrm>
+            <a:off x="8138160" y="4059936"/>
+            <a:ext cx="3246120" cy="822960"/>
+          </a:xfrm>
+          <a:prstGeom prst="rect">
+            <a:avLst/>
+          </a:prstGeom>
+          <a:noFill/>
+          <a:ln/>
+        </p:spPr>
+        <p:txBody>
+          <a:bodyPr wrap="square" lIns="0" tIns="0" rIns="0" bIns="0" rtlCol="0" anchor="t"/>
+          <a:lstStyle/>
+          <a:p>
+            <a:pPr indent="0" marL="0">
+              <a:buNone/>
+            </a:pPr>
+            <a:r>
+              <a:rPr lang="en-US" sz="1700" b="1" dirty="0">
+                <a:solidFill>
+                  <a:srgbClr val="E7EDF5"/>
+                </a:solidFill>
+                <a:latin typeface="Malgun Gothic" pitchFamily="34" charset="0"/>
+                <a:ea typeface="Malgun Gothic" pitchFamily="34" charset="-122"/>
+                <a:cs typeface="Malgun Gothic" pitchFamily="34" charset="-120"/>
+              </a:rPr>
+              <a:t>shmem 크기 실험</a:t>
+            </a:r>
+            <a:endParaRPr lang="en-US" sz="1700" dirty="0"/>
+          </a:p>
+        </p:txBody>
+      </p:sp>
+      <p:sp>
+        <p:nvSpPr>
+          <p:cNvPr id="19" name="Text 17"/>
+          <p:cNvSpPr/>
+          <p:nvPr/>
+        </p:nvSpPr>
+        <p:spPr>
+          <a:xfrm>
+            <a:off x="6565392" y="4937760"/>
+            <a:ext cx="4791456" cy="731520"/>
+          </a:xfrm>
+          <a:prstGeom prst="rect">
+            <a:avLst/>
+          </a:prstGeom>
+          <a:noFill/>
+          <a:ln/>
+        </p:spPr>
+        <p:txBody>
+          <a:bodyPr wrap="square" lIns="0" tIns="0" rIns="0" bIns="0" rtlCol="0" anchor="t"/>
+          <a:lstStyle/>
+          <a:p>
+            <a:pPr indent="0" marL="0">
+              <a:lnSpc>
+                <a:spcPct val="110000"/>
+              </a:lnSpc>
+              <a:buNone/>
+            </a:pPr>
+            <a:r>
+              <a:rPr lang="en-US" sz="1350" dirty="0">
+                <a:solidFill>
+                  <a:srgbClr val="9FB0C4"/>
+                </a:solidFill>
+                <a:latin typeface="Malgun Gothic" pitchFamily="34" charset="0"/>
+                <a:ea typeface="Malgun Gothic" pitchFamily="34" charset="-122"/>
+                <a:cs typeface="Malgun Gothic" pitchFamily="34" charset="-120"/>
+              </a:rPr>
+              <a:t>공유 메모리 지정을 바꿔 동작 변화 관찰</a:t>
+            </a:r>
+            <a:endParaRPr lang="en-US" sz="1350" dirty="0"/>
+          </a:p>
+        </p:txBody>
+      </p:sp>
+    </p:spTree>
+  </p:cSld>
+  <p:clrMapOvr>
+    <a:masterClrMapping/>
+  </p:clrMapOvr>
+</p:sld>
+</file>
+
+<file path=ppt/slides/slide11.xml><?xml version="1.0" encoding="utf-8"?>
+<p:sld xmlns:a="http://schemas.openxmlformats.org/drawingml/2006/main" xmlns:r="http://schemas.openxmlformats.org/officeDocument/2006/relationships" xmlns:p="http://schemas.openxmlformats.org/presentationml/2006/main">
+  <p:cSld name="Slide 11">
+    <p:bg>
+      <p:bgPr>
+        <a:solidFill>
+          <a:srgbClr val="101722"/>
+        </a:solidFill>
+      </p:bgPr>
+    </p:bg>
+    <p:spTree>
+      <p:nvGrpSpPr>
+        <p:cNvPr id="1" name=""/>
+        <p:cNvGrpSpPr/>
+        <p:nvPr/>
+      </p:nvGrpSpPr>
+      <p:grpSpPr>
+        <a:xfrm>
+          <a:off x="0" y="0"/>
+          <a:ext cx="0" cy="0"/>
+          <a:chOff x="0" y="0"/>
+          <a:chExt cx="0" cy="0"/>
+        </a:xfrm>
+      </p:grpSpPr>
+      <p:sp>
+        <p:nvSpPr>
+          <p:cNvPr id="2" name="Text 0"/>
+          <p:cNvSpPr/>
+          <p:nvPr/>
+        </p:nvSpPr>
+        <p:spPr>
+          <a:xfrm>
             <a:off x="548640" y="1463040"/>
             <a:ext cx="10058400" cy="457200"/>
           </a:xfrm>
@@ -3514,7 +4301,7 @@
             </a:avLst>
           </a:prstGeom>
           <a:solidFill>
-            <a:srgbClr val="E8A33D"/>
+            <a:srgbClr val="3FB8C4"/>
           </a:solidFill>
           <a:ln/>
         </p:spPr>
@@ -3534,7 +4321,7 @@
                 <a:ea typeface="Courier New" pitchFamily="34" charset="-122"/>
                 <a:cs typeface="Courier New" pitchFamily="34" charset="-120"/>
               </a:rPr>
-              <a:t>3</a:t>
+              <a:t>2</a:t>
             </a:r>
             <a:endParaRPr lang="en-US" sz="2200" dirty="0"/>
           </a:p>
@@ -3573,7 +4360,7 @@
                 <a:ea typeface="Malgun Gothic" pitchFamily="34" charset="-122"/>
                 <a:cs typeface="Malgun Gothic" pitchFamily="34" charset="-120"/>
               </a:rPr>
-              <a:t>틀린 비트 세기 · __popc</a:t>
+              <a:t>두 가지 합산 전략 · 그림으로</a:t>
             </a:r>
             <a:endParaRPr lang="en-US" sz="2900" dirty="0"/>
           </a:p>
@@ -3587,18 +4374,84 @@
         </p:nvSpPr>
         <p:spPr>
           <a:xfrm>
-            <a:off x="548640" y="1508760"/>
-            <a:ext cx="11064240" cy="1005840"/>
+            <a:off x="548640" y="1554480"/>
+            <a:ext cx="5303520" cy="4206240"/>
           </a:xfrm>
           <a:prstGeom prst="roundRect">
             <a:avLst>
-              <a:gd name="adj" fmla="val 4545"/>
+              <a:gd name="adj" fmla="val 1739"/>
+            </a:avLst>
+          </a:prstGeom>
+          <a:solidFill>
+            <a:srgbClr val="18212E"/>
+          </a:solidFill>
+          <a:ln w="19050">
+            <a:solidFill>
+              <a:srgbClr val="E6604F"/>
+            </a:solidFill>
+            <a:prstDash val="solid"/>
+          </a:ln>
+        </p:spPr>
+      </p:sp>
+      <p:sp>
+        <p:nvSpPr>
+          <p:cNvPr id="5" name="Text 3"/>
+          <p:cNvSpPr/>
+          <p:nvPr/>
+        </p:nvSpPr>
+        <p:spPr>
+          <a:xfrm>
+            <a:off x="777240" y="1691640"/>
+            <a:ext cx="4846320" cy="365760"/>
+          </a:xfrm>
+          <a:prstGeom prst="rect">
+            <a:avLst/>
+          </a:prstGeom>
+          <a:noFill/>
+          <a:ln/>
+        </p:spPr>
+        <p:txBody>
+          <a:bodyPr wrap="square" lIns="0" tIns="0" rIns="0" bIns="0" rtlCol="0" anchor="ctr"/>
+          <a:lstStyle/>
+          <a:p>
+            <a:pPr indent="0" marL="0">
+              <a:buNone/>
+            </a:pPr>
+            <a:r>
+              <a:rPr lang="en-US" sz="1500" b="1" dirty="0">
+                <a:solidFill>
+                  <a:srgbClr val="E6604F"/>
+                </a:solidFill>
+                <a:latin typeface="Malgun Gothic" pitchFamily="34" charset="0"/>
+                <a:ea typeface="Malgun Gothic" pitchFamily="34" charset="-122"/>
+                <a:cs typeface="Malgun Gothic" pitchFamily="34" charset="-120"/>
+              </a:rPr>
+              <a:t>① 전역 원자합 (순진한 방법)</a:t>
+            </a:r>
+            <a:endParaRPr lang="en-US" sz="1500" dirty="0"/>
+          </a:p>
+        </p:txBody>
+      </p:sp>
+      <p:sp>
+        <p:nvSpPr>
+          <p:cNvPr id="6" name="Shape 4"/>
+          <p:cNvSpPr/>
+          <p:nvPr/>
+        </p:nvSpPr>
+        <p:spPr>
+          <a:xfrm>
+            <a:off x="868680" y="2194560"/>
+            <a:ext cx="822960" cy="548640"/>
+          </a:xfrm>
+          <a:prstGeom prst="roundRect">
+            <a:avLst>
+              <a:gd name="adj" fmla="val 8333"/>
             </a:avLst>
           </a:prstGeom>
           <a:solidFill>
             <a:srgbClr val="0B1119"/>
           </a:solidFill>
-          <a:ln w="12700">
+          <a:ln w="19050">
             <a:solidFill>
               <a:srgbClr val="2C3A4E"/>
             </a:solidFill>
@@ -3608,14 +4461,542 @@
       </p:sp>
       <p:sp>
         <p:nvSpPr>
-          <p:cNvPr id="5" name="Text 3"/>
-          <p:cNvSpPr/>
-          <p:nvPr/>
-        </p:nvSpPr>
-        <p:spPr>
-          <a:xfrm>
-            <a:off x="768096" y="1655064"/>
-            <a:ext cx="10625328" cy="713232"/>
+          <p:cNvPr id="7" name="Text 5"/>
+          <p:cNvSpPr/>
+          <p:nvPr/>
+        </p:nvSpPr>
+        <p:spPr>
+          <a:xfrm>
+            <a:off x="978408" y="2286000"/>
+            <a:ext cx="603504" cy="365760"/>
+          </a:xfrm>
+          <a:prstGeom prst="rect">
+            <a:avLst/>
+          </a:prstGeom>
+          <a:noFill/>
+          <a:ln/>
+        </p:spPr>
+        <p:txBody>
+          <a:bodyPr wrap="square" lIns="0" tIns="0" rIns="0" bIns="0" rtlCol="0" anchor="ctr"/>
+          <a:lstStyle/>
+          <a:p>
+            <a:pPr algn="ctr" indent="0" marL="0">
+              <a:buNone/>
+            </a:pPr>
+            <a:r>
+              <a:rPr lang="en-US" sz="1400" b="1" dirty="0">
+                <a:solidFill>
+                  <a:srgbClr val="2C3A4E"/>
+                </a:solidFill>
+                <a:latin typeface="Malgun Gothic" pitchFamily="34" charset="0"/>
+                <a:ea typeface="Malgun Gothic" pitchFamily="34" charset="-122"/>
+                <a:cs typeface="Malgun Gothic" pitchFamily="34" charset="-120"/>
+              </a:rPr>
+              <a:t>T0</a:t>
+            </a:r>
+            <a:endParaRPr lang="en-US" sz="1400" dirty="0"/>
+          </a:p>
+        </p:txBody>
+      </p:sp>
+      <p:sp>
+        <p:nvSpPr>
+          <p:cNvPr id="8" name="Shape 6"/>
+          <p:cNvSpPr/>
+          <p:nvPr/>
+        </p:nvSpPr>
+        <p:spPr>
+          <a:xfrm>
+            <a:off x="1801368" y="2194560"/>
+            <a:ext cx="822960" cy="548640"/>
+          </a:xfrm>
+          <a:prstGeom prst="roundRect">
+            <a:avLst>
+              <a:gd name="adj" fmla="val 8333"/>
+            </a:avLst>
+          </a:prstGeom>
+          <a:solidFill>
+            <a:srgbClr val="0B1119"/>
+          </a:solidFill>
+          <a:ln w="19050">
+            <a:solidFill>
+              <a:srgbClr val="2C3A4E"/>
+            </a:solidFill>
+            <a:prstDash val="solid"/>
+          </a:ln>
+        </p:spPr>
+      </p:sp>
+      <p:sp>
+        <p:nvSpPr>
+          <p:cNvPr id="9" name="Text 7"/>
+          <p:cNvSpPr/>
+          <p:nvPr/>
+        </p:nvSpPr>
+        <p:spPr>
+          <a:xfrm>
+            <a:off x="1911096" y="2286000"/>
+            <a:ext cx="603504" cy="365760"/>
+          </a:xfrm>
+          <a:prstGeom prst="rect">
+            <a:avLst/>
+          </a:prstGeom>
+          <a:noFill/>
+          <a:ln/>
+        </p:spPr>
+        <p:txBody>
+          <a:bodyPr wrap="square" lIns="0" tIns="0" rIns="0" bIns="0" rtlCol="0" anchor="ctr"/>
+          <a:lstStyle/>
+          <a:p>
+            <a:pPr algn="ctr" indent="0" marL="0">
+              <a:buNone/>
+            </a:pPr>
+            <a:r>
+              <a:rPr lang="en-US" sz="1400" b="1" dirty="0">
+                <a:solidFill>
+                  <a:srgbClr val="2C3A4E"/>
+                </a:solidFill>
+                <a:latin typeface="Malgun Gothic" pitchFamily="34" charset="0"/>
+                <a:ea typeface="Malgun Gothic" pitchFamily="34" charset="-122"/>
+                <a:cs typeface="Malgun Gothic" pitchFamily="34" charset="-120"/>
+              </a:rPr>
+              <a:t>T1</a:t>
+            </a:r>
+            <a:endParaRPr lang="en-US" sz="1400" dirty="0"/>
+          </a:p>
+        </p:txBody>
+      </p:sp>
+      <p:sp>
+        <p:nvSpPr>
+          <p:cNvPr id="10" name="Shape 8"/>
+          <p:cNvSpPr/>
+          <p:nvPr/>
+        </p:nvSpPr>
+        <p:spPr>
+          <a:xfrm>
+            <a:off x="2734056" y="2194560"/>
+            <a:ext cx="822960" cy="548640"/>
+          </a:xfrm>
+          <a:prstGeom prst="roundRect">
+            <a:avLst>
+              <a:gd name="adj" fmla="val 8333"/>
+            </a:avLst>
+          </a:prstGeom>
+          <a:solidFill>
+            <a:srgbClr val="0B1119"/>
+          </a:solidFill>
+          <a:ln w="19050">
+            <a:solidFill>
+              <a:srgbClr val="2C3A4E"/>
+            </a:solidFill>
+            <a:prstDash val="solid"/>
+          </a:ln>
+        </p:spPr>
+      </p:sp>
+      <p:sp>
+        <p:nvSpPr>
+          <p:cNvPr id="11" name="Text 9"/>
+          <p:cNvSpPr/>
+          <p:nvPr/>
+        </p:nvSpPr>
+        <p:spPr>
+          <a:xfrm>
+            <a:off x="2843784" y="2286000"/>
+            <a:ext cx="603504" cy="365760"/>
+          </a:xfrm>
+          <a:prstGeom prst="rect">
+            <a:avLst/>
+          </a:prstGeom>
+          <a:noFill/>
+          <a:ln/>
+        </p:spPr>
+        <p:txBody>
+          <a:bodyPr wrap="square" lIns="0" tIns="0" rIns="0" bIns="0" rtlCol="0" anchor="ctr"/>
+          <a:lstStyle/>
+          <a:p>
+            <a:pPr algn="ctr" indent="0" marL="0">
+              <a:buNone/>
+            </a:pPr>
+            <a:r>
+              <a:rPr lang="en-US" sz="1400" b="1" dirty="0">
+                <a:solidFill>
+                  <a:srgbClr val="2C3A4E"/>
+                </a:solidFill>
+                <a:latin typeface="Malgun Gothic" pitchFamily="34" charset="0"/>
+                <a:ea typeface="Malgun Gothic" pitchFamily="34" charset="-122"/>
+                <a:cs typeface="Malgun Gothic" pitchFamily="34" charset="-120"/>
+              </a:rPr>
+              <a:t>T2</a:t>
+            </a:r>
+            <a:endParaRPr lang="en-US" sz="1400" dirty="0"/>
+          </a:p>
+        </p:txBody>
+      </p:sp>
+      <p:sp>
+        <p:nvSpPr>
+          <p:cNvPr id="12" name="Shape 10"/>
+          <p:cNvSpPr/>
+          <p:nvPr/>
+        </p:nvSpPr>
+        <p:spPr>
+          <a:xfrm>
+            <a:off x="3666744" y="2194560"/>
+            <a:ext cx="822960" cy="548640"/>
+          </a:xfrm>
+          <a:prstGeom prst="roundRect">
+            <a:avLst>
+              <a:gd name="adj" fmla="val 8333"/>
+            </a:avLst>
+          </a:prstGeom>
+          <a:solidFill>
+            <a:srgbClr val="0B1119"/>
+          </a:solidFill>
+          <a:ln w="19050">
+            <a:solidFill>
+              <a:srgbClr val="2C3A4E"/>
+            </a:solidFill>
+            <a:prstDash val="solid"/>
+          </a:ln>
+        </p:spPr>
+      </p:sp>
+      <p:sp>
+        <p:nvSpPr>
+          <p:cNvPr id="13" name="Text 11"/>
+          <p:cNvSpPr/>
+          <p:nvPr/>
+        </p:nvSpPr>
+        <p:spPr>
+          <a:xfrm>
+            <a:off x="3776472" y="2286000"/>
+            <a:ext cx="603504" cy="365760"/>
+          </a:xfrm>
+          <a:prstGeom prst="rect">
+            <a:avLst/>
+          </a:prstGeom>
+          <a:noFill/>
+          <a:ln/>
+        </p:spPr>
+        <p:txBody>
+          <a:bodyPr wrap="square" lIns="0" tIns="0" rIns="0" bIns="0" rtlCol="0" anchor="ctr"/>
+          <a:lstStyle/>
+          <a:p>
+            <a:pPr algn="ctr" indent="0" marL="0">
+              <a:buNone/>
+            </a:pPr>
+            <a:r>
+              <a:rPr lang="en-US" sz="1400" b="1" dirty="0">
+                <a:solidFill>
+                  <a:srgbClr val="2C3A4E"/>
+                </a:solidFill>
+                <a:latin typeface="Malgun Gothic" pitchFamily="34" charset="0"/>
+                <a:ea typeface="Malgun Gothic" pitchFamily="34" charset="-122"/>
+                <a:cs typeface="Malgun Gothic" pitchFamily="34" charset="-120"/>
+              </a:rPr>
+              <a:t>T3</a:t>
+            </a:r>
+            <a:endParaRPr lang="en-US" sz="1400" dirty="0"/>
+          </a:p>
+        </p:txBody>
+      </p:sp>
+      <p:sp>
+        <p:nvSpPr>
+          <p:cNvPr id="14" name="Shape 12"/>
+          <p:cNvSpPr/>
+          <p:nvPr/>
+        </p:nvSpPr>
+        <p:spPr>
+          <a:xfrm>
+            <a:off x="4599432" y="2194560"/>
+            <a:ext cx="822960" cy="548640"/>
+          </a:xfrm>
+          <a:prstGeom prst="roundRect">
+            <a:avLst>
+              <a:gd name="adj" fmla="val 8333"/>
+            </a:avLst>
+          </a:prstGeom>
+          <a:solidFill>
+            <a:srgbClr val="0B1119"/>
+          </a:solidFill>
+          <a:ln w="19050">
+            <a:solidFill>
+              <a:srgbClr val="2C3A4E"/>
+            </a:solidFill>
+            <a:prstDash val="solid"/>
+          </a:ln>
+        </p:spPr>
+      </p:sp>
+      <p:sp>
+        <p:nvSpPr>
+          <p:cNvPr id="15" name="Text 13"/>
+          <p:cNvSpPr/>
+          <p:nvPr/>
+        </p:nvSpPr>
+        <p:spPr>
+          <a:xfrm>
+            <a:off x="4709160" y="2286000"/>
+            <a:ext cx="603504" cy="365760"/>
+          </a:xfrm>
+          <a:prstGeom prst="rect">
+            <a:avLst/>
+          </a:prstGeom>
+          <a:noFill/>
+          <a:ln/>
+        </p:spPr>
+        <p:txBody>
+          <a:bodyPr wrap="square" lIns="0" tIns="0" rIns="0" bIns="0" rtlCol="0" anchor="ctr"/>
+          <a:lstStyle/>
+          <a:p>
+            <a:pPr algn="ctr" indent="0" marL="0">
+              <a:buNone/>
+            </a:pPr>
+            <a:r>
+              <a:rPr lang="en-US" sz="1400" b="1" dirty="0">
+                <a:solidFill>
+                  <a:srgbClr val="2C3A4E"/>
+                </a:solidFill>
+                <a:latin typeface="Malgun Gothic" pitchFamily="34" charset="0"/>
+                <a:ea typeface="Malgun Gothic" pitchFamily="34" charset="-122"/>
+                <a:cs typeface="Malgun Gothic" pitchFamily="34" charset="-120"/>
+              </a:rPr>
+              <a:t>T4</a:t>
+            </a:r>
+            <a:endParaRPr lang="en-US" sz="1400" dirty="0"/>
+          </a:p>
+        </p:txBody>
+      </p:sp>
+      <p:sp>
+        <p:nvSpPr>
+          <p:cNvPr id="16" name="Text 14"/>
+          <p:cNvSpPr/>
+          <p:nvPr/>
+        </p:nvSpPr>
+        <p:spPr>
+          <a:xfrm>
+            <a:off x="868680" y="2761488"/>
+            <a:ext cx="4663440" cy="274320"/>
+          </a:xfrm>
+          <a:prstGeom prst="rect">
+            <a:avLst/>
+          </a:prstGeom>
+          <a:noFill/>
+          <a:ln/>
+        </p:spPr>
+        <p:txBody>
+          <a:bodyPr wrap="square" lIns="0" tIns="0" rIns="0" bIns="0" rtlCol="0" anchor="ctr"/>
+          <a:lstStyle/>
+          <a:p>
+            <a:pPr algn="l" indent="0" marL="0">
+              <a:buNone/>
+            </a:pPr>
+            <a:r>
+              <a:rPr lang="en-US" sz="1050" i="1" dirty="0">
+                <a:solidFill>
+                  <a:srgbClr val="9FB0C4"/>
+                </a:solidFill>
+                <a:latin typeface="Malgun Gothic" pitchFamily="34" charset="0"/>
+                <a:ea typeface="Malgun Gothic" pitchFamily="34" charset="-122"/>
+                <a:cs typeface="Malgun Gothic" pitchFamily="34" charset="-120"/>
+              </a:rPr>
+              <a:t>… 52만 스레드</a:t>
+            </a:r>
+            <a:endParaRPr lang="en-US" sz="1050" dirty="0"/>
+          </a:p>
+        </p:txBody>
+      </p:sp>
+      <p:sp>
+        <p:nvSpPr>
+          <p:cNvPr id="17" name="Shape 15"/>
+          <p:cNvSpPr/>
+          <p:nvPr/>
+        </p:nvSpPr>
+        <p:spPr>
+          <a:xfrm>
+            <a:off x="1280160" y="2788920"/>
+            <a:ext cx="1920240" cy="1051560"/>
+          </a:xfrm>
+          <a:prstGeom prst="line">
+            <a:avLst/>
+          </a:prstGeom>
+          <a:noFill/>
+          <a:ln w="15240">
+            <a:solidFill>
+              <a:srgbClr val="E6604F"/>
+            </a:solidFill>
+            <a:prstDash val="solid"/>
+            <a:tailEnd type="triangle"/>
+          </a:ln>
+        </p:spPr>
+      </p:sp>
+      <p:sp>
+        <p:nvSpPr>
+          <p:cNvPr id="18" name="Shape 16"/>
+          <p:cNvSpPr/>
+          <p:nvPr/>
+        </p:nvSpPr>
+        <p:spPr>
+          <a:xfrm>
+            <a:off x="2212848" y="2788920"/>
+            <a:ext cx="987552" cy="1051560"/>
+          </a:xfrm>
+          <a:prstGeom prst="line">
+            <a:avLst/>
+          </a:prstGeom>
+          <a:noFill/>
+          <a:ln w="15240">
+            <a:solidFill>
+              <a:srgbClr val="E6604F"/>
+            </a:solidFill>
+            <a:prstDash val="solid"/>
+            <a:tailEnd type="triangle"/>
+          </a:ln>
+        </p:spPr>
+      </p:sp>
+      <p:sp>
+        <p:nvSpPr>
+          <p:cNvPr id="19" name="Shape 17"/>
+          <p:cNvSpPr/>
+          <p:nvPr/>
+        </p:nvSpPr>
+        <p:spPr>
+          <a:xfrm>
+            <a:off x="3145536" y="2788920"/>
+            <a:ext cx="54864" cy="1051560"/>
+          </a:xfrm>
+          <a:prstGeom prst="line">
+            <a:avLst/>
+          </a:prstGeom>
+          <a:noFill/>
+          <a:ln w="15240">
+            <a:solidFill>
+              <a:srgbClr val="E6604F"/>
+            </a:solidFill>
+            <a:prstDash val="solid"/>
+            <a:tailEnd type="triangle"/>
+          </a:ln>
+        </p:spPr>
+      </p:sp>
+      <p:sp>
+        <p:nvSpPr>
+          <p:cNvPr id="20" name="Shape 18"/>
+          <p:cNvSpPr/>
+          <p:nvPr/>
+        </p:nvSpPr>
+        <p:spPr>
+          <a:xfrm>
+            <a:off x="4078224" y="2788920"/>
+            <a:ext cx="-877824" cy="1051560"/>
+          </a:xfrm>
+          <a:prstGeom prst="line">
+            <a:avLst/>
+          </a:prstGeom>
+          <a:noFill/>
+          <a:ln w="15240">
+            <a:solidFill>
+              <a:srgbClr val="E6604F"/>
+            </a:solidFill>
+            <a:prstDash val="solid"/>
+            <a:tailEnd type="triangle"/>
+          </a:ln>
+        </p:spPr>
+      </p:sp>
+      <p:sp>
+        <p:nvSpPr>
+          <p:cNvPr id="21" name="Shape 19"/>
+          <p:cNvSpPr/>
+          <p:nvPr/>
+        </p:nvSpPr>
+        <p:spPr>
+          <a:xfrm>
+            <a:off x="5010912" y="2788920"/>
+            <a:ext cx="-1810512" cy="1051560"/>
+          </a:xfrm>
+          <a:prstGeom prst="line">
+            <a:avLst/>
+          </a:prstGeom>
+          <a:noFill/>
+          <a:ln w="15240">
+            <a:solidFill>
+              <a:srgbClr val="E6604F"/>
+            </a:solidFill>
+            <a:prstDash val="solid"/>
+            <a:tailEnd type="triangle"/>
+          </a:ln>
+        </p:spPr>
+      </p:sp>
+      <p:sp>
+        <p:nvSpPr>
+          <p:cNvPr id="22" name="Shape 20"/>
+          <p:cNvSpPr/>
+          <p:nvPr/>
+        </p:nvSpPr>
+        <p:spPr>
+          <a:xfrm>
+            <a:off x="2286000" y="3886200"/>
+            <a:ext cx="1828800" cy="640080"/>
+          </a:xfrm>
+          <a:prstGeom prst="roundRect">
+            <a:avLst>
+              <a:gd name="adj" fmla="val 7143"/>
+            </a:avLst>
+          </a:prstGeom>
+          <a:solidFill>
+            <a:srgbClr val="2A1618"/>
+          </a:solidFill>
+          <a:ln w="19050">
+            <a:solidFill>
+              <a:srgbClr val="E6604F"/>
+            </a:solidFill>
+            <a:prstDash val="solid"/>
+          </a:ln>
+        </p:spPr>
+      </p:sp>
+      <p:sp>
+        <p:nvSpPr>
+          <p:cNvPr id="23" name="Text 21"/>
+          <p:cNvSpPr/>
+          <p:nvPr/>
+        </p:nvSpPr>
+        <p:spPr>
+          <a:xfrm>
+            <a:off x="2395728" y="3977640"/>
+            <a:ext cx="1609344" cy="457200"/>
+          </a:xfrm>
+          <a:prstGeom prst="rect">
+            <a:avLst/>
+          </a:prstGeom>
+          <a:noFill/>
+          <a:ln/>
+        </p:spPr>
+        <p:txBody>
+          <a:bodyPr wrap="square" lIns="0" tIns="0" rIns="0" bIns="0" rtlCol="0" anchor="ctr"/>
+          <a:lstStyle/>
+          <a:p>
+            <a:pPr algn="ctr" indent="0" marL="0">
+              <a:buNone/>
+            </a:pPr>
+            <a:r>
+              <a:rPr lang="en-US" sz="1400" b="1" dirty="0">
+                <a:solidFill>
+                  <a:srgbClr val="E6604F"/>
+                </a:solidFill>
+                <a:latin typeface="Malgun Gothic" pitchFamily="34" charset="0"/>
+                <a:ea typeface="Malgun Gothic" pitchFamily="34" charset="-122"/>
+                <a:cs typeface="Malgun Gothic" pitchFamily="34" charset="-120"/>
+              </a:rPr>
+              <a:t>전역 카운터 1개</a:t>
+            </a:r>
+            <a:endParaRPr lang="en-US" sz="1400" dirty="0"/>
+          </a:p>
+        </p:txBody>
+      </p:sp>
+      <p:sp>
+        <p:nvSpPr>
+          <p:cNvPr id="24" name="Text 22"/>
+          <p:cNvSpPr/>
+          <p:nvPr/>
+        </p:nvSpPr>
+        <p:spPr>
+          <a:xfrm>
+            <a:off x="777240" y="4709160"/>
+            <a:ext cx="4846320" cy="822960"/>
           </a:xfrm>
           <a:prstGeom prst="rect">
             <a:avLst/>
@@ -3627,65 +5008,759 @@
           <a:bodyPr wrap="square" lIns="0" tIns="0" rIns="0" bIns="0" rtlCol="0" anchor="t"/>
           <a:lstStyle/>
           <a:p>
-            <a:pPr algn="l" indent="0" marL="0">
+            <a:pPr indent="0" marL="0">
               <a:lnSpc>
-                <a:spcPct val="110000"/>
+                <a:spcPct val="115000"/>
               </a:lnSpc>
               <a:buNone/>
             </a:pPr>
             <a:r>
-              <a:rPr lang="en-US" sz="1400" dirty="0">
-                <a:solidFill>
-                  <a:srgbClr val="F2C079"/>
+              <a:rPr lang="en-US" sz="1300" dirty="0">
+                <a:solidFill>
+                  <a:srgbClr val="E7EDF5"/>
+                </a:solidFill>
+                <a:latin typeface="Malgun Gothic" pitchFamily="34" charset="0"/>
+                <a:ea typeface="Malgun Gothic" pitchFamily="34" charset="-122"/>
+                <a:cs typeface="Malgun Gothic" pitchFamily="34" charset="-120"/>
+              </a:rPr>
+              <a:t>→ 52만 번 경합·직렬화. 느리고, 락 없으면 값이 뭉개짐.</a:t>
+            </a:r>
+            <a:endParaRPr lang="en-US" sz="1300" dirty="0"/>
+          </a:p>
+        </p:txBody>
+      </p:sp>
+      <p:sp>
+        <p:nvSpPr>
+          <p:cNvPr id="25" name="Shape 23"/>
+          <p:cNvSpPr/>
+          <p:nvPr/>
+        </p:nvSpPr>
+        <p:spPr>
+          <a:xfrm>
+            <a:off x="6309360" y="1554480"/>
+            <a:ext cx="5303520" cy="4206240"/>
+          </a:xfrm>
+          <a:prstGeom prst="roundRect">
+            <a:avLst>
+              <a:gd name="adj" fmla="val 1739"/>
+            </a:avLst>
+          </a:prstGeom>
+          <a:solidFill>
+            <a:srgbClr val="18212E"/>
+          </a:solidFill>
+          <a:ln w="19050">
+            <a:solidFill>
+              <a:srgbClr val="3FB8C4"/>
+            </a:solidFill>
+            <a:prstDash val="solid"/>
+          </a:ln>
+        </p:spPr>
+      </p:sp>
+      <p:sp>
+        <p:nvSpPr>
+          <p:cNvPr id="26" name="Text 24"/>
+          <p:cNvSpPr/>
+          <p:nvPr/>
+        </p:nvSpPr>
+        <p:spPr>
+          <a:xfrm>
+            <a:off x="6537960" y="1691640"/>
+            <a:ext cx="4846320" cy="365760"/>
+          </a:xfrm>
+          <a:prstGeom prst="rect">
+            <a:avLst/>
+          </a:prstGeom>
+          <a:noFill/>
+          <a:ln/>
+        </p:spPr>
+        <p:txBody>
+          <a:bodyPr wrap="square" lIns="0" tIns="0" rIns="0" bIns="0" rtlCol="0" anchor="ctr"/>
+          <a:lstStyle/>
+          <a:p>
+            <a:pPr indent="0" marL="0">
+              <a:buNone/>
+            </a:pPr>
+            <a:r>
+              <a:rPr lang="en-US" sz="1500" b="1" dirty="0">
+                <a:solidFill>
+                  <a:srgbClr val="3FB8C4"/>
+                </a:solidFill>
+                <a:latin typeface="Malgun Gothic" pitchFamily="34" charset="0"/>
+                <a:ea typeface="Malgun Gothic" pitchFamily="34" charset="-122"/>
+                <a:cs typeface="Malgun Gothic" pitchFamily="34" charset="-120"/>
+              </a:rPr>
+              <a:t>② 계층 리덕션 (MemtestG80)</a:t>
+            </a:r>
+            <a:endParaRPr lang="en-US" sz="1500" dirty="0"/>
+          </a:p>
+        </p:txBody>
+      </p:sp>
+      <p:sp>
+        <p:nvSpPr>
+          <p:cNvPr id="27" name="Shape 25"/>
+          <p:cNvSpPr/>
+          <p:nvPr/>
+        </p:nvSpPr>
+        <p:spPr>
+          <a:xfrm>
+            <a:off x="6675120" y="2194560"/>
+            <a:ext cx="1554480" cy="685800"/>
+          </a:xfrm>
+          <a:prstGeom prst="roundRect">
+            <a:avLst>
+              <a:gd name="adj" fmla="val 6667"/>
+            </a:avLst>
+          </a:prstGeom>
+          <a:solidFill>
+            <a:srgbClr val="0B1119"/>
+          </a:solidFill>
+          <a:ln w="19050">
+            <a:solidFill>
+              <a:srgbClr val="3FB8C4"/>
+            </a:solidFill>
+            <a:prstDash val="solid"/>
+          </a:ln>
+        </p:spPr>
+      </p:sp>
+      <p:sp>
+        <p:nvSpPr>
+          <p:cNvPr id="28" name="Text 26"/>
+          <p:cNvSpPr/>
+          <p:nvPr/>
+        </p:nvSpPr>
+        <p:spPr>
+          <a:xfrm>
+            <a:off x="6784848" y="2286000"/>
+            <a:ext cx="1335024" cy="365760"/>
+          </a:xfrm>
+          <a:prstGeom prst="rect">
+            <a:avLst/>
+          </a:prstGeom>
+          <a:noFill/>
+          <a:ln/>
+        </p:spPr>
+        <p:txBody>
+          <a:bodyPr wrap="square" lIns="0" tIns="0" rIns="0" bIns="0" rtlCol="0" anchor="t"/>
+          <a:lstStyle/>
+          <a:p>
+            <a:pPr algn="ctr" indent="0" marL="0">
+              <a:buNone/>
+            </a:pPr>
+            <a:r>
+              <a:rPr lang="en-US" sz="1400" b="1" dirty="0">
+                <a:solidFill>
+                  <a:srgbClr val="3FB8C4"/>
+                </a:solidFill>
+                <a:latin typeface="Malgun Gothic" pitchFamily="34" charset="0"/>
+                <a:ea typeface="Malgun Gothic" pitchFamily="34" charset="-122"/>
+                <a:cs typeface="Malgun Gothic" pitchFamily="34" charset="-120"/>
+              </a:rPr>
+              <a:t>블록 0</a:t>
+            </a:r>
+            <a:endParaRPr lang="en-US" sz="1400" dirty="0"/>
+          </a:p>
+        </p:txBody>
+      </p:sp>
+      <p:sp>
+        <p:nvSpPr>
+          <p:cNvPr id="29" name="Text 27"/>
+          <p:cNvSpPr/>
+          <p:nvPr/>
+        </p:nvSpPr>
+        <p:spPr>
+          <a:xfrm>
+            <a:off x="6784848" y="2423160"/>
+            <a:ext cx="1335024" cy="384048"/>
+          </a:xfrm>
+          <a:prstGeom prst="rect">
+            <a:avLst/>
+          </a:prstGeom>
+          <a:noFill/>
+          <a:ln/>
+        </p:spPr>
+        <p:txBody>
+          <a:bodyPr wrap="square" lIns="0" tIns="0" rIns="0" bIns="0" rtlCol="0" anchor="ctr"/>
+          <a:lstStyle/>
+          <a:p>
+            <a:pPr algn="ctr" indent="0" marL="0">
+              <a:buNone/>
+            </a:pPr>
+            <a:r>
+              <a:rPr lang="en-US" sz="1050" dirty="0">
+                <a:solidFill>
+                  <a:srgbClr val="9FB0C4"/>
                 </a:solidFill>
                 <a:latin typeface="Courier New" pitchFamily="34" charset="0"/>
                 <a:ea typeface="Courier New" pitchFamily="34" charset="-122"/>
                 <a:cs typeface="Courier New" pitchFamily="34" charset="-120"/>
               </a:rPr>
-              <a:t>#define BITSDIFF(x,y) __popc((x) ^ (y))    // core.cu:28</a:t>
+              <a:t>트리 합산</a:t>
+            </a:r>
+            <a:endParaRPr lang="en-US" sz="1050" dirty="0"/>
+          </a:p>
+        </p:txBody>
+      </p:sp>
+      <p:sp>
+        <p:nvSpPr>
+          <p:cNvPr id="30" name="Shape 28"/>
+          <p:cNvSpPr/>
+          <p:nvPr/>
+        </p:nvSpPr>
+        <p:spPr>
+          <a:xfrm>
+            <a:off x="7452360" y="2907792"/>
+            <a:ext cx="0" cy="457200"/>
+          </a:xfrm>
+          <a:prstGeom prst="line">
+            <a:avLst/>
+          </a:prstGeom>
+          <a:noFill/>
+          <a:ln w="17780">
+            <a:solidFill>
+              <a:srgbClr val="3FB8C4"/>
+            </a:solidFill>
+            <a:prstDash val="solid"/>
+            <a:tailEnd type="triangle"/>
+          </a:ln>
+        </p:spPr>
+      </p:sp>
+      <p:sp>
+        <p:nvSpPr>
+          <p:cNvPr id="31" name="Shape 29"/>
+          <p:cNvSpPr/>
+          <p:nvPr/>
+        </p:nvSpPr>
+        <p:spPr>
+          <a:xfrm>
+            <a:off x="7086600" y="3383280"/>
+            <a:ext cx="731520" cy="457200"/>
+          </a:xfrm>
+          <a:prstGeom prst="roundRect">
+            <a:avLst>
+              <a:gd name="adj" fmla="val 10000"/>
+            </a:avLst>
+          </a:prstGeom>
+          <a:solidFill>
+            <a:srgbClr val="12212A"/>
+          </a:solidFill>
+          <a:ln w="19050">
+            <a:solidFill>
+              <a:srgbClr val="3FB8C4"/>
+            </a:solidFill>
+            <a:prstDash val="solid"/>
+          </a:ln>
+        </p:spPr>
+      </p:sp>
+      <p:sp>
+        <p:nvSpPr>
+          <p:cNvPr id="32" name="Text 30"/>
+          <p:cNvSpPr/>
+          <p:nvPr/>
+        </p:nvSpPr>
+        <p:spPr>
+          <a:xfrm>
+            <a:off x="7196328" y="3474720"/>
+            <a:ext cx="512064" cy="274320"/>
+          </a:xfrm>
+          <a:prstGeom prst="rect">
+            <a:avLst/>
+          </a:prstGeom>
+          <a:noFill/>
+          <a:ln/>
+        </p:spPr>
+        <p:txBody>
+          <a:bodyPr wrap="square" lIns="0" tIns="0" rIns="0" bIns="0" rtlCol="0" anchor="ctr"/>
+          <a:lstStyle/>
+          <a:p>
+            <a:pPr algn="ctr" indent="0" marL="0">
+              <a:buNone/>
+            </a:pPr>
+            <a:r>
+              <a:rPr lang="en-US" sz="1400" b="1" dirty="0">
+                <a:solidFill>
+                  <a:srgbClr val="3FB8C4"/>
+                </a:solidFill>
+                <a:latin typeface="Malgun Gothic" pitchFamily="34" charset="0"/>
+                <a:ea typeface="Malgun Gothic" pitchFamily="34" charset="-122"/>
+                <a:cs typeface="Malgun Gothic" pitchFamily="34" charset="-120"/>
+              </a:rPr>
+              <a:t>합</a:t>
             </a:r>
             <a:endParaRPr lang="en-US" sz="1400" dirty="0"/>
           </a:p>
-          <a:p>
-            <a:pPr algn="l" indent="0" marL="0">
-              <a:lnSpc>
-                <a:spcPct val="110000"/>
-              </a:lnSpc>
-              <a:buNone/>
-            </a:pPr>
-            <a:r>
-              <a:rPr lang="en-US" sz="1400" dirty="0">
-                <a:solidFill>
-                  <a:srgbClr val="6B7D94"/>
+        </p:txBody>
+      </p:sp>
+      <p:sp>
+        <p:nvSpPr>
+          <p:cNvPr id="33" name="Shape 31"/>
+          <p:cNvSpPr/>
+          <p:nvPr/>
+        </p:nvSpPr>
+        <p:spPr>
+          <a:xfrm>
+            <a:off x="8412480" y="2194560"/>
+            <a:ext cx="1554480" cy="685800"/>
+          </a:xfrm>
+          <a:prstGeom prst="roundRect">
+            <a:avLst>
+              <a:gd name="adj" fmla="val 6667"/>
+            </a:avLst>
+          </a:prstGeom>
+          <a:solidFill>
+            <a:srgbClr val="0B1119"/>
+          </a:solidFill>
+          <a:ln w="19050">
+            <a:solidFill>
+              <a:srgbClr val="3FB8C4"/>
+            </a:solidFill>
+            <a:prstDash val="solid"/>
+          </a:ln>
+        </p:spPr>
+      </p:sp>
+      <p:sp>
+        <p:nvSpPr>
+          <p:cNvPr id="34" name="Text 32"/>
+          <p:cNvSpPr/>
+          <p:nvPr/>
+        </p:nvSpPr>
+        <p:spPr>
+          <a:xfrm>
+            <a:off x="8522208" y="2286000"/>
+            <a:ext cx="1335024" cy="365760"/>
+          </a:xfrm>
+          <a:prstGeom prst="rect">
+            <a:avLst/>
+          </a:prstGeom>
+          <a:noFill/>
+          <a:ln/>
+        </p:spPr>
+        <p:txBody>
+          <a:bodyPr wrap="square" lIns="0" tIns="0" rIns="0" bIns="0" rtlCol="0" anchor="t"/>
+          <a:lstStyle/>
+          <a:p>
+            <a:pPr algn="ctr" indent="0" marL="0">
+              <a:buNone/>
+            </a:pPr>
+            <a:r>
+              <a:rPr lang="en-US" sz="1400" b="1" dirty="0">
+                <a:solidFill>
+                  <a:srgbClr val="3FB8C4"/>
+                </a:solidFill>
+                <a:latin typeface="Malgun Gothic" pitchFamily="34" charset="0"/>
+                <a:ea typeface="Malgun Gothic" pitchFamily="34" charset="-122"/>
+                <a:cs typeface="Malgun Gothic" pitchFamily="34" charset="-120"/>
+              </a:rPr>
+              <a:t>블록 1</a:t>
+            </a:r>
+            <a:endParaRPr lang="en-US" sz="1400" dirty="0"/>
+          </a:p>
+        </p:txBody>
+      </p:sp>
+      <p:sp>
+        <p:nvSpPr>
+          <p:cNvPr id="35" name="Text 33"/>
+          <p:cNvSpPr/>
+          <p:nvPr/>
+        </p:nvSpPr>
+        <p:spPr>
+          <a:xfrm>
+            <a:off x="8522208" y="2423160"/>
+            <a:ext cx="1335024" cy="384048"/>
+          </a:xfrm>
+          <a:prstGeom prst="rect">
+            <a:avLst/>
+          </a:prstGeom>
+          <a:noFill/>
+          <a:ln/>
+        </p:spPr>
+        <p:txBody>
+          <a:bodyPr wrap="square" lIns="0" tIns="0" rIns="0" bIns="0" rtlCol="0" anchor="ctr"/>
+          <a:lstStyle/>
+          <a:p>
+            <a:pPr algn="ctr" indent="0" marL="0">
+              <a:buNone/>
+            </a:pPr>
+            <a:r>
+              <a:rPr lang="en-US" sz="1050" dirty="0">
+                <a:solidFill>
+                  <a:srgbClr val="9FB0C4"/>
                 </a:solidFill>
                 <a:latin typeface="Courier New" pitchFamily="34" charset="0"/>
                 <a:ea typeface="Courier New" pitchFamily="34" charset="-122"/>
                 <a:cs typeface="Courier New" pitchFamily="34" charset="-120"/>
               </a:rPr>
-              <a:t>//  __popc = population count = 1인 비트의 개수</a:t>
-            </a:r>
-            <a:endParaRPr lang="en-US" sz="1400" dirty="0"/>
-          </a:p>
-        </p:txBody>
-      </p:sp>
-      <p:sp>
-        <p:nvSpPr>
-          <p:cNvPr id="6" name="Shape 4"/>
-          <p:cNvSpPr/>
-          <p:nvPr/>
-        </p:nvSpPr>
-        <p:spPr>
-          <a:xfrm>
-            <a:off x="548640" y="2697480"/>
-            <a:ext cx="11064240" cy="1737360"/>
+              <a:t>트리 합산</a:t>
+            </a:r>
+            <a:endParaRPr lang="en-US" sz="1050" dirty="0"/>
+          </a:p>
+        </p:txBody>
+      </p:sp>
+      <p:sp>
+        <p:nvSpPr>
+          <p:cNvPr id="36" name="Shape 34"/>
+          <p:cNvSpPr/>
+          <p:nvPr/>
+        </p:nvSpPr>
+        <p:spPr>
+          <a:xfrm>
+            <a:off x="9189720" y="2907792"/>
+            <a:ext cx="0" cy="457200"/>
+          </a:xfrm>
+          <a:prstGeom prst="line">
+            <a:avLst/>
+          </a:prstGeom>
+          <a:noFill/>
+          <a:ln w="17780">
+            <a:solidFill>
+              <a:srgbClr val="3FB8C4"/>
+            </a:solidFill>
+            <a:prstDash val="solid"/>
+            <a:tailEnd type="triangle"/>
+          </a:ln>
+        </p:spPr>
+      </p:sp>
+      <p:sp>
+        <p:nvSpPr>
+          <p:cNvPr id="37" name="Shape 35"/>
+          <p:cNvSpPr/>
+          <p:nvPr/>
+        </p:nvSpPr>
+        <p:spPr>
+          <a:xfrm>
+            <a:off x="8823960" y="3383280"/>
+            <a:ext cx="731520" cy="457200"/>
           </a:xfrm>
           <a:prstGeom prst="roundRect">
             <a:avLst>
-              <a:gd name="adj" fmla="val 4211"/>
+              <a:gd name="adj" fmla="val 10000"/>
             </a:avLst>
           </a:prstGeom>
           <a:solidFill>
-            <a:srgbClr val="18212E"/>
+            <a:srgbClr val="12212A"/>
+          </a:solidFill>
+          <a:ln w="19050">
+            <a:solidFill>
+              <a:srgbClr val="3FB8C4"/>
+            </a:solidFill>
+            <a:prstDash val="solid"/>
+          </a:ln>
+        </p:spPr>
+      </p:sp>
+      <p:sp>
+        <p:nvSpPr>
+          <p:cNvPr id="38" name="Text 36"/>
+          <p:cNvSpPr/>
+          <p:nvPr/>
+        </p:nvSpPr>
+        <p:spPr>
+          <a:xfrm>
+            <a:off x="8933688" y="3474720"/>
+            <a:ext cx="512064" cy="274320"/>
+          </a:xfrm>
+          <a:prstGeom prst="rect">
+            <a:avLst/>
+          </a:prstGeom>
+          <a:noFill/>
+          <a:ln/>
+        </p:spPr>
+        <p:txBody>
+          <a:bodyPr wrap="square" lIns="0" tIns="0" rIns="0" bIns="0" rtlCol="0" anchor="ctr"/>
+          <a:lstStyle/>
+          <a:p>
+            <a:pPr algn="ctr" indent="0" marL="0">
+              <a:buNone/>
+            </a:pPr>
+            <a:r>
+              <a:rPr lang="en-US" sz="1400" b="1" dirty="0">
+                <a:solidFill>
+                  <a:srgbClr val="3FB8C4"/>
+                </a:solidFill>
+                <a:latin typeface="Malgun Gothic" pitchFamily="34" charset="0"/>
+                <a:ea typeface="Malgun Gothic" pitchFamily="34" charset="-122"/>
+                <a:cs typeface="Malgun Gothic" pitchFamily="34" charset="-120"/>
+              </a:rPr>
+              <a:t>합</a:t>
+            </a:r>
+            <a:endParaRPr lang="en-US" sz="1400" dirty="0"/>
+          </a:p>
+        </p:txBody>
+      </p:sp>
+      <p:sp>
+        <p:nvSpPr>
+          <p:cNvPr id="39" name="Shape 37"/>
+          <p:cNvSpPr/>
+          <p:nvPr/>
+        </p:nvSpPr>
+        <p:spPr>
+          <a:xfrm>
+            <a:off x="10149840" y="2194560"/>
+            <a:ext cx="1554480" cy="685800"/>
+          </a:xfrm>
+          <a:prstGeom prst="roundRect">
+            <a:avLst>
+              <a:gd name="adj" fmla="val 6667"/>
+            </a:avLst>
+          </a:prstGeom>
+          <a:solidFill>
+            <a:srgbClr val="0B1119"/>
+          </a:solidFill>
+          <a:ln w="19050">
+            <a:solidFill>
+              <a:srgbClr val="3FB8C4"/>
+            </a:solidFill>
+            <a:prstDash val="solid"/>
+          </a:ln>
+        </p:spPr>
+      </p:sp>
+      <p:sp>
+        <p:nvSpPr>
+          <p:cNvPr id="40" name="Text 38"/>
+          <p:cNvSpPr/>
+          <p:nvPr/>
+        </p:nvSpPr>
+        <p:spPr>
+          <a:xfrm>
+            <a:off x="10259568" y="2286000"/>
+            <a:ext cx="1335024" cy="365760"/>
+          </a:xfrm>
+          <a:prstGeom prst="rect">
+            <a:avLst/>
+          </a:prstGeom>
+          <a:noFill/>
+          <a:ln/>
+        </p:spPr>
+        <p:txBody>
+          <a:bodyPr wrap="square" lIns="0" tIns="0" rIns="0" bIns="0" rtlCol="0" anchor="t"/>
+          <a:lstStyle/>
+          <a:p>
+            <a:pPr algn="ctr" indent="0" marL="0">
+              <a:buNone/>
+            </a:pPr>
+            <a:r>
+              <a:rPr lang="en-US" sz="1400" b="1" dirty="0">
+                <a:solidFill>
+                  <a:srgbClr val="3FB8C4"/>
+                </a:solidFill>
+                <a:latin typeface="Malgun Gothic" pitchFamily="34" charset="0"/>
+                <a:ea typeface="Malgun Gothic" pitchFamily="34" charset="-122"/>
+                <a:cs typeface="Malgun Gothic" pitchFamily="34" charset="-120"/>
+              </a:rPr>
+              <a:t>블록 2</a:t>
+            </a:r>
+            <a:endParaRPr lang="en-US" sz="1400" dirty="0"/>
+          </a:p>
+        </p:txBody>
+      </p:sp>
+      <p:sp>
+        <p:nvSpPr>
+          <p:cNvPr id="41" name="Text 39"/>
+          <p:cNvSpPr/>
+          <p:nvPr/>
+        </p:nvSpPr>
+        <p:spPr>
+          <a:xfrm>
+            <a:off x="10259568" y="2423160"/>
+            <a:ext cx="1335024" cy="384048"/>
+          </a:xfrm>
+          <a:prstGeom prst="rect">
+            <a:avLst/>
+          </a:prstGeom>
+          <a:noFill/>
+          <a:ln/>
+        </p:spPr>
+        <p:txBody>
+          <a:bodyPr wrap="square" lIns="0" tIns="0" rIns="0" bIns="0" rtlCol="0" anchor="ctr"/>
+          <a:lstStyle/>
+          <a:p>
+            <a:pPr algn="ctr" indent="0" marL="0">
+              <a:buNone/>
+            </a:pPr>
+            <a:r>
+              <a:rPr lang="en-US" sz="1050" dirty="0">
+                <a:solidFill>
+                  <a:srgbClr val="9FB0C4"/>
+                </a:solidFill>
+                <a:latin typeface="Courier New" pitchFamily="34" charset="0"/>
+                <a:ea typeface="Courier New" pitchFamily="34" charset="-122"/>
+                <a:cs typeface="Courier New" pitchFamily="34" charset="-120"/>
+              </a:rPr>
+              <a:t>트리 합산</a:t>
+            </a:r>
+            <a:endParaRPr lang="en-US" sz="1050" dirty="0"/>
+          </a:p>
+        </p:txBody>
+      </p:sp>
+      <p:sp>
+        <p:nvSpPr>
+          <p:cNvPr id="42" name="Shape 40"/>
+          <p:cNvSpPr/>
+          <p:nvPr/>
+        </p:nvSpPr>
+        <p:spPr>
+          <a:xfrm>
+            <a:off x="10927080" y="2907792"/>
+            <a:ext cx="0" cy="457200"/>
+          </a:xfrm>
+          <a:prstGeom prst="line">
+            <a:avLst/>
+          </a:prstGeom>
+          <a:noFill/>
+          <a:ln w="17780">
+            <a:solidFill>
+              <a:srgbClr val="3FB8C4"/>
+            </a:solidFill>
+            <a:prstDash val="solid"/>
+            <a:tailEnd type="triangle"/>
+          </a:ln>
+        </p:spPr>
+      </p:sp>
+      <p:sp>
+        <p:nvSpPr>
+          <p:cNvPr id="43" name="Shape 41"/>
+          <p:cNvSpPr/>
+          <p:nvPr/>
+        </p:nvSpPr>
+        <p:spPr>
+          <a:xfrm>
+            <a:off x="10561320" y="3383280"/>
+            <a:ext cx="731520" cy="457200"/>
+          </a:xfrm>
+          <a:prstGeom prst="roundRect">
+            <a:avLst>
+              <a:gd name="adj" fmla="val 10000"/>
+            </a:avLst>
+          </a:prstGeom>
+          <a:solidFill>
+            <a:srgbClr val="12212A"/>
+          </a:solidFill>
+          <a:ln w="19050">
+            <a:solidFill>
+              <a:srgbClr val="3FB8C4"/>
+            </a:solidFill>
+            <a:prstDash val="solid"/>
+          </a:ln>
+        </p:spPr>
+      </p:sp>
+      <p:sp>
+        <p:nvSpPr>
+          <p:cNvPr id="44" name="Text 42"/>
+          <p:cNvSpPr/>
+          <p:nvPr/>
+        </p:nvSpPr>
+        <p:spPr>
+          <a:xfrm>
+            <a:off x="10671048" y="3474720"/>
+            <a:ext cx="512064" cy="274320"/>
+          </a:xfrm>
+          <a:prstGeom prst="rect">
+            <a:avLst/>
+          </a:prstGeom>
+          <a:noFill/>
+          <a:ln/>
+        </p:spPr>
+        <p:txBody>
+          <a:bodyPr wrap="square" lIns="0" tIns="0" rIns="0" bIns="0" rtlCol="0" anchor="ctr"/>
+          <a:lstStyle/>
+          <a:p>
+            <a:pPr algn="ctr" indent="0" marL="0">
+              <a:buNone/>
+            </a:pPr>
+            <a:r>
+              <a:rPr lang="en-US" sz="1400" b="1" dirty="0">
+                <a:solidFill>
+                  <a:srgbClr val="3FB8C4"/>
+                </a:solidFill>
+                <a:latin typeface="Malgun Gothic" pitchFamily="34" charset="0"/>
+                <a:ea typeface="Malgun Gothic" pitchFamily="34" charset="-122"/>
+                <a:cs typeface="Malgun Gothic" pitchFamily="34" charset="-120"/>
+              </a:rPr>
+              <a:t>합</a:t>
+            </a:r>
+            <a:endParaRPr lang="en-US" sz="1400" dirty="0"/>
+          </a:p>
+        </p:txBody>
+      </p:sp>
+      <p:sp>
+        <p:nvSpPr>
+          <p:cNvPr id="45" name="Text 43"/>
+          <p:cNvSpPr/>
+          <p:nvPr/>
+        </p:nvSpPr>
+        <p:spPr>
+          <a:xfrm>
+            <a:off x="6675120" y="3886200"/>
+            <a:ext cx="4572000" cy="274320"/>
+          </a:xfrm>
+          <a:prstGeom prst="rect">
+            <a:avLst/>
+          </a:prstGeom>
+          <a:noFill/>
+          <a:ln/>
+        </p:spPr>
+        <p:txBody>
+          <a:bodyPr wrap="square" lIns="0" tIns="0" rIns="0" bIns="0" rtlCol="0" anchor="ctr"/>
+          <a:lstStyle/>
+          <a:p>
+            <a:pPr algn="ctr" indent="0" marL="0">
+              <a:buNone/>
+            </a:pPr>
+            <a:r>
+              <a:rPr lang="en-US" sz="1050" i="1" dirty="0">
+                <a:solidFill>
+                  <a:srgbClr val="9FB0C4"/>
+                </a:solidFill>
+                <a:latin typeface="Malgun Gothic" pitchFamily="34" charset="0"/>
+                <a:ea typeface="Malgun Gothic" pitchFamily="34" charset="-122"/>
+                <a:cs typeface="Malgun Gothic" pitchFamily="34" charset="-120"/>
+              </a:rPr>
+              <a:t>블록당 1개 (총 1024개)</a:t>
+            </a:r>
+            <a:endParaRPr lang="en-US" sz="1050" dirty="0"/>
+          </a:p>
+        </p:txBody>
+      </p:sp>
+      <p:sp>
+        <p:nvSpPr>
+          <p:cNvPr id="46" name="Shape 44"/>
+          <p:cNvSpPr/>
+          <p:nvPr/>
+        </p:nvSpPr>
+        <p:spPr>
+          <a:xfrm>
+            <a:off x="8961120" y="4160520"/>
+            <a:ext cx="0" cy="320040"/>
+          </a:xfrm>
+          <a:prstGeom prst="line">
+            <a:avLst/>
+          </a:prstGeom>
+          <a:noFill/>
+          <a:ln w="20320">
+            <a:solidFill>
+              <a:srgbClr val="E8A33D"/>
+            </a:solidFill>
+            <a:prstDash val="solid"/>
+            <a:tailEnd type="triangle"/>
+          </a:ln>
+        </p:spPr>
+      </p:sp>
+      <p:sp>
+        <p:nvSpPr>
+          <p:cNvPr id="47" name="Shape 45"/>
+          <p:cNvSpPr/>
+          <p:nvPr/>
+        </p:nvSpPr>
+        <p:spPr>
+          <a:xfrm>
+            <a:off x="7772400" y="4526280"/>
+            <a:ext cx="2377440" cy="548640"/>
+          </a:xfrm>
+          <a:prstGeom prst="roundRect">
+            <a:avLst>
+              <a:gd name="adj" fmla="val 8333"/>
+            </a:avLst>
+          </a:prstGeom>
+          <a:solidFill>
+            <a:srgbClr val="241A16"/>
           </a:solidFill>
           <a:ln w="19050">
             <a:solidFill>
@@ -3697,206 +5772,79 @@
       </p:sp>
       <p:sp>
         <p:nvSpPr>
-          <p:cNvPr id="7" name="Shape 5"/>
-          <p:cNvSpPr/>
-          <p:nvPr/>
-        </p:nvSpPr>
-        <p:spPr>
-          <a:xfrm>
-            <a:off x="822960" y="2880360"/>
-            <a:ext cx="10515600" cy="1371600"/>
-          </a:xfrm>
-          <a:prstGeom prst="roundRect">
-            <a:avLst>
-              <a:gd name="adj" fmla="val 3333"/>
-            </a:avLst>
-          </a:prstGeom>
-          <a:solidFill>
-            <a:srgbClr val="0B1119"/>
-          </a:solidFill>
-          <a:ln w="12700">
-            <a:solidFill>
-              <a:srgbClr val="2C3A4E"/>
-            </a:solidFill>
-            <a:prstDash val="solid"/>
-          </a:ln>
-        </p:spPr>
-      </p:sp>
-      <p:sp>
-        <p:nvSpPr>
-          <p:cNvPr id="8" name="Text 6"/>
-          <p:cNvSpPr/>
-          <p:nvPr/>
-        </p:nvSpPr>
-        <p:spPr>
-          <a:xfrm>
-            <a:off x="1042416" y="3026664"/>
-            <a:ext cx="10076688" cy="1078992"/>
-          </a:xfrm>
-          <a:prstGeom prst="rect">
-            <a:avLst/>
-          </a:prstGeom>
-          <a:noFill/>
-          <a:ln/>
-        </p:spPr>
-        <p:txBody>
-          <a:bodyPr wrap="square" lIns="0" tIns="0" rIns="0" bIns="0" rtlCol="0" anchor="t"/>
-          <a:lstStyle/>
-          <a:p>
-            <a:pPr algn="l" indent="0" marL="0">
-              <a:lnSpc>
-                <a:spcPct val="110000"/>
-              </a:lnSpc>
-              <a:buNone/>
-            </a:pPr>
-            <a:r>
-              <a:rPr lang="en-US" sz="1300" dirty="0">
-                <a:solidFill>
-                  <a:srgbClr val="3FB8C4"/>
-                </a:solidFill>
-                <a:latin typeface="Courier New" pitchFamily="34" charset="0"/>
-                <a:ea typeface="Courier New" pitchFamily="34" charset="-122"/>
-                <a:cs typeface="Courier New" pitchFamily="34" charset="-120"/>
-              </a:rPr>
-              <a:t>기대값 constant = 1111 1111 1111 1111</a:t>
-            </a:r>
-            <a:endParaRPr lang="en-US" sz="1300" dirty="0"/>
-          </a:p>
-          <a:p>
-            <a:pPr algn="l" indent="0" marL="0">
-              <a:lnSpc>
-                <a:spcPct val="110000"/>
-              </a:lnSpc>
-              <a:buNone/>
-            </a:pPr>
-            <a:r>
-              <a:rPr lang="en-US" sz="1300" dirty="0">
-                <a:solidFill>
-                  <a:srgbClr val="E7EDF5"/>
-                </a:solidFill>
-                <a:latin typeface="Courier New" pitchFamily="34" charset="0"/>
-                <a:ea typeface="Courier New" pitchFamily="34" charset="-122"/>
-                <a:cs typeface="Courier New" pitchFamily="34" charset="-120"/>
-              </a:rPr>
-              <a:t>실제값 readback = 1111 1011 1111 0111   ← 2비트 손상</a:t>
-            </a:r>
-            <a:endParaRPr lang="en-US" sz="1300" dirty="0"/>
-          </a:p>
-          <a:p>
-            <a:pPr algn="l" indent="0" marL="0">
-              <a:lnSpc>
-                <a:spcPct val="110000"/>
-              </a:lnSpc>
-              <a:buNone/>
-            </a:pPr>
-            <a:r>
-              <a:rPr lang="en-US" sz="1300" dirty="0">
-                <a:solidFill>
-                  <a:srgbClr val="F2C079"/>
-                </a:solidFill>
-                <a:latin typeface="Courier New" pitchFamily="34" charset="0"/>
-                <a:ea typeface="Courier New" pitchFamily="34" charset="-122"/>
-                <a:cs typeface="Courier New" pitchFamily="34" charset="-120"/>
-              </a:rPr>
-              <a:t>XOR (^)        = 0000 0100 0000 1000</a:t>
-            </a:r>
-            <a:endParaRPr lang="en-US" sz="1300" dirty="0"/>
-          </a:p>
-          <a:p>
-            <a:pPr algn="l" indent="0" marL="0">
-              <a:lnSpc>
-                <a:spcPct val="110000"/>
-              </a:lnSpc>
-              <a:buNone/>
-            </a:pPr>
-            <a:r>
-              <a:rPr lang="en-US" sz="1300" dirty="0">
-                <a:solidFill>
-                  <a:srgbClr val="E6604F"/>
-                </a:solidFill>
-                <a:latin typeface="Courier New" pitchFamily="34" charset="0"/>
-                <a:ea typeface="Courier New" pitchFamily="34" charset="-122"/>
-                <a:cs typeface="Courier New" pitchFamily="34" charset="-120"/>
-              </a:rPr>
-              <a:t>__popc(XOR)    = 2                       ← 오류 2개로 집계</a:t>
-            </a:r>
-            <a:endParaRPr lang="en-US" sz="1300" dirty="0"/>
-          </a:p>
-        </p:txBody>
-      </p:sp>
-      <p:sp>
-        <p:nvSpPr>
-          <p:cNvPr id="9" name="Text 7"/>
-          <p:cNvSpPr/>
-          <p:nvPr/>
-        </p:nvSpPr>
-        <p:spPr>
-          <a:xfrm>
-            <a:off x="548640" y="4663440"/>
-            <a:ext cx="11064240" cy="1005840"/>
-          </a:xfrm>
-          <a:prstGeom prst="rect">
-            <a:avLst/>
-          </a:prstGeom>
-          <a:noFill/>
-          <a:ln/>
-        </p:spPr>
-        <p:txBody>
-          <a:bodyPr wrap="square" lIns="0" tIns="0" rIns="0" bIns="0" rtlCol="0" anchor="t"/>
-          <a:lstStyle/>
-          <a:p>
-            <a:pPr indent="0" marL="0">
-              <a:lnSpc>
-                <a:spcPct val="120000"/>
-              </a:lnSpc>
-              <a:buNone/>
-            </a:pPr>
-            <a:r>
-              <a:rPr lang="en-US" sz="1600" dirty="0">
-                <a:solidFill>
-                  <a:srgbClr val="E7EDF5"/>
+          <p:cNvPr id="48" name="Text 46"/>
+          <p:cNvSpPr/>
+          <p:nvPr/>
+        </p:nvSpPr>
+        <p:spPr>
+          <a:xfrm>
+            <a:off x="7882128" y="4617720"/>
+            <a:ext cx="2157984" cy="365760"/>
+          </a:xfrm>
+          <a:prstGeom prst="rect">
+            <a:avLst/>
+          </a:prstGeom>
+          <a:noFill/>
+          <a:ln/>
+        </p:spPr>
+        <p:txBody>
+          <a:bodyPr wrap="square" lIns="0" tIns="0" rIns="0" bIns="0" rtlCol="0" anchor="ctr"/>
+          <a:lstStyle/>
+          <a:p>
+            <a:pPr algn="ctr" indent="0" marL="0">
+              <a:buNone/>
+            </a:pPr>
+            <a:r>
+              <a:rPr lang="en-US" sz="1400" b="1" dirty="0">
+                <a:solidFill>
+                  <a:srgbClr val="E8A33D"/>
                 </a:solidFill>
                 <a:latin typeface="Malgun Gothic" pitchFamily="34" charset="0"/>
                 <a:ea typeface="Malgun Gothic" pitchFamily="34" charset="-122"/>
                 <a:cs typeface="Malgun Gothic" pitchFamily="34" charset="-120"/>
               </a:rPr>
-              <a:t>단순히 '맞다/틀리다'(1)가 아니라 </a:t>
-            </a:r>
+              <a:t>CPU 최종 합 (1024개)</a:t>
+            </a:r>
+            <a:endParaRPr lang="en-US" sz="1400" dirty="0"/>
+          </a:p>
+        </p:txBody>
+      </p:sp>
+      <p:sp>
+        <p:nvSpPr>
+          <p:cNvPr id="49" name="Text 47"/>
+          <p:cNvSpPr/>
+          <p:nvPr/>
+        </p:nvSpPr>
+        <p:spPr>
+          <a:xfrm>
+            <a:off x="6537960" y="5166360"/>
+            <a:ext cx="4846320" cy="457200"/>
+          </a:xfrm>
+          <a:prstGeom prst="rect">
+            <a:avLst/>
+          </a:prstGeom>
+          <a:noFill/>
+          <a:ln/>
+        </p:spPr>
+        <p:txBody>
+          <a:bodyPr wrap="square" lIns="0" tIns="0" rIns="0" bIns="0" rtlCol="0" anchor="t"/>
+          <a:lstStyle/>
+          <a:p>
             <a:pPr indent="0" marL="0">
-              <a:lnSpc>
-                <a:spcPct val="120000"/>
-              </a:lnSpc>
-              <a:buNone/>
-            </a:pPr>
-            <a:r>
-              <a:rPr lang="en-US" sz="1600" b="1" dirty="0">
-                <a:solidFill>
-                  <a:srgbClr val="E8A33D"/>
+              <a:buNone/>
+            </a:pPr>
+            <a:r>
+              <a:rPr lang="en-US" sz="1300" dirty="0">
+                <a:solidFill>
+                  <a:srgbClr val="E7EDF5"/>
                 </a:solidFill>
                 <a:latin typeface="Malgun Gothic" pitchFamily="34" charset="0"/>
                 <a:ea typeface="Malgun Gothic" pitchFamily="34" charset="-122"/>
                 <a:cs typeface="Malgun Gothic" pitchFamily="34" charset="-120"/>
               </a:rPr>
-              <a:t>뒤집힌 비트의 개수</a:t>
-            </a:r>
-            <a:pPr indent="0" marL="0">
-              <a:lnSpc>
-                <a:spcPct val="120000"/>
-              </a:lnSpc>
-              <a:buNone/>
-            </a:pPr>
-            <a:r>
-              <a:rPr lang="en-US" sz="1600" dirty="0">
-                <a:solidFill>
-                  <a:srgbClr val="E7EDF5"/>
-                </a:solidFill>
-                <a:latin typeface="Malgun Gothic" pitchFamily="34" charset="0"/>
-                <a:ea typeface="Malgun Gothic" pitchFamily="34" charset="-122"/>
-                <a:cs typeface="Malgun Gothic" pitchFamily="34" charset="-120"/>
-              </a:rPr>
-              <a:t>를 셉니다. 한 word에서 여러 비트가 손상돼도 모두 포착 — 오류율 추정이 정밀해집니다.</a:t>
-            </a:r>
-            <a:endParaRPr lang="en-US" sz="1600" dirty="0"/>
+              <a:t>→ 경합 없이 로그 단계로. GPU가 52만→1024, CPU가 마무리.</a:t>
+            </a:r>
+            <a:endParaRPr lang="en-US" sz="1300" dirty="0"/>
           </a:p>
         </p:txBody>
       </p:sp>
@@ -3969,7 +5917,7 @@
                 <a:ea typeface="Courier New" pitchFamily="34" charset="-122"/>
                 <a:cs typeface="Courier New" pitchFamily="34" charset="-120"/>
               </a:rPr>
-              <a:t>4</a:t>
+              <a:t>3</a:t>
             </a:r>
             <a:endParaRPr lang="en-US" sz="2200" dirty="0"/>
           </a:p>
@@ -4008,7 +5956,7 @@
                 <a:ea typeface="Malgun Gothic" pitchFamily="34" charset="-122"/>
                 <a:cs typeface="Malgun Gothic" pitchFamily="34" charset="-120"/>
               </a:rPr>
-              <a:t>트리 리덕션 · stride를 반씩 줄인다</a:t>
+              <a:t>틀린 비트 세기 · __popc</a:t>
             </a:r>
             <a:endParaRPr lang="en-US" sz="2900" dirty="0"/>
           </a:p>
@@ -4016,360 +5964,18 @@
       </p:sp>
       <p:sp>
         <p:nvSpPr>
-          <p:cNvPr id="4" name="Text 2"/>
-          <p:cNvSpPr/>
-          <p:nvPr/>
-        </p:nvSpPr>
-        <p:spPr>
-          <a:xfrm>
-            <a:off x="548640" y="1371600"/>
-            <a:ext cx="11064240" cy="411480"/>
-          </a:xfrm>
-          <a:prstGeom prst="rect">
-            <a:avLst/>
-          </a:prstGeom>
-          <a:noFill/>
-          <a:ln/>
-        </p:spPr>
-        <p:txBody>
-          <a:bodyPr wrap="square" lIns="0" tIns="0" rIns="0" bIns="0" rtlCol="0" anchor="ctr"/>
-          <a:lstStyle/>
-          <a:p>
-            <a:pPr indent="0" marL="0">
-              <a:buNone/>
-            </a:pPr>
-            <a:r>
-              <a:rPr lang="en-US" sz="1500" dirty="0">
-                <a:solidFill>
-                  <a:srgbClr val="9FB0C4"/>
-                </a:solidFill>
-                <a:latin typeface="Malgun Gothic" pitchFamily="34" charset="0"/>
-                <a:ea typeface="Malgun Gothic" pitchFamily="34" charset="-122"/>
-                <a:cs typeface="Malgun Gothic" pitchFamily="34" charset="-120"/>
-              </a:rPr>
-              <a:t>공유 배열의 값을 로그 단계로 접어 합칩니다. 512 → 256 → 128 → … → 1.</a:t>
-            </a:r>
-            <a:endParaRPr lang="en-US" sz="1500" dirty="0"/>
-          </a:p>
-        </p:txBody>
-      </p:sp>
-      <p:sp>
-        <p:nvSpPr>
-          <p:cNvPr id="5" name="Text 3"/>
-          <p:cNvSpPr/>
-          <p:nvPr/>
-        </p:nvSpPr>
-        <p:spPr>
-          <a:xfrm>
-            <a:off x="548640" y="2103120"/>
-            <a:ext cx="2194560" cy="548640"/>
-          </a:xfrm>
-          <a:prstGeom prst="rect">
-            <a:avLst/>
-          </a:prstGeom>
-          <a:noFill/>
-          <a:ln/>
-        </p:spPr>
-        <p:txBody>
-          <a:bodyPr wrap="square" lIns="0" tIns="0" rIns="0" bIns="0" rtlCol="0" anchor="ctr"/>
-          <a:lstStyle/>
-          <a:p>
-            <a:pPr algn="r" indent="0" marL="0">
-              <a:buNone/>
-            </a:pPr>
-            <a:r>
-              <a:rPr lang="en-US" sz="1250" dirty="0">
-                <a:solidFill>
-                  <a:srgbClr val="9FB0C4"/>
-                </a:solidFill>
-                <a:latin typeface="Malgun Gothic" pitchFamily="34" charset="0"/>
-                <a:ea typeface="Malgun Gothic" pitchFamily="34" charset="-122"/>
-                <a:cs typeface="Malgun Gothic" pitchFamily="34" charset="-120"/>
-              </a:rPr>
-              <a:t>초기 (stride=4)</a:t>
-            </a:r>
-            <a:endParaRPr lang="en-US" sz="1250" dirty="0"/>
-          </a:p>
-        </p:txBody>
-      </p:sp>
-      <p:sp>
-        <p:nvSpPr>
-          <p:cNvPr id="6" name="Shape 4"/>
-          <p:cNvSpPr/>
-          <p:nvPr/>
-        </p:nvSpPr>
-        <p:spPr>
-          <a:xfrm>
-            <a:off x="2926080" y="1965960"/>
-            <a:ext cx="749808" cy="621792"/>
+          <p:cNvPr id="4" name="Shape 2"/>
+          <p:cNvSpPr/>
+          <p:nvPr/>
+        </p:nvSpPr>
+        <p:spPr>
+          <a:xfrm>
+            <a:off x="548640" y="1508760"/>
+            <a:ext cx="11064240" cy="1005840"/>
           </a:xfrm>
           <a:prstGeom prst="roundRect">
             <a:avLst>
-              <a:gd name="adj" fmla="val 7353"/>
-            </a:avLst>
-          </a:prstGeom>
-          <a:solidFill>
-            <a:srgbClr val="0B1119"/>
-          </a:solidFill>
-          <a:ln w="19050">
-            <a:solidFill>
-              <a:srgbClr val="3FB8C4"/>
-            </a:solidFill>
-            <a:prstDash val="solid"/>
-          </a:ln>
-        </p:spPr>
-      </p:sp>
-      <p:sp>
-        <p:nvSpPr>
-          <p:cNvPr id="7" name="Text 5"/>
-          <p:cNvSpPr/>
-          <p:nvPr/>
-        </p:nvSpPr>
-        <p:spPr>
-          <a:xfrm>
-            <a:off x="2926080" y="1965960"/>
-            <a:ext cx="749808" cy="621792"/>
-          </a:xfrm>
-          <a:prstGeom prst="rect">
-            <a:avLst/>
-          </a:prstGeom>
-          <a:noFill/>
-          <a:ln/>
-        </p:spPr>
-        <p:txBody>
-          <a:bodyPr wrap="square" lIns="0" tIns="0" rIns="0" bIns="0" rtlCol="0" anchor="ctr"/>
-          <a:lstStyle/>
-          <a:p>
-            <a:pPr algn="ctr" indent="0" marL="0">
-              <a:buNone/>
-            </a:pPr>
-            <a:r>
-              <a:rPr lang="en-US" sz="1500" b="1" dirty="0">
-                <a:solidFill>
-                  <a:srgbClr val="E7EDF5"/>
-                </a:solidFill>
-                <a:latin typeface="Courier New" pitchFamily="34" charset="0"/>
-                <a:ea typeface="Courier New" pitchFamily="34" charset="-122"/>
-                <a:cs typeface="Courier New" pitchFamily="34" charset="-120"/>
-              </a:rPr>
-              <a:t>3</a:t>
-            </a:r>
-            <a:endParaRPr lang="en-US" sz="1500" dirty="0"/>
-          </a:p>
-        </p:txBody>
-      </p:sp>
-      <p:sp>
-        <p:nvSpPr>
-          <p:cNvPr id="8" name="Shape 6"/>
-          <p:cNvSpPr/>
-          <p:nvPr/>
-        </p:nvSpPr>
-        <p:spPr>
-          <a:xfrm>
-            <a:off x="3785616" y="1965960"/>
-            <a:ext cx="749808" cy="621792"/>
-          </a:xfrm>
-          <a:prstGeom prst="roundRect">
-            <a:avLst>
-              <a:gd name="adj" fmla="val 7353"/>
-            </a:avLst>
-          </a:prstGeom>
-          <a:solidFill>
-            <a:srgbClr val="0B1119"/>
-          </a:solidFill>
-          <a:ln w="19050">
-            <a:solidFill>
-              <a:srgbClr val="3FB8C4"/>
-            </a:solidFill>
-            <a:prstDash val="solid"/>
-          </a:ln>
-        </p:spPr>
-      </p:sp>
-      <p:sp>
-        <p:nvSpPr>
-          <p:cNvPr id="9" name="Text 7"/>
-          <p:cNvSpPr/>
-          <p:nvPr/>
-        </p:nvSpPr>
-        <p:spPr>
-          <a:xfrm>
-            <a:off x="3785616" y="1965960"/>
-            <a:ext cx="749808" cy="621792"/>
-          </a:xfrm>
-          <a:prstGeom prst="rect">
-            <a:avLst/>
-          </a:prstGeom>
-          <a:noFill/>
-          <a:ln/>
-        </p:spPr>
-        <p:txBody>
-          <a:bodyPr wrap="square" lIns="0" tIns="0" rIns="0" bIns="0" rtlCol="0" anchor="ctr"/>
-          <a:lstStyle/>
-          <a:p>
-            <a:pPr algn="ctr" indent="0" marL="0">
-              <a:buNone/>
-            </a:pPr>
-            <a:r>
-              <a:rPr lang="en-US" sz="1500" b="1" dirty="0">
-                <a:solidFill>
-                  <a:srgbClr val="E7EDF5"/>
-                </a:solidFill>
-                <a:latin typeface="Courier New" pitchFamily="34" charset="0"/>
-                <a:ea typeface="Courier New" pitchFamily="34" charset="-122"/>
-                <a:cs typeface="Courier New" pitchFamily="34" charset="-120"/>
-              </a:rPr>
-              <a:t>1</a:t>
-            </a:r>
-            <a:endParaRPr lang="en-US" sz="1500" dirty="0"/>
-          </a:p>
-        </p:txBody>
-      </p:sp>
-      <p:sp>
-        <p:nvSpPr>
-          <p:cNvPr id="10" name="Shape 8"/>
-          <p:cNvSpPr/>
-          <p:nvPr/>
-        </p:nvSpPr>
-        <p:spPr>
-          <a:xfrm>
-            <a:off x="4645152" y="1965960"/>
-            <a:ext cx="749808" cy="621792"/>
-          </a:xfrm>
-          <a:prstGeom prst="roundRect">
-            <a:avLst>
-              <a:gd name="adj" fmla="val 7353"/>
-            </a:avLst>
-          </a:prstGeom>
-          <a:solidFill>
-            <a:srgbClr val="0B1119"/>
-          </a:solidFill>
-          <a:ln w="19050">
-            <a:solidFill>
-              <a:srgbClr val="3FB8C4"/>
-            </a:solidFill>
-            <a:prstDash val="solid"/>
-          </a:ln>
-        </p:spPr>
-      </p:sp>
-      <p:sp>
-        <p:nvSpPr>
-          <p:cNvPr id="11" name="Text 9"/>
-          <p:cNvSpPr/>
-          <p:nvPr/>
-        </p:nvSpPr>
-        <p:spPr>
-          <a:xfrm>
-            <a:off x="4645152" y="1965960"/>
-            <a:ext cx="749808" cy="621792"/>
-          </a:xfrm>
-          <a:prstGeom prst="rect">
-            <a:avLst/>
-          </a:prstGeom>
-          <a:noFill/>
-          <a:ln/>
-        </p:spPr>
-        <p:txBody>
-          <a:bodyPr wrap="square" lIns="0" tIns="0" rIns="0" bIns="0" rtlCol="0" anchor="ctr"/>
-          <a:lstStyle/>
-          <a:p>
-            <a:pPr algn="ctr" indent="0" marL="0">
-              <a:buNone/>
-            </a:pPr>
-            <a:r>
-              <a:rPr lang="en-US" sz="1500" b="1" dirty="0">
-                <a:solidFill>
-                  <a:srgbClr val="E7EDF5"/>
-                </a:solidFill>
-                <a:latin typeface="Courier New" pitchFamily="34" charset="0"/>
-                <a:ea typeface="Courier New" pitchFamily="34" charset="-122"/>
-                <a:cs typeface="Courier New" pitchFamily="34" charset="-120"/>
-              </a:rPr>
-              <a:t>4</a:t>
-            </a:r>
-            <a:endParaRPr lang="en-US" sz="1500" dirty="0"/>
-          </a:p>
-        </p:txBody>
-      </p:sp>
-      <p:sp>
-        <p:nvSpPr>
-          <p:cNvPr id="12" name="Shape 10"/>
-          <p:cNvSpPr/>
-          <p:nvPr/>
-        </p:nvSpPr>
-        <p:spPr>
-          <a:xfrm>
-            <a:off x="5504688" y="1965960"/>
-            <a:ext cx="749808" cy="621792"/>
-          </a:xfrm>
-          <a:prstGeom prst="roundRect">
-            <a:avLst>
-              <a:gd name="adj" fmla="val 7353"/>
-            </a:avLst>
-          </a:prstGeom>
-          <a:solidFill>
-            <a:srgbClr val="0B1119"/>
-          </a:solidFill>
-          <a:ln w="19050">
-            <a:solidFill>
-              <a:srgbClr val="3FB8C4"/>
-            </a:solidFill>
-            <a:prstDash val="solid"/>
-          </a:ln>
-        </p:spPr>
-      </p:sp>
-      <p:sp>
-        <p:nvSpPr>
-          <p:cNvPr id="13" name="Text 11"/>
-          <p:cNvSpPr/>
-          <p:nvPr/>
-        </p:nvSpPr>
-        <p:spPr>
-          <a:xfrm>
-            <a:off x="5504688" y="1965960"/>
-            <a:ext cx="749808" cy="621792"/>
-          </a:xfrm>
-          <a:prstGeom prst="rect">
-            <a:avLst/>
-          </a:prstGeom>
-          <a:noFill/>
-          <a:ln/>
-        </p:spPr>
-        <p:txBody>
-          <a:bodyPr wrap="square" lIns="0" tIns="0" rIns="0" bIns="0" rtlCol="0" anchor="ctr"/>
-          <a:lstStyle/>
-          <a:p>
-            <a:pPr algn="ctr" indent="0" marL="0">
-              <a:buNone/>
-            </a:pPr>
-            <a:r>
-              <a:rPr lang="en-US" sz="1500" b="1" dirty="0">
-                <a:solidFill>
-                  <a:srgbClr val="E7EDF5"/>
-                </a:solidFill>
-                <a:latin typeface="Courier New" pitchFamily="34" charset="0"/>
-                <a:ea typeface="Courier New" pitchFamily="34" charset="-122"/>
-                <a:cs typeface="Courier New" pitchFamily="34" charset="-120"/>
-              </a:rPr>
-              <a:t>1</a:t>
-            </a:r>
-            <a:endParaRPr lang="en-US" sz="1500" dirty="0"/>
-          </a:p>
-        </p:txBody>
-      </p:sp>
-      <p:sp>
-        <p:nvSpPr>
-          <p:cNvPr id="14" name="Shape 12"/>
-          <p:cNvSpPr/>
-          <p:nvPr/>
-        </p:nvSpPr>
-        <p:spPr>
-          <a:xfrm>
-            <a:off x="6364224" y="1965960"/>
-            <a:ext cx="749808" cy="621792"/>
-          </a:xfrm>
-          <a:prstGeom prst="roundRect">
-            <a:avLst>
-              <a:gd name="adj" fmla="val 7353"/>
+              <a:gd name="adj" fmla="val 4545"/>
             </a:avLst>
           </a:prstGeom>
           <a:solidFill>
@@ -4385,57 +5991,107 @@
       </p:sp>
       <p:sp>
         <p:nvSpPr>
-          <p:cNvPr id="15" name="Text 13"/>
-          <p:cNvSpPr/>
-          <p:nvPr/>
-        </p:nvSpPr>
-        <p:spPr>
-          <a:xfrm>
-            <a:off x="6364224" y="1965960"/>
-            <a:ext cx="749808" cy="621792"/>
-          </a:xfrm>
-          <a:prstGeom prst="rect">
-            <a:avLst/>
-          </a:prstGeom>
-          <a:noFill/>
-          <a:ln/>
-        </p:spPr>
-        <p:txBody>
-          <a:bodyPr wrap="square" lIns="0" tIns="0" rIns="0" bIns="0" rtlCol="0" anchor="ctr"/>
-          <a:lstStyle/>
-          <a:p>
-            <a:pPr algn="ctr" indent="0" marL="0">
-              <a:buNone/>
-            </a:pPr>
-            <a:r>
-              <a:rPr lang="en-US" sz="1500" b="1" dirty="0">
-                <a:solidFill>
-                  <a:srgbClr val="E7EDF5"/>
+          <p:cNvPr id="5" name="Text 3"/>
+          <p:cNvSpPr/>
+          <p:nvPr/>
+        </p:nvSpPr>
+        <p:spPr>
+          <a:xfrm>
+            <a:off x="768096" y="1655064"/>
+            <a:ext cx="10625328" cy="713232"/>
+          </a:xfrm>
+          <a:prstGeom prst="rect">
+            <a:avLst/>
+          </a:prstGeom>
+          <a:noFill/>
+          <a:ln/>
+        </p:spPr>
+        <p:txBody>
+          <a:bodyPr wrap="square" lIns="0" tIns="0" rIns="0" bIns="0" rtlCol="0" anchor="t"/>
+          <a:lstStyle/>
+          <a:p>
+            <a:pPr algn="l" indent="0" marL="0">
+              <a:lnSpc>
+                <a:spcPct val="110000"/>
+              </a:lnSpc>
+              <a:buNone/>
+            </a:pPr>
+            <a:r>
+              <a:rPr lang="en-US" sz="1400" dirty="0">
+                <a:solidFill>
+                  <a:srgbClr val="F2C079"/>
                 </a:solidFill>
                 <a:latin typeface="Courier New" pitchFamily="34" charset="0"/>
                 <a:ea typeface="Courier New" pitchFamily="34" charset="-122"/>
                 <a:cs typeface="Courier New" pitchFamily="34" charset="-120"/>
               </a:rPr>
-              <a:t>5</a:t>
-            </a:r>
-            <a:endParaRPr lang="en-US" sz="1500" dirty="0"/>
-          </a:p>
-        </p:txBody>
-      </p:sp>
-      <p:sp>
-        <p:nvSpPr>
-          <p:cNvPr id="16" name="Shape 14"/>
-          <p:cNvSpPr/>
-          <p:nvPr/>
-        </p:nvSpPr>
-        <p:spPr>
-          <a:xfrm>
-            <a:off x="7223760" y="1965960"/>
-            <a:ext cx="749808" cy="621792"/>
+              <a:t>#define BITSDIFF(x,y) __popc((x) ^ (y))    // core.cu:28</a:t>
+            </a:r>
+            <a:endParaRPr lang="en-US" sz="1400" dirty="0"/>
+          </a:p>
+          <a:p>
+            <a:pPr algn="l" indent="0" marL="0">
+              <a:lnSpc>
+                <a:spcPct val="110000"/>
+              </a:lnSpc>
+              <a:buNone/>
+            </a:pPr>
+            <a:r>
+              <a:rPr lang="en-US" sz="1400" dirty="0">
+                <a:solidFill>
+                  <a:srgbClr val="6B7D94"/>
+                </a:solidFill>
+                <a:latin typeface="Courier New" pitchFamily="34" charset="0"/>
+                <a:ea typeface="Courier New" pitchFamily="34" charset="-122"/>
+                <a:cs typeface="Courier New" pitchFamily="34" charset="-120"/>
+              </a:rPr>
+              <a:t>//  __popc = population count = 1인 비트의 개수</a:t>
+            </a:r>
+            <a:endParaRPr lang="en-US" sz="1400" dirty="0"/>
+          </a:p>
+        </p:txBody>
+      </p:sp>
+      <p:sp>
+        <p:nvSpPr>
+          <p:cNvPr id="6" name="Shape 4"/>
+          <p:cNvSpPr/>
+          <p:nvPr/>
+        </p:nvSpPr>
+        <p:spPr>
+          <a:xfrm>
+            <a:off x="548640" y="2697480"/>
+            <a:ext cx="11064240" cy="1737360"/>
           </a:xfrm>
           <a:prstGeom prst="roundRect">
             <a:avLst>
-              <a:gd name="adj" fmla="val 7353"/>
+              <a:gd name="adj" fmla="val 4211"/>
+            </a:avLst>
+          </a:prstGeom>
+          <a:solidFill>
+            <a:srgbClr val="18212E"/>
+          </a:solidFill>
+          <a:ln w="19050">
+            <a:solidFill>
+              <a:srgbClr val="E8A33D"/>
+            </a:solidFill>
+            <a:prstDash val="solid"/>
+          </a:ln>
+        </p:spPr>
+      </p:sp>
+      <p:sp>
+        <p:nvSpPr>
+          <p:cNvPr id="7" name="Shape 5"/>
+          <p:cNvSpPr/>
+          <p:nvPr/>
+        </p:nvSpPr>
+        <p:spPr>
+          <a:xfrm>
+            <a:off x="822960" y="2880360"/>
+            <a:ext cx="10515600" cy="1371600"/>
+          </a:xfrm>
+          <a:prstGeom prst="roundRect">
+            <a:avLst>
+              <a:gd name="adj" fmla="val 3333"/>
             </a:avLst>
           </a:prstGeom>
           <a:solidFill>
@@ -4451,96 +6107,53 @@
       </p:sp>
       <p:sp>
         <p:nvSpPr>
-          <p:cNvPr id="17" name="Text 15"/>
-          <p:cNvSpPr/>
-          <p:nvPr/>
-        </p:nvSpPr>
-        <p:spPr>
-          <a:xfrm>
-            <a:off x="7223760" y="1965960"/>
-            <a:ext cx="749808" cy="621792"/>
-          </a:xfrm>
-          <a:prstGeom prst="rect">
-            <a:avLst/>
-          </a:prstGeom>
-          <a:noFill/>
-          <a:ln/>
-        </p:spPr>
-        <p:txBody>
-          <a:bodyPr wrap="square" lIns="0" tIns="0" rIns="0" bIns="0" rtlCol="0" anchor="ctr"/>
-          <a:lstStyle/>
-          <a:p>
-            <a:pPr algn="ctr" indent="0" marL="0">
-              <a:buNone/>
-            </a:pPr>
-            <a:r>
-              <a:rPr lang="en-US" sz="1500" b="1" dirty="0">
-                <a:solidFill>
-                  <a:srgbClr val="E7EDF5"/>
+          <p:cNvPr id="8" name="Text 6"/>
+          <p:cNvSpPr/>
+          <p:nvPr/>
+        </p:nvSpPr>
+        <p:spPr>
+          <a:xfrm>
+            <a:off x="1042416" y="3026664"/>
+            <a:ext cx="10076688" cy="1078992"/>
+          </a:xfrm>
+          <a:prstGeom prst="rect">
+            <a:avLst/>
+          </a:prstGeom>
+          <a:noFill/>
+          <a:ln/>
+        </p:spPr>
+        <p:txBody>
+          <a:bodyPr wrap="square" lIns="0" tIns="0" rIns="0" bIns="0" rtlCol="0" anchor="t"/>
+          <a:lstStyle/>
+          <a:p>
+            <a:pPr algn="l" indent="0" marL="0">
+              <a:lnSpc>
+                <a:spcPct val="110000"/>
+              </a:lnSpc>
+              <a:buNone/>
+            </a:pPr>
+            <a:r>
+              <a:rPr lang="en-US" sz="1300" dirty="0">
+                <a:solidFill>
+                  <a:srgbClr val="3FB8C4"/>
                 </a:solidFill>
                 <a:latin typeface="Courier New" pitchFamily="34" charset="0"/>
                 <a:ea typeface="Courier New" pitchFamily="34" charset="-122"/>
                 <a:cs typeface="Courier New" pitchFamily="34" charset="-120"/>
               </a:rPr>
-              <a:t>9</a:t>
-            </a:r>
-            <a:endParaRPr lang="en-US" sz="1500" dirty="0"/>
-          </a:p>
-        </p:txBody>
-      </p:sp>
-      <p:sp>
-        <p:nvSpPr>
-          <p:cNvPr id="18" name="Shape 16"/>
-          <p:cNvSpPr/>
-          <p:nvPr/>
-        </p:nvSpPr>
-        <p:spPr>
-          <a:xfrm>
-            <a:off x="8083296" y="1965960"/>
-            <a:ext cx="749808" cy="621792"/>
-          </a:xfrm>
-          <a:prstGeom prst="roundRect">
-            <a:avLst>
-              <a:gd name="adj" fmla="val 7353"/>
-            </a:avLst>
-          </a:prstGeom>
-          <a:solidFill>
-            <a:srgbClr val="0B1119"/>
-          </a:solidFill>
-          <a:ln w="12700">
-            <a:solidFill>
-              <a:srgbClr val="2C3A4E"/>
-            </a:solidFill>
-            <a:prstDash val="solid"/>
-          </a:ln>
-        </p:spPr>
-      </p:sp>
-      <p:sp>
-        <p:nvSpPr>
-          <p:cNvPr id="19" name="Text 17"/>
-          <p:cNvSpPr/>
-          <p:nvPr/>
-        </p:nvSpPr>
-        <p:spPr>
-          <a:xfrm>
-            <a:off x="8083296" y="1965960"/>
-            <a:ext cx="749808" cy="621792"/>
-          </a:xfrm>
-          <a:prstGeom prst="rect">
-            <a:avLst/>
-          </a:prstGeom>
-          <a:noFill/>
-          <a:ln/>
-        </p:spPr>
-        <p:txBody>
-          <a:bodyPr wrap="square" lIns="0" tIns="0" rIns="0" bIns="0" rtlCol="0" anchor="ctr"/>
-          <a:lstStyle/>
-          <a:p>
-            <a:pPr algn="ctr" indent="0" marL="0">
-              <a:buNone/>
-            </a:pPr>
-            <a:r>
-              <a:rPr lang="en-US" sz="1500" b="1" dirty="0">
+              <a:t>기대값 constant = 1111 1111 1111 1111</a:t>
+            </a:r>
+            <a:endParaRPr lang="en-US" sz="1300" dirty="0"/>
+          </a:p>
+          <a:p>
+            <a:pPr algn="l" indent="0" marL="0">
+              <a:lnSpc>
+                <a:spcPct val="110000"/>
+              </a:lnSpc>
+              <a:buNone/>
+            </a:pPr>
+            <a:r>
+              <a:rPr lang="en-US" sz="1300" dirty="0">
                 <a:solidFill>
                   <a:srgbClr val="E7EDF5"/>
                 </a:solidFill>
@@ -4548,693 +6161,125 @@
                 <a:ea typeface="Courier New" pitchFamily="34" charset="-122"/>
                 <a:cs typeface="Courier New" pitchFamily="34" charset="-120"/>
               </a:rPr>
-              <a:t>2</a:t>
-            </a:r>
-            <a:endParaRPr lang="en-US" sz="1500" dirty="0"/>
-          </a:p>
-        </p:txBody>
-      </p:sp>
-      <p:sp>
-        <p:nvSpPr>
-          <p:cNvPr id="20" name="Shape 18"/>
-          <p:cNvSpPr/>
-          <p:nvPr/>
-        </p:nvSpPr>
-        <p:spPr>
-          <a:xfrm>
-            <a:off x="8942832" y="1965960"/>
-            <a:ext cx="749808" cy="621792"/>
-          </a:xfrm>
-          <a:prstGeom prst="roundRect">
-            <a:avLst>
-              <a:gd name="adj" fmla="val 7353"/>
-            </a:avLst>
-          </a:prstGeom>
-          <a:solidFill>
-            <a:srgbClr val="0B1119"/>
-          </a:solidFill>
-          <a:ln w="12700">
-            <a:solidFill>
-              <a:srgbClr val="2C3A4E"/>
-            </a:solidFill>
-            <a:prstDash val="solid"/>
-          </a:ln>
-        </p:spPr>
-      </p:sp>
-      <p:sp>
-        <p:nvSpPr>
-          <p:cNvPr id="21" name="Text 19"/>
-          <p:cNvSpPr/>
-          <p:nvPr/>
-        </p:nvSpPr>
-        <p:spPr>
-          <a:xfrm>
-            <a:off x="8942832" y="1965960"/>
-            <a:ext cx="749808" cy="621792"/>
-          </a:xfrm>
-          <a:prstGeom prst="rect">
-            <a:avLst/>
-          </a:prstGeom>
-          <a:noFill/>
-          <a:ln/>
-        </p:spPr>
-        <p:txBody>
-          <a:bodyPr wrap="square" lIns="0" tIns="0" rIns="0" bIns="0" rtlCol="0" anchor="ctr"/>
-          <a:lstStyle/>
-          <a:p>
-            <a:pPr algn="ctr" indent="0" marL="0">
-              <a:buNone/>
-            </a:pPr>
-            <a:r>
-              <a:rPr lang="en-US" sz="1500" b="1" dirty="0">
-                <a:solidFill>
-                  <a:srgbClr val="E7EDF5"/>
+              <a:t>실제값 readback = 1111 1011 1111 0111   ← 2비트 손상</a:t>
+            </a:r>
+            <a:endParaRPr lang="en-US" sz="1300" dirty="0"/>
+          </a:p>
+          <a:p>
+            <a:pPr algn="l" indent="0" marL="0">
+              <a:lnSpc>
+                <a:spcPct val="110000"/>
+              </a:lnSpc>
+              <a:buNone/>
+            </a:pPr>
+            <a:r>
+              <a:rPr lang="en-US" sz="1300" dirty="0">
+                <a:solidFill>
+                  <a:srgbClr val="F2C079"/>
                 </a:solidFill>
                 <a:latin typeface="Courier New" pitchFamily="34" charset="0"/>
                 <a:ea typeface="Courier New" pitchFamily="34" charset="-122"/>
                 <a:cs typeface="Courier New" pitchFamily="34" charset="-120"/>
               </a:rPr>
-              <a:t>6</a:t>
-            </a:r>
-            <a:endParaRPr lang="en-US" sz="1500" dirty="0"/>
-          </a:p>
-        </p:txBody>
-      </p:sp>
-      <p:sp>
-        <p:nvSpPr>
-          <p:cNvPr id="22" name="Text 20"/>
-          <p:cNvSpPr/>
-          <p:nvPr/>
-        </p:nvSpPr>
-        <p:spPr>
-          <a:xfrm>
-            <a:off x="548640" y="3063240"/>
-            <a:ext cx="2194560" cy="548640"/>
-          </a:xfrm>
-          <a:prstGeom prst="rect">
-            <a:avLst/>
-          </a:prstGeom>
-          <a:noFill/>
-          <a:ln/>
-        </p:spPr>
-        <p:txBody>
-          <a:bodyPr wrap="square" lIns="0" tIns="0" rIns="0" bIns="0" rtlCol="0" anchor="ctr"/>
-          <a:lstStyle/>
-          <a:p>
-            <a:pPr algn="r" indent="0" marL="0">
-              <a:buNone/>
-            </a:pPr>
-            <a:r>
-              <a:rPr lang="en-US" sz="1250" dirty="0">
-                <a:solidFill>
-                  <a:srgbClr val="9FB0C4"/>
+              <a:t>XOR (^)        = 0000 0100 0000 1000</a:t>
+            </a:r>
+            <a:endParaRPr lang="en-US" sz="1300" dirty="0"/>
+          </a:p>
+          <a:p>
+            <a:pPr algn="l" indent="0" marL="0">
+              <a:lnSpc>
+                <a:spcPct val="110000"/>
+              </a:lnSpc>
+              <a:buNone/>
+            </a:pPr>
+            <a:r>
+              <a:rPr lang="en-US" sz="1300" dirty="0">
+                <a:solidFill>
+                  <a:srgbClr val="E6604F"/>
+                </a:solidFill>
+                <a:latin typeface="Courier New" pitchFamily="34" charset="0"/>
+                <a:ea typeface="Courier New" pitchFamily="34" charset="-122"/>
+                <a:cs typeface="Courier New" pitchFamily="34" charset="-120"/>
+              </a:rPr>
+              <a:t>__popc(XOR)    = 2                       ← 오류 2개로 집계</a:t>
+            </a:r>
+            <a:endParaRPr lang="en-US" sz="1300" dirty="0"/>
+          </a:p>
+        </p:txBody>
+      </p:sp>
+      <p:sp>
+        <p:nvSpPr>
+          <p:cNvPr id="9" name="Text 7"/>
+          <p:cNvSpPr/>
+          <p:nvPr/>
+        </p:nvSpPr>
+        <p:spPr>
+          <a:xfrm>
+            <a:off x="548640" y="4663440"/>
+            <a:ext cx="11064240" cy="1005840"/>
+          </a:xfrm>
+          <a:prstGeom prst="rect">
+            <a:avLst/>
+          </a:prstGeom>
+          <a:noFill/>
+          <a:ln/>
+        </p:spPr>
+        <p:txBody>
+          <a:bodyPr wrap="square" lIns="0" tIns="0" rIns="0" bIns="0" rtlCol="0" anchor="t"/>
+          <a:lstStyle/>
+          <a:p>
+            <a:pPr indent="0" marL="0">
+              <a:lnSpc>
+                <a:spcPct val="120000"/>
+              </a:lnSpc>
+              <a:buNone/>
+            </a:pPr>
+            <a:r>
+              <a:rPr lang="en-US" sz="1600" dirty="0">
+                <a:solidFill>
+                  <a:srgbClr val="E7EDF5"/>
                 </a:solidFill>
                 <a:latin typeface="Malgun Gothic" pitchFamily="34" charset="0"/>
                 <a:ea typeface="Malgun Gothic" pitchFamily="34" charset="-122"/>
                 <a:cs typeface="Malgun Gothic" pitchFamily="34" charset="-120"/>
               </a:rPr>
-              <a:t>1단계 후 (stride=2)</a:t>
-            </a:r>
-            <a:endParaRPr lang="en-US" sz="1250" dirty="0"/>
-          </a:p>
-        </p:txBody>
-      </p:sp>
-      <p:sp>
-        <p:nvSpPr>
-          <p:cNvPr id="23" name="Shape 21"/>
-          <p:cNvSpPr/>
-          <p:nvPr/>
-        </p:nvSpPr>
-        <p:spPr>
-          <a:xfrm>
-            <a:off x="2926080" y="2926080"/>
-            <a:ext cx="749808" cy="621792"/>
-          </a:xfrm>
-          <a:prstGeom prst="roundRect">
-            <a:avLst>
-              <a:gd name="adj" fmla="val 7353"/>
-            </a:avLst>
-          </a:prstGeom>
-          <a:solidFill>
-            <a:srgbClr val="0B1119"/>
-          </a:solidFill>
-          <a:ln w="19050">
-            <a:solidFill>
-              <a:srgbClr val="3FB8C4"/>
-            </a:solidFill>
-            <a:prstDash val="solid"/>
-          </a:ln>
-        </p:spPr>
-      </p:sp>
-      <p:sp>
-        <p:nvSpPr>
-          <p:cNvPr id="24" name="Text 22"/>
-          <p:cNvSpPr/>
-          <p:nvPr/>
-        </p:nvSpPr>
-        <p:spPr>
-          <a:xfrm>
-            <a:off x="2926080" y="2926080"/>
-            <a:ext cx="749808" cy="621792"/>
-          </a:xfrm>
-          <a:prstGeom prst="rect">
-            <a:avLst/>
-          </a:prstGeom>
-          <a:noFill/>
-          <a:ln/>
-        </p:spPr>
-        <p:txBody>
-          <a:bodyPr wrap="square" lIns="0" tIns="0" rIns="0" bIns="0" rtlCol="0" anchor="ctr"/>
-          <a:lstStyle/>
-          <a:p>
-            <a:pPr algn="ctr" indent="0" marL="0">
-              <a:buNone/>
-            </a:pPr>
-            <a:r>
-              <a:rPr lang="en-US" sz="1500" b="1" dirty="0">
-                <a:solidFill>
-                  <a:srgbClr val="E7EDF5"/>
-                </a:solidFill>
-                <a:latin typeface="Courier New" pitchFamily="34" charset="0"/>
-                <a:ea typeface="Courier New" pitchFamily="34" charset="-122"/>
-                <a:cs typeface="Courier New" pitchFamily="34" charset="-120"/>
-              </a:rPr>
-              <a:t>8</a:t>
-            </a:r>
-            <a:endParaRPr lang="en-US" sz="1500" dirty="0"/>
-          </a:p>
-        </p:txBody>
-      </p:sp>
-      <p:sp>
-        <p:nvSpPr>
-          <p:cNvPr id="25" name="Shape 23"/>
-          <p:cNvSpPr/>
-          <p:nvPr/>
-        </p:nvSpPr>
-        <p:spPr>
-          <a:xfrm>
-            <a:off x="3785616" y="2926080"/>
-            <a:ext cx="749808" cy="621792"/>
-          </a:xfrm>
-          <a:prstGeom prst="roundRect">
-            <a:avLst>
-              <a:gd name="adj" fmla="val 7353"/>
-            </a:avLst>
-          </a:prstGeom>
-          <a:solidFill>
-            <a:srgbClr val="0B1119"/>
-          </a:solidFill>
-          <a:ln w="19050">
-            <a:solidFill>
-              <a:srgbClr val="3FB8C4"/>
-            </a:solidFill>
-            <a:prstDash val="solid"/>
-          </a:ln>
-        </p:spPr>
-      </p:sp>
-      <p:sp>
-        <p:nvSpPr>
-          <p:cNvPr id="26" name="Text 24"/>
-          <p:cNvSpPr/>
-          <p:nvPr/>
-        </p:nvSpPr>
-        <p:spPr>
-          <a:xfrm>
-            <a:off x="3785616" y="2926080"/>
-            <a:ext cx="749808" cy="621792"/>
-          </a:xfrm>
-          <a:prstGeom prst="rect">
-            <a:avLst/>
-          </a:prstGeom>
-          <a:noFill/>
-          <a:ln/>
-        </p:spPr>
-        <p:txBody>
-          <a:bodyPr wrap="square" lIns="0" tIns="0" rIns="0" bIns="0" rtlCol="0" anchor="ctr"/>
-          <a:lstStyle/>
-          <a:p>
-            <a:pPr algn="ctr" indent="0" marL="0">
-              <a:buNone/>
-            </a:pPr>
-            <a:r>
-              <a:rPr lang="en-US" sz="1500" b="1" dirty="0">
-                <a:solidFill>
-                  <a:srgbClr val="E7EDF5"/>
-                </a:solidFill>
-                <a:latin typeface="Courier New" pitchFamily="34" charset="0"/>
-                <a:ea typeface="Courier New" pitchFamily="34" charset="-122"/>
-                <a:cs typeface="Courier New" pitchFamily="34" charset="-120"/>
-              </a:rPr>
-              <a:t>10</a:t>
-            </a:r>
-            <a:endParaRPr lang="en-US" sz="1500" dirty="0"/>
-          </a:p>
-        </p:txBody>
-      </p:sp>
-      <p:sp>
-        <p:nvSpPr>
-          <p:cNvPr id="27" name="Shape 25"/>
-          <p:cNvSpPr/>
-          <p:nvPr/>
-        </p:nvSpPr>
-        <p:spPr>
-          <a:xfrm>
-            <a:off x="4645152" y="2926080"/>
-            <a:ext cx="749808" cy="621792"/>
-          </a:xfrm>
-          <a:prstGeom prst="roundRect">
-            <a:avLst>
-              <a:gd name="adj" fmla="val 7353"/>
-            </a:avLst>
-          </a:prstGeom>
-          <a:solidFill>
-            <a:srgbClr val="0B1119"/>
-          </a:solidFill>
-          <a:ln w="12700">
-            <a:solidFill>
-              <a:srgbClr val="2C3A4E"/>
-            </a:solidFill>
-            <a:prstDash val="solid"/>
-          </a:ln>
-        </p:spPr>
-      </p:sp>
-      <p:sp>
-        <p:nvSpPr>
-          <p:cNvPr id="28" name="Text 26"/>
-          <p:cNvSpPr/>
-          <p:nvPr/>
-        </p:nvSpPr>
-        <p:spPr>
-          <a:xfrm>
-            <a:off x="4645152" y="2926080"/>
-            <a:ext cx="749808" cy="621792"/>
-          </a:xfrm>
-          <a:prstGeom prst="rect">
-            <a:avLst/>
-          </a:prstGeom>
-          <a:noFill/>
-          <a:ln/>
-        </p:spPr>
-        <p:txBody>
-          <a:bodyPr wrap="square" lIns="0" tIns="0" rIns="0" bIns="0" rtlCol="0" anchor="ctr"/>
-          <a:lstStyle/>
-          <a:p>
-            <a:pPr algn="ctr" indent="0" marL="0">
-              <a:buNone/>
-            </a:pPr>
-            <a:r>
-              <a:rPr lang="en-US" sz="1500" b="1" dirty="0">
-                <a:solidFill>
-                  <a:srgbClr val="E7EDF5"/>
-                </a:solidFill>
-                <a:latin typeface="Courier New" pitchFamily="34" charset="0"/>
-                <a:ea typeface="Courier New" pitchFamily="34" charset="-122"/>
-                <a:cs typeface="Courier New" pitchFamily="34" charset="-120"/>
-              </a:rPr>
-              <a:t>6</a:t>
-            </a:r>
-            <a:endParaRPr lang="en-US" sz="1500" dirty="0"/>
-          </a:p>
-        </p:txBody>
-      </p:sp>
-      <p:sp>
-        <p:nvSpPr>
-          <p:cNvPr id="29" name="Shape 27"/>
-          <p:cNvSpPr/>
-          <p:nvPr/>
-        </p:nvSpPr>
-        <p:spPr>
-          <a:xfrm>
-            <a:off x="5504688" y="2926080"/>
-            <a:ext cx="749808" cy="621792"/>
-          </a:xfrm>
-          <a:prstGeom prst="roundRect">
-            <a:avLst>
-              <a:gd name="adj" fmla="val 7353"/>
-            </a:avLst>
-          </a:prstGeom>
-          <a:solidFill>
-            <a:srgbClr val="0B1119"/>
-          </a:solidFill>
-          <a:ln w="12700">
-            <a:solidFill>
-              <a:srgbClr val="2C3A4E"/>
-            </a:solidFill>
-            <a:prstDash val="solid"/>
-          </a:ln>
-        </p:spPr>
-      </p:sp>
-      <p:sp>
-        <p:nvSpPr>
-          <p:cNvPr id="30" name="Text 28"/>
-          <p:cNvSpPr/>
-          <p:nvPr/>
-        </p:nvSpPr>
-        <p:spPr>
-          <a:xfrm>
-            <a:off x="5504688" y="2926080"/>
-            <a:ext cx="749808" cy="621792"/>
-          </a:xfrm>
-          <a:prstGeom prst="rect">
-            <a:avLst/>
-          </a:prstGeom>
-          <a:noFill/>
-          <a:ln/>
-        </p:spPr>
-        <p:txBody>
-          <a:bodyPr wrap="square" lIns="0" tIns="0" rIns="0" bIns="0" rtlCol="0" anchor="ctr"/>
-          <a:lstStyle/>
-          <a:p>
-            <a:pPr algn="ctr" indent="0" marL="0">
-              <a:buNone/>
-            </a:pPr>
-            <a:r>
-              <a:rPr lang="en-US" sz="1500" b="1" dirty="0">
-                <a:solidFill>
-                  <a:srgbClr val="E7EDF5"/>
-                </a:solidFill>
-                <a:latin typeface="Courier New" pitchFamily="34" charset="0"/>
-                <a:ea typeface="Courier New" pitchFamily="34" charset="-122"/>
-                <a:cs typeface="Courier New" pitchFamily="34" charset="-120"/>
-              </a:rPr>
-              <a:t>7</a:t>
-            </a:r>
-            <a:endParaRPr lang="en-US" sz="1500" dirty="0"/>
-          </a:p>
-        </p:txBody>
-      </p:sp>
-      <p:sp>
-        <p:nvSpPr>
-          <p:cNvPr id="31" name="Text 29"/>
-          <p:cNvSpPr/>
-          <p:nvPr/>
-        </p:nvSpPr>
-        <p:spPr>
-          <a:xfrm>
-            <a:off x="548640" y="4023360"/>
-            <a:ext cx="2194560" cy="548640"/>
-          </a:xfrm>
-          <a:prstGeom prst="rect">
-            <a:avLst/>
-          </a:prstGeom>
-          <a:noFill/>
-          <a:ln/>
-        </p:spPr>
-        <p:txBody>
-          <a:bodyPr wrap="square" lIns="0" tIns="0" rIns="0" bIns="0" rtlCol="0" anchor="ctr"/>
-          <a:lstStyle/>
-          <a:p>
-            <a:pPr algn="r" indent="0" marL="0">
-              <a:buNone/>
-            </a:pPr>
-            <a:r>
-              <a:rPr lang="en-US" sz="1250" dirty="0">
-                <a:solidFill>
-                  <a:srgbClr val="9FB0C4"/>
+              <a:t>단순히 '맞다/틀리다'(1)가 아니라 </a:t>
+            </a:r>
+            <a:pPr indent="0" marL="0">
+              <a:lnSpc>
+                <a:spcPct val="120000"/>
+              </a:lnSpc>
+              <a:buNone/>
+            </a:pPr>
+            <a:r>
+              <a:rPr lang="en-US" sz="1600" b="1" dirty="0">
+                <a:solidFill>
+                  <a:srgbClr val="E8A33D"/>
                 </a:solidFill>
                 <a:latin typeface="Malgun Gothic" pitchFamily="34" charset="0"/>
                 <a:ea typeface="Malgun Gothic" pitchFamily="34" charset="-122"/>
                 <a:cs typeface="Malgun Gothic" pitchFamily="34" charset="-120"/>
               </a:rPr>
-              <a:t>2단계 후 (stride=1)</a:t>
-            </a:r>
-            <a:endParaRPr lang="en-US" sz="1250" dirty="0"/>
-          </a:p>
-        </p:txBody>
-      </p:sp>
-      <p:sp>
-        <p:nvSpPr>
-          <p:cNvPr id="32" name="Shape 30"/>
-          <p:cNvSpPr/>
-          <p:nvPr/>
-        </p:nvSpPr>
-        <p:spPr>
-          <a:xfrm>
-            <a:off x="2926080" y="3886200"/>
-            <a:ext cx="749808" cy="621792"/>
-          </a:xfrm>
-          <a:prstGeom prst="roundRect">
-            <a:avLst>
-              <a:gd name="adj" fmla="val 7353"/>
-            </a:avLst>
-          </a:prstGeom>
-          <a:solidFill>
-            <a:srgbClr val="0B1119"/>
-          </a:solidFill>
-          <a:ln w="19050">
-            <a:solidFill>
-              <a:srgbClr val="3FB8C4"/>
-            </a:solidFill>
-            <a:prstDash val="solid"/>
-          </a:ln>
-        </p:spPr>
-      </p:sp>
-      <p:sp>
-        <p:nvSpPr>
-          <p:cNvPr id="33" name="Text 31"/>
-          <p:cNvSpPr/>
-          <p:nvPr/>
-        </p:nvSpPr>
-        <p:spPr>
-          <a:xfrm>
-            <a:off x="2926080" y="3886200"/>
-            <a:ext cx="749808" cy="621792"/>
-          </a:xfrm>
-          <a:prstGeom prst="rect">
-            <a:avLst/>
-          </a:prstGeom>
-          <a:noFill/>
-          <a:ln/>
-        </p:spPr>
-        <p:txBody>
-          <a:bodyPr wrap="square" lIns="0" tIns="0" rIns="0" bIns="0" rtlCol="0" anchor="ctr"/>
-          <a:lstStyle/>
-          <a:p>
-            <a:pPr algn="ctr" indent="0" marL="0">
-              <a:buNone/>
-            </a:pPr>
-            <a:r>
-              <a:rPr lang="en-US" sz="1500" b="1" dirty="0">
+              <a:t>뒤집힌 비트의 개수</a:t>
+            </a:r>
+            <a:pPr indent="0" marL="0">
+              <a:lnSpc>
+                <a:spcPct val="120000"/>
+              </a:lnSpc>
+              <a:buNone/>
+            </a:pPr>
+            <a:r>
+              <a:rPr lang="en-US" sz="1600" dirty="0">
                 <a:solidFill>
                   <a:srgbClr val="E7EDF5"/>
-                </a:solidFill>
-                <a:latin typeface="Courier New" pitchFamily="34" charset="0"/>
-                <a:ea typeface="Courier New" pitchFamily="34" charset="-122"/>
-                <a:cs typeface="Courier New" pitchFamily="34" charset="-120"/>
-              </a:rPr>
-              <a:t>14</a:t>
-            </a:r>
-            <a:endParaRPr lang="en-US" sz="1500" dirty="0"/>
-          </a:p>
-        </p:txBody>
-      </p:sp>
-      <p:sp>
-        <p:nvSpPr>
-          <p:cNvPr id="34" name="Shape 32"/>
-          <p:cNvSpPr/>
-          <p:nvPr/>
-        </p:nvSpPr>
-        <p:spPr>
-          <a:xfrm>
-            <a:off x="3785616" y="3886200"/>
-            <a:ext cx="749808" cy="621792"/>
-          </a:xfrm>
-          <a:prstGeom prst="roundRect">
-            <a:avLst>
-              <a:gd name="adj" fmla="val 7353"/>
-            </a:avLst>
-          </a:prstGeom>
-          <a:solidFill>
-            <a:srgbClr val="0B1119"/>
-          </a:solidFill>
-          <a:ln w="12700">
-            <a:solidFill>
-              <a:srgbClr val="2C3A4E"/>
-            </a:solidFill>
-            <a:prstDash val="solid"/>
-          </a:ln>
-        </p:spPr>
-      </p:sp>
-      <p:sp>
-        <p:nvSpPr>
-          <p:cNvPr id="35" name="Text 33"/>
-          <p:cNvSpPr/>
-          <p:nvPr/>
-        </p:nvSpPr>
-        <p:spPr>
-          <a:xfrm>
-            <a:off x="3785616" y="3886200"/>
-            <a:ext cx="749808" cy="621792"/>
-          </a:xfrm>
-          <a:prstGeom prst="rect">
-            <a:avLst/>
-          </a:prstGeom>
-          <a:noFill/>
-          <a:ln/>
-        </p:spPr>
-        <p:txBody>
-          <a:bodyPr wrap="square" lIns="0" tIns="0" rIns="0" bIns="0" rtlCol="0" anchor="ctr"/>
-          <a:lstStyle/>
-          <a:p>
-            <a:pPr algn="ctr" indent="0" marL="0">
-              <a:buNone/>
-            </a:pPr>
-            <a:r>
-              <a:rPr lang="en-US" sz="1500" b="1" dirty="0">
-                <a:solidFill>
-                  <a:srgbClr val="E7EDF5"/>
-                </a:solidFill>
-                <a:latin typeface="Courier New" pitchFamily="34" charset="0"/>
-                <a:ea typeface="Courier New" pitchFamily="34" charset="-122"/>
-                <a:cs typeface="Courier New" pitchFamily="34" charset="-120"/>
-              </a:rPr>
-              <a:t>17</a:t>
-            </a:r>
-            <a:endParaRPr lang="en-US" sz="1500" dirty="0"/>
-          </a:p>
-        </p:txBody>
-      </p:sp>
-      <p:sp>
-        <p:nvSpPr>
-          <p:cNvPr id="36" name="Text 34"/>
-          <p:cNvSpPr/>
-          <p:nvPr/>
-        </p:nvSpPr>
-        <p:spPr>
-          <a:xfrm>
-            <a:off x="548640" y="4983480"/>
-            <a:ext cx="2194560" cy="548640"/>
-          </a:xfrm>
-          <a:prstGeom prst="rect">
-            <a:avLst/>
-          </a:prstGeom>
-          <a:noFill/>
-          <a:ln/>
-        </p:spPr>
-        <p:txBody>
-          <a:bodyPr wrap="square" lIns="0" tIns="0" rIns="0" bIns="0" rtlCol="0" anchor="ctr"/>
-          <a:lstStyle/>
-          <a:p>
-            <a:pPr algn="r" indent="0" marL="0">
-              <a:buNone/>
-            </a:pPr>
-            <a:r>
-              <a:rPr lang="en-US" sz="1250" b="1" dirty="0">
-                <a:solidFill>
-                  <a:srgbClr val="E8A33D"/>
                 </a:solidFill>
                 <a:latin typeface="Malgun Gothic" pitchFamily="34" charset="0"/>
                 <a:ea typeface="Malgun Gothic" pitchFamily="34" charset="-122"/>
                 <a:cs typeface="Malgun Gothic" pitchFamily="34" charset="-120"/>
               </a:rPr>
-              <a:t>3단계 후 = 블록 합</a:t>
-            </a:r>
-            <a:endParaRPr lang="en-US" sz="1250" dirty="0"/>
-          </a:p>
-        </p:txBody>
-      </p:sp>
-      <p:sp>
-        <p:nvSpPr>
-          <p:cNvPr id="37" name="Shape 35"/>
-          <p:cNvSpPr/>
-          <p:nvPr/>
-        </p:nvSpPr>
-        <p:spPr>
-          <a:xfrm>
-            <a:off x="2926080" y="4846320"/>
-            <a:ext cx="749808" cy="621792"/>
-          </a:xfrm>
-          <a:prstGeom prst="roundRect">
-            <a:avLst>
-              <a:gd name="adj" fmla="val 7353"/>
-            </a:avLst>
-          </a:prstGeom>
-          <a:solidFill>
-            <a:srgbClr val="241A16"/>
-          </a:solidFill>
-          <a:ln w="19050">
-            <a:solidFill>
-              <a:srgbClr val="E8A33D"/>
-            </a:solidFill>
-            <a:prstDash val="solid"/>
-          </a:ln>
-        </p:spPr>
-      </p:sp>
-      <p:sp>
-        <p:nvSpPr>
-          <p:cNvPr id="38" name="Text 36"/>
-          <p:cNvSpPr/>
-          <p:nvPr/>
-        </p:nvSpPr>
-        <p:spPr>
-          <a:xfrm>
-            <a:off x="2926080" y="4846320"/>
-            <a:ext cx="749808" cy="621792"/>
-          </a:xfrm>
-          <a:prstGeom prst="rect">
-            <a:avLst/>
-          </a:prstGeom>
-          <a:noFill/>
-          <a:ln/>
-        </p:spPr>
-        <p:txBody>
-          <a:bodyPr wrap="square" lIns="0" tIns="0" rIns="0" bIns="0" rtlCol="0" anchor="ctr"/>
-          <a:lstStyle/>
-          <a:p>
-            <a:pPr algn="ctr" indent="0" marL="0">
-              <a:buNone/>
-            </a:pPr>
-            <a:r>
-              <a:rPr lang="en-US" sz="1500" b="1" dirty="0">
-                <a:solidFill>
-                  <a:srgbClr val="E8A33D"/>
-                </a:solidFill>
-                <a:latin typeface="Courier New" pitchFamily="34" charset="0"/>
-                <a:ea typeface="Courier New" pitchFamily="34" charset="-122"/>
-                <a:cs typeface="Courier New" pitchFamily="34" charset="-120"/>
-              </a:rPr>
-              <a:t>31</a:t>
-            </a:r>
-            <a:endParaRPr lang="en-US" sz="1500" dirty="0"/>
-          </a:p>
-        </p:txBody>
-      </p:sp>
-      <p:sp>
-        <p:nvSpPr>
-          <p:cNvPr id="39" name="Text 37"/>
-          <p:cNvSpPr/>
-          <p:nvPr/>
-        </p:nvSpPr>
-        <p:spPr>
-          <a:xfrm>
-            <a:off x="548640" y="5806440"/>
-            <a:ext cx="11064240" cy="365760"/>
-          </a:xfrm>
-          <a:prstGeom prst="rect">
-            <a:avLst/>
-          </a:prstGeom>
-          <a:noFill/>
-          <a:ln/>
-        </p:spPr>
-        <p:txBody>
-          <a:bodyPr wrap="square" lIns="0" tIns="0" rIns="0" bIns="0" rtlCol="0" anchor="ctr"/>
-          <a:lstStyle/>
-          <a:p>
-            <a:pPr algn="ctr" indent="0" marL="0">
-              <a:buNone/>
-            </a:pPr>
-            <a:r>
-              <a:rPr lang="en-US" sz="1250" dirty="0">
-                <a:solidFill>
-                  <a:srgbClr val="3FB8C4"/>
-                </a:solidFill>
-                <a:latin typeface="Courier New" pitchFamily="34" charset="0"/>
-                <a:ea typeface="Courier New" pitchFamily="34" charset="-122"/>
-                <a:cs typeface="Courier New" pitchFamily="34" charset="-120"/>
-              </a:rPr>
-              <a:t>각 단계: threadErrorCount[i] += threadErrorCount[i + stride]  — 절반의 스레드만 일함</a:t>
-            </a:r>
-            <a:endParaRPr lang="en-US" sz="1250" dirty="0"/>
+              <a:t>를 셉니다. 한 word에서 여러 비트가 손상돼도 모두 포착 — 오류율 추정이 정밀해집니다.</a:t>
+            </a:r>
+            <a:endParaRPr lang="en-US" sz="1600" dirty="0"/>
           </a:p>
         </p:txBody>
       </p:sp>
@@ -5307,7 +6352,7 @@
                 <a:ea typeface="Courier New" pitchFamily="34" charset="-122"/>
                 <a:cs typeface="Courier New" pitchFamily="34" charset="-120"/>
               </a:rPr>
-              <a:t>5</a:t>
+              <a:t>4</a:t>
             </a:r>
             <a:endParaRPr lang="en-US" sz="2200" dirty="0"/>
           </a:p>
@@ -5346,7 +6391,7 @@
                 <a:ea typeface="Malgun Gothic" pitchFamily="34" charset="-122"/>
                 <a:cs typeface="Malgun Gothic" pitchFamily="34" charset="-120"/>
               </a:rPr>
-              <a:t>코드 완독 · deviceVerifyConstant</a:t>
+              <a:t>트리 리덕션 · stride를 반씩 줄인다</a:t>
             </a:r>
             <a:endParaRPr lang="en-US" sz="2900" dirty="0"/>
           </a:p>
@@ -5354,18 +6399,360 @@
       </p:sp>
       <p:sp>
         <p:nvSpPr>
-          <p:cNvPr id="4" name="Shape 2"/>
-          <p:cNvSpPr/>
-          <p:nvPr/>
-        </p:nvSpPr>
-        <p:spPr>
-          <a:xfrm>
-            <a:off x="548640" y="1463040"/>
-            <a:ext cx="11064240" cy="4114800"/>
+          <p:cNvPr id="4" name="Text 2"/>
+          <p:cNvSpPr/>
+          <p:nvPr/>
+        </p:nvSpPr>
+        <p:spPr>
+          <a:xfrm>
+            <a:off x="548640" y="1371600"/>
+            <a:ext cx="11064240" cy="411480"/>
+          </a:xfrm>
+          <a:prstGeom prst="rect">
+            <a:avLst/>
+          </a:prstGeom>
+          <a:noFill/>
+          <a:ln/>
+        </p:spPr>
+        <p:txBody>
+          <a:bodyPr wrap="square" lIns="0" tIns="0" rIns="0" bIns="0" rtlCol="0" anchor="ctr"/>
+          <a:lstStyle/>
+          <a:p>
+            <a:pPr indent="0" marL="0">
+              <a:buNone/>
+            </a:pPr>
+            <a:r>
+              <a:rPr lang="en-US" sz="1500" dirty="0">
+                <a:solidFill>
+                  <a:srgbClr val="9FB0C4"/>
+                </a:solidFill>
+                <a:latin typeface="Malgun Gothic" pitchFamily="34" charset="0"/>
+                <a:ea typeface="Malgun Gothic" pitchFamily="34" charset="-122"/>
+                <a:cs typeface="Malgun Gothic" pitchFamily="34" charset="-120"/>
+              </a:rPr>
+              <a:t>공유 배열의 값을 로그 단계로 접어 합칩니다. 512 → 256 → 128 → … → 1.</a:t>
+            </a:r>
+            <a:endParaRPr lang="en-US" sz="1500" dirty="0"/>
+          </a:p>
+        </p:txBody>
+      </p:sp>
+      <p:sp>
+        <p:nvSpPr>
+          <p:cNvPr id="5" name="Text 3"/>
+          <p:cNvSpPr/>
+          <p:nvPr/>
+        </p:nvSpPr>
+        <p:spPr>
+          <a:xfrm>
+            <a:off x="548640" y="2103120"/>
+            <a:ext cx="2194560" cy="548640"/>
+          </a:xfrm>
+          <a:prstGeom prst="rect">
+            <a:avLst/>
+          </a:prstGeom>
+          <a:noFill/>
+          <a:ln/>
+        </p:spPr>
+        <p:txBody>
+          <a:bodyPr wrap="square" lIns="0" tIns="0" rIns="0" bIns="0" rtlCol="0" anchor="ctr"/>
+          <a:lstStyle/>
+          <a:p>
+            <a:pPr algn="r" indent="0" marL="0">
+              <a:buNone/>
+            </a:pPr>
+            <a:r>
+              <a:rPr lang="en-US" sz="1250" dirty="0">
+                <a:solidFill>
+                  <a:srgbClr val="9FB0C4"/>
+                </a:solidFill>
+                <a:latin typeface="Malgun Gothic" pitchFamily="34" charset="0"/>
+                <a:ea typeface="Malgun Gothic" pitchFamily="34" charset="-122"/>
+                <a:cs typeface="Malgun Gothic" pitchFamily="34" charset="-120"/>
+              </a:rPr>
+              <a:t>초기 (stride=4)</a:t>
+            </a:r>
+            <a:endParaRPr lang="en-US" sz="1250" dirty="0"/>
+          </a:p>
+        </p:txBody>
+      </p:sp>
+      <p:sp>
+        <p:nvSpPr>
+          <p:cNvPr id="6" name="Shape 4"/>
+          <p:cNvSpPr/>
+          <p:nvPr/>
+        </p:nvSpPr>
+        <p:spPr>
+          <a:xfrm>
+            <a:off x="2926080" y="1965960"/>
+            <a:ext cx="749808" cy="621792"/>
           </a:xfrm>
           <a:prstGeom prst="roundRect">
             <a:avLst>
-              <a:gd name="adj" fmla="val 1111"/>
+              <a:gd name="adj" fmla="val 7353"/>
+            </a:avLst>
+          </a:prstGeom>
+          <a:solidFill>
+            <a:srgbClr val="0B1119"/>
+          </a:solidFill>
+          <a:ln w="19050">
+            <a:solidFill>
+              <a:srgbClr val="3FB8C4"/>
+            </a:solidFill>
+            <a:prstDash val="solid"/>
+          </a:ln>
+        </p:spPr>
+      </p:sp>
+      <p:sp>
+        <p:nvSpPr>
+          <p:cNvPr id="7" name="Text 5"/>
+          <p:cNvSpPr/>
+          <p:nvPr/>
+        </p:nvSpPr>
+        <p:spPr>
+          <a:xfrm>
+            <a:off x="2926080" y="1965960"/>
+            <a:ext cx="749808" cy="621792"/>
+          </a:xfrm>
+          <a:prstGeom prst="rect">
+            <a:avLst/>
+          </a:prstGeom>
+          <a:noFill/>
+          <a:ln/>
+        </p:spPr>
+        <p:txBody>
+          <a:bodyPr wrap="square" lIns="0" tIns="0" rIns="0" bIns="0" rtlCol="0" anchor="ctr"/>
+          <a:lstStyle/>
+          <a:p>
+            <a:pPr algn="ctr" indent="0" marL="0">
+              <a:buNone/>
+            </a:pPr>
+            <a:r>
+              <a:rPr lang="en-US" sz="1500" b="1" dirty="0">
+                <a:solidFill>
+                  <a:srgbClr val="E7EDF5"/>
+                </a:solidFill>
+                <a:latin typeface="Courier New" pitchFamily="34" charset="0"/>
+                <a:ea typeface="Courier New" pitchFamily="34" charset="-122"/>
+                <a:cs typeface="Courier New" pitchFamily="34" charset="-120"/>
+              </a:rPr>
+              <a:t>3</a:t>
+            </a:r>
+            <a:endParaRPr lang="en-US" sz="1500" dirty="0"/>
+          </a:p>
+        </p:txBody>
+      </p:sp>
+      <p:sp>
+        <p:nvSpPr>
+          <p:cNvPr id="8" name="Shape 6"/>
+          <p:cNvSpPr/>
+          <p:nvPr/>
+        </p:nvSpPr>
+        <p:spPr>
+          <a:xfrm>
+            <a:off x="3785616" y="1965960"/>
+            <a:ext cx="749808" cy="621792"/>
+          </a:xfrm>
+          <a:prstGeom prst="roundRect">
+            <a:avLst>
+              <a:gd name="adj" fmla="val 7353"/>
+            </a:avLst>
+          </a:prstGeom>
+          <a:solidFill>
+            <a:srgbClr val="0B1119"/>
+          </a:solidFill>
+          <a:ln w="19050">
+            <a:solidFill>
+              <a:srgbClr val="3FB8C4"/>
+            </a:solidFill>
+            <a:prstDash val="solid"/>
+          </a:ln>
+        </p:spPr>
+      </p:sp>
+      <p:sp>
+        <p:nvSpPr>
+          <p:cNvPr id="9" name="Text 7"/>
+          <p:cNvSpPr/>
+          <p:nvPr/>
+        </p:nvSpPr>
+        <p:spPr>
+          <a:xfrm>
+            <a:off x="3785616" y="1965960"/>
+            <a:ext cx="749808" cy="621792"/>
+          </a:xfrm>
+          <a:prstGeom prst="rect">
+            <a:avLst/>
+          </a:prstGeom>
+          <a:noFill/>
+          <a:ln/>
+        </p:spPr>
+        <p:txBody>
+          <a:bodyPr wrap="square" lIns="0" tIns="0" rIns="0" bIns="0" rtlCol="0" anchor="ctr"/>
+          <a:lstStyle/>
+          <a:p>
+            <a:pPr algn="ctr" indent="0" marL="0">
+              <a:buNone/>
+            </a:pPr>
+            <a:r>
+              <a:rPr lang="en-US" sz="1500" b="1" dirty="0">
+                <a:solidFill>
+                  <a:srgbClr val="E7EDF5"/>
+                </a:solidFill>
+                <a:latin typeface="Courier New" pitchFamily="34" charset="0"/>
+                <a:ea typeface="Courier New" pitchFamily="34" charset="-122"/>
+                <a:cs typeface="Courier New" pitchFamily="34" charset="-120"/>
+              </a:rPr>
+              <a:t>1</a:t>
+            </a:r>
+            <a:endParaRPr lang="en-US" sz="1500" dirty="0"/>
+          </a:p>
+        </p:txBody>
+      </p:sp>
+      <p:sp>
+        <p:nvSpPr>
+          <p:cNvPr id="10" name="Shape 8"/>
+          <p:cNvSpPr/>
+          <p:nvPr/>
+        </p:nvSpPr>
+        <p:spPr>
+          <a:xfrm>
+            <a:off x="4645152" y="1965960"/>
+            <a:ext cx="749808" cy="621792"/>
+          </a:xfrm>
+          <a:prstGeom prst="roundRect">
+            <a:avLst>
+              <a:gd name="adj" fmla="val 7353"/>
+            </a:avLst>
+          </a:prstGeom>
+          <a:solidFill>
+            <a:srgbClr val="0B1119"/>
+          </a:solidFill>
+          <a:ln w="19050">
+            <a:solidFill>
+              <a:srgbClr val="3FB8C4"/>
+            </a:solidFill>
+            <a:prstDash val="solid"/>
+          </a:ln>
+        </p:spPr>
+      </p:sp>
+      <p:sp>
+        <p:nvSpPr>
+          <p:cNvPr id="11" name="Text 9"/>
+          <p:cNvSpPr/>
+          <p:nvPr/>
+        </p:nvSpPr>
+        <p:spPr>
+          <a:xfrm>
+            <a:off x="4645152" y="1965960"/>
+            <a:ext cx="749808" cy="621792"/>
+          </a:xfrm>
+          <a:prstGeom prst="rect">
+            <a:avLst/>
+          </a:prstGeom>
+          <a:noFill/>
+          <a:ln/>
+        </p:spPr>
+        <p:txBody>
+          <a:bodyPr wrap="square" lIns="0" tIns="0" rIns="0" bIns="0" rtlCol="0" anchor="ctr"/>
+          <a:lstStyle/>
+          <a:p>
+            <a:pPr algn="ctr" indent="0" marL="0">
+              <a:buNone/>
+            </a:pPr>
+            <a:r>
+              <a:rPr lang="en-US" sz="1500" b="1" dirty="0">
+                <a:solidFill>
+                  <a:srgbClr val="E7EDF5"/>
+                </a:solidFill>
+                <a:latin typeface="Courier New" pitchFamily="34" charset="0"/>
+                <a:ea typeface="Courier New" pitchFamily="34" charset="-122"/>
+                <a:cs typeface="Courier New" pitchFamily="34" charset="-120"/>
+              </a:rPr>
+              <a:t>4</a:t>
+            </a:r>
+            <a:endParaRPr lang="en-US" sz="1500" dirty="0"/>
+          </a:p>
+        </p:txBody>
+      </p:sp>
+      <p:sp>
+        <p:nvSpPr>
+          <p:cNvPr id="12" name="Shape 10"/>
+          <p:cNvSpPr/>
+          <p:nvPr/>
+        </p:nvSpPr>
+        <p:spPr>
+          <a:xfrm>
+            <a:off x="5504688" y="1965960"/>
+            <a:ext cx="749808" cy="621792"/>
+          </a:xfrm>
+          <a:prstGeom prst="roundRect">
+            <a:avLst>
+              <a:gd name="adj" fmla="val 7353"/>
+            </a:avLst>
+          </a:prstGeom>
+          <a:solidFill>
+            <a:srgbClr val="0B1119"/>
+          </a:solidFill>
+          <a:ln w="19050">
+            <a:solidFill>
+              <a:srgbClr val="3FB8C4"/>
+            </a:solidFill>
+            <a:prstDash val="solid"/>
+          </a:ln>
+        </p:spPr>
+      </p:sp>
+      <p:sp>
+        <p:nvSpPr>
+          <p:cNvPr id="13" name="Text 11"/>
+          <p:cNvSpPr/>
+          <p:nvPr/>
+        </p:nvSpPr>
+        <p:spPr>
+          <a:xfrm>
+            <a:off x="5504688" y="1965960"/>
+            <a:ext cx="749808" cy="621792"/>
+          </a:xfrm>
+          <a:prstGeom prst="rect">
+            <a:avLst/>
+          </a:prstGeom>
+          <a:noFill/>
+          <a:ln/>
+        </p:spPr>
+        <p:txBody>
+          <a:bodyPr wrap="square" lIns="0" tIns="0" rIns="0" bIns="0" rtlCol="0" anchor="ctr"/>
+          <a:lstStyle/>
+          <a:p>
+            <a:pPr algn="ctr" indent="0" marL="0">
+              <a:buNone/>
+            </a:pPr>
+            <a:r>
+              <a:rPr lang="en-US" sz="1500" b="1" dirty="0">
+                <a:solidFill>
+                  <a:srgbClr val="E7EDF5"/>
+                </a:solidFill>
+                <a:latin typeface="Courier New" pitchFamily="34" charset="0"/>
+                <a:ea typeface="Courier New" pitchFamily="34" charset="-122"/>
+                <a:cs typeface="Courier New" pitchFamily="34" charset="-120"/>
+              </a:rPr>
+              <a:t>1</a:t>
+            </a:r>
+            <a:endParaRPr lang="en-US" sz="1500" dirty="0"/>
+          </a:p>
+        </p:txBody>
+      </p:sp>
+      <p:sp>
+        <p:nvSpPr>
+          <p:cNvPr id="14" name="Shape 12"/>
+          <p:cNvSpPr/>
+          <p:nvPr/>
+        </p:nvSpPr>
+        <p:spPr>
+          <a:xfrm>
+            <a:off x="6364224" y="1965960"/>
+            <a:ext cx="749808" cy="621792"/>
+          </a:xfrm>
+          <a:prstGeom prst="roundRect">
+            <a:avLst>
+              <a:gd name="adj" fmla="val 7353"/>
             </a:avLst>
           </a:prstGeom>
           <a:solidFill>
@@ -5381,93 +6768,228 @@
       </p:sp>
       <p:sp>
         <p:nvSpPr>
-          <p:cNvPr id="5" name="Text 3"/>
-          <p:cNvSpPr/>
-          <p:nvPr/>
-        </p:nvSpPr>
-        <p:spPr>
-          <a:xfrm>
-            <a:off x="768096" y="1609344"/>
-            <a:ext cx="10625328" cy="3822192"/>
-          </a:xfrm>
-          <a:prstGeom prst="rect">
-            <a:avLst/>
-          </a:prstGeom>
-          <a:noFill/>
-          <a:ln/>
-        </p:spPr>
-        <p:txBody>
-          <a:bodyPr wrap="square" lIns="0" tIns="0" rIns="0" bIns="0" rtlCol="0" anchor="t"/>
-          <a:lstStyle/>
-          <a:p>
-            <a:pPr algn="l" indent="0" marL="0">
-              <a:lnSpc>
-                <a:spcPct val="112000"/>
-              </a:lnSpc>
-              <a:buNone/>
-            </a:pPr>
-            <a:r>
-              <a:rPr lang="en-US" sz="1200" dirty="0">
-                <a:solidFill>
-                  <a:srgbClr val="E8A33D"/>
+          <p:cNvPr id="15" name="Text 13"/>
+          <p:cNvSpPr/>
+          <p:nvPr/>
+        </p:nvSpPr>
+        <p:spPr>
+          <a:xfrm>
+            <a:off x="6364224" y="1965960"/>
+            <a:ext cx="749808" cy="621792"/>
+          </a:xfrm>
+          <a:prstGeom prst="rect">
+            <a:avLst/>
+          </a:prstGeom>
+          <a:noFill/>
+          <a:ln/>
+        </p:spPr>
+        <p:txBody>
+          <a:bodyPr wrap="square" lIns="0" tIns="0" rIns="0" bIns="0" rtlCol="0" anchor="ctr"/>
+          <a:lstStyle/>
+          <a:p>
+            <a:pPr algn="ctr" indent="0" marL="0">
+              <a:buNone/>
+            </a:pPr>
+            <a:r>
+              <a:rPr lang="en-US" sz="1500" b="1" dirty="0">
+                <a:solidFill>
+                  <a:srgbClr val="E7EDF5"/>
                 </a:solidFill>
                 <a:latin typeface="Courier New" pitchFamily="34" charset="0"/>
                 <a:ea typeface="Courier New" pitchFamily="34" charset="-122"/>
                 <a:cs typeface="Courier New" pitchFamily="34" charset="-120"/>
               </a:rPr>
-              <a:t>__global__ void deviceVerifyConstant(uint* base, uint N, uint constant,</a:t>
-            </a:r>
-            <a:endParaRPr lang="en-US" sz="1200" dirty="0"/>
-          </a:p>
-          <a:p>
-            <a:pPr algn="l" indent="0" marL="0">
-              <a:lnSpc>
-                <a:spcPct val="112000"/>
-              </a:lnSpc>
-              <a:buNone/>
-            </a:pPr>
-            <a:r>
-              <a:rPr lang="en-US" sz="1200" dirty="0">
-                <a:solidFill>
-                  <a:srgbClr val="E8A33D"/>
+              <a:t>5</a:t>
+            </a:r>
+            <a:endParaRPr lang="en-US" sz="1500" dirty="0"/>
+          </a:p>
+        </p:txBody>
+      </p:sp>
+      <p:sp>
+        <p:nvSpPr>
+          <p:cNvPr id="16" name="Shape 14"/>
+          <p:cNvSpPr/>
+          <p:nvPr/>
+        </p:nvSpPr>
+        <p:spPr>
+          <a:xfrm>
+            <a:off x="7223760" y="1965960"/>
+            <a:ext cx="749808" cy="621792"/>
+          </a:xfrm>
+          <a:prstGeom prst="roundRect">
+            <a:avLst>
+              <a:gd name="adj" fmla="val 7353"/>
+            </a:avLst>
+          </a:prstGeom>
+          <a:solidFill>
+            <a:srgbClr val="0B1119"/>
+          </a:solidFill>
+          <a:ln w="12700">
+            <a:solidFill>
+              <a:srgbClr val="2C3A4E"/>
+            </a:solidFill>
+            <a:prstDash val="solid"/>
+          </a:ln>
+        </p:spPr>
+      </p:sp>
+      <p:sp>
+        <p:nvSpPr>
+          <p:cNvPr id="17" name="Text 15"/>
+          <p:cNvSpPr/>
+          <p:nvPr/>
+        </p:nvSpPr>
+        <p:spPr>
+          <a:xfrm>
+            <a:off x="7223760" y="1965960"/>
+            <a:ext cx="749808" cy="621792"/>
+          </a:xfrm>
+          <a:prstGeom prst="rect">
+            <a:avLst/>
+          </a:prstGeom>
+          <a:noFill/>
+          <a:ln/>
+        </p:spPr>
+        <p:txBody>
+          <a:bodyPr wrap="square" lIns="0" tIns="0" rIns="0" bIns="0" rtlCol="0" anchor="ctr"/>
+          <a:lstStyle/>
+          <a:p>
+            <a:pPr algn="ctr" indent="0" marL="0">
+              <a:buNone/>
+            </a:pPr>
+            <a:r>
+              <a:rPr lang="en-US" sz="1500" b="1" dirty="0">
+                <a:solidFill>
+                  <a:srgbClr val="E7EDF5"/>
                 </a:solidFill>
                 <a:latin typeface="Courier New" pitchFamily="34" charset="0"/>
                 <a:ea typeface="Courier New" pitchFamily="34" charset="-122"/>
                 <a:cs typeface="Courier New" pitchFamily="34" charset="-120"/>
               </a:rPr>
-              <a:t>                                     uint* blockErrorCount) {</a:t>
-            </a:r>
-            <a:endParaRPr lang="en-US" sz="1200" dirty="0"/>
-          </a:p>
-          <a:p>
-            <a:pPr algn="l" indent="0" marL="0">
-              <a:lnSpc>
-                <a:spcPct val="112000"/>
-              </a:lnSpc>
-              <a:buNone/>
-            </a:pPr>
-            <a:r>
-              <a:rPr lang="en-US" sz="1200" dirty="0">
-                <a:solidFill>
-                  <a:srgbClr val="3FB8C4"/>
+              <a:t>9</a:t>
+            </a:r>
+            <a:endParaRPr lang="en-US" sz="1500" dirty="0"/>
+          </a:p>
+        </p:txBody>
+      </p:sp>
+      <p:sp>
+        <p:nvSpPr>
+          <p:cNvPr id="18" name="Shape 16"/>
+          <p:cNvSpPr/>
+          <p:nvPr/>
+        </p:nvSpPr>
+        <p:spPr>
+          <a:xfrm>
+            <a:off x="8083296" y="1965960"/>
+            <a:ext cx="749808" cy="621792"/>
+          </a:xfrm>
+          <a:prstGeom prst="roundRect">
+            <a:avLst>
+              <a:gd name="adj" fmla="val 7353"/>
+            </a:avLst>
+          </a:prstGeom>
+          <a:solidFill>
+            <a:srgbClr val="0B1119"/>
+          </a:solidFill>
+          <a:ln w="12700">
+            <a:solidFill>
+              <a:srgbClr val="2C3A4E"/>
+            </a:solidFill>
+            <a:prstDash val="solid"/>
+          </a:ln>
+        </p:spPr>
+      </p:sp>
+      <p:sp>
+        <p:nvSpPr>
+          <p:cNvPr id="19" name="Text 17"/>
+          <p:cNvSpPr/>
+          <p:nvPr/>
+        </p:nvSpPr>
+        <p:spPr>
+          <a:xfrm>
+            <a:off x="8083296" y="1965960"/>
+            <a:ext cx="749808" cy="621792"/>
+          </a:xfrm>
+          <a:prstGeom prst="rect">
+            <a:avLst/>
+          </a:prstGeom>
+          <a:noFill/>
+          <a:ln/>
+        </p:spPr>
+        <p:txBody>
+          <a:bodyPr wrap="square" lIns="0" tIns="0" rIns="0" bIns="0" rtlCol="0" anchor="ctr"/>
+          <a:lstStyle/>
+          <a:p>
+            <a:pPr algn="ctr" indent="0" marL="0">
+              <a:buNone/>
+            </a:pPr>
+            <a:r>
+              <a:rPr lang="en-US" sz="1500" b="1" dirty="0">
+                <a:solidFill>
+                  <a:srgbClr val="E7EDF5"/>
                 </a:solidFill>
                 <a:latin typeface="Courier New" pitchFamily="34" charset="0"/>
                 <a:ea typeface="Courier New" pitchFamily="34" charset="-122"/>
                 <a:cs typeface="Courier New" pitchFamily="34" charset="-120"/>
               </a:rPr>
-              <a:t>    extern __shared__ uint threadErrorCount[];        // 블록 공유 버퍼 (512개)</a:t>
-            </a:r>
-            <a:endParaRPr lang="en-US" sz="1200" dirty="0"/>
-          </a:p>
-          <a:p>
-            <a:pPr algn="l" indent="0" marL="0">
-              <a:lnSpc>
-                <a:spcPct val="112000"/>
-              </a:lnSpc>
-              <a:buNone/>
-            </a:pPr>
-            <a:r>
-              <a:rPr lang="en-US" sz="1200" dirty="0">
+              <a:t>2</a:t>
+            </a:r>
+            <a:endParaRPr lang="en-US" sz="1500" dirty="0"/>
+          </a:p>
+        </p:txBody>
+      </p:sp>
+      <p:sp>
+        <p:nvSpPr>
+          <p:cNvPr id="20" name="Shape 18"/>
+          <p:cNvSpPr/>
+          <p:nvPr/>
+        </p:nvSpPr>
+        <p:spPr>
+          <a:xfrm>
+            <a:off x="8942832" y="1965960"/>
+            <a:ext cx="749808" cy="621792"/>
+          </a:xfrm>
+          <a:prstGeom prst="roundRect">
+            <a:avLst>
+              <a:gd name="adj" fmla="val 7353"/>
+            </a:avLst>
+          </a:prstGeom>
+          <a:solidFill>
+            <a:srgbClr val="0B1119"/>
+          </a:solidFill>
+          <a:ln w="12700">
+            <a:solidFill>
+              <a:srgbClr val="2C3A4E"/>
+            </a:solidFill>
+            <a:prstDash val="solid"/>
+          </a:ln>
+        </p:spPr>
+      </p:sp>
+      <p:sp>
+        <p:nvSpPr>
+          <p:cNvPr id="21" name="Text 19"/>
+          <p:cNvSpPr/>
+          <p:nvPr/>
+        </p:nvSpPr>
+        <p:spPr>
+          <a:xfrm>
+            <a:off x="8942832" y="1965960"/>
+            <a:ext cx="749808" cy="621792"/>
+          </a:xfrm>
+          <a:prstGeom prst="rect">
+            <a:avLst/>
+          </a:prstGeom>
+          <a:noFill/>
+          <a:ln/>
+        </p:spPr>
+        <p:txBody>
+          <a:bodyPr wrap="square" lIns="0" tIns="0" rIns="0" bIns="0" rtlCol="0" anchor="ctr"/>
+          <a:lstStyle/>
+          <a:p>
+            <a:pPr algn="ctr" indent="0" marL="0">
+              <a:buNone/>
+            </a:pPr>
+            <a:r>
+              <a:rPr lang="en-US" sz="1500" b="1" dirty="0">
                 <a:solidFill>
                   <a:srgbClr val="E7EDF5"/>
                 </a:solidFill>
@@ -5475,19 +6997,104 @@
                 <a:ea typeface="Courier New" pitchFamily="34" charset="-122"/>
                 <a:cs typeface="Courier New" pitchFamily="34" charset="-120"/>
               </a:rPr>
-              <a:t>    threadErrorCount[threadIdx.x] = 0;</a:t>
-            </a:r>
-            <a:endParaRPr lang="en-US" sz="1200" dirty="0"/>
-          </a:p>
-          <a:p>
-            <a:pPr algn="l" indent="0" marL="0">
-              <a:lnSpc>
-                <a:spcPct val="112000"/>
-              </a:lnSpc>
-              <a:buNone/>
-            </a:pPr>
-            <a:r>
-              <a:rPr lang="en-US" sz="1200" dirty="0">
+              <a:t>6</a:t>
+            </a:r>
+            <a:endParaRPr lang="en-US" sz="1500" dirty="0"/>
+          </a:p>
+        </p:txBody>
+      </p:sp>
+      <p:sp>
+        <p:nvSpPr>
+          <p:cNvPr id="22" name="Text 20"/>
+          <p:cNvSpPr/>
+          <p:nvPr/>
+        </p:nvSpPr>
+        <p:spPr>
+          <a:xfrm>
+            <a:off x="548640" y="3063240"/>
+            <a:ext cx="2194560" cy="548640"/>
+          </a:xfrm>
+          <a:prstGeom prst="rect">
+            <a:avLst/>
+          </a:prstGeom>
+          <a:noFill/>
+          <a:ln/>
+        </p:spPr>
+        <p:txBody>
+          <a:bodyPr wrap="square" lIns="0" tIns="0" rIns="0" bIns="0" rtlCol="0" anchor="ctr"/>
+          <a:lstStyle/>
+          <a:p>
+            <a:pPr algn="r" indent="0" marL="0">
+              <a:buNone/>
+            </a:pPr>
+            <a:r>
+              <a:rPr lang="en-US" sz="1250" dirty="0">
+                <a:solidFill>
+                  <a:srgbClr val="9FB0C4"/>
+                </a:solidFill>
+                <a:latin typeface="Malgun Gothic" pitchFamily="34" charset="0"/>
+                <a:ea typeface="Malgun Gothic" pitchFamily="34" charset="-122"/>
+                <a:cs typeface="Malgun Gothic" pitchFamily="34" charset="-120"/>
+              </a:rPr>
+              <a:t>1단계 후 (stride=2)</a:t>
+            </a:r>
+            <a:endParaRPr lang="en-US" sz="1250" dirty="0"/>
+          </a:p>
+        </p:txBody>
+      </p:sp>
+      <p:sp>
+        <p:nvSpPr>
+          <p:cNvPr id="23" name="Shape 21"/>
+          <p:cNvSpPr/>
+          <p:nvPr/>
+        </p:nvSpPr>
+        <p:spPr>
+          <a:xfrm>
+            <a:off x="2926080" y="2926080"/>
+            <a:ext cx="749808" cy="621792"/>
+          </a:xfrm>
+          <a:prstGeom prst="roundRect">
+            <a:avLst>
+              <a:gd name="adj" fmla="val 7353"/>
+            </a:avLst>
+          </a:prstGeom>
+          <a:solidFill>
+            <a:srgbClr val="0B1119"/>
+          </a:solidFill>
+          <a:ln w="19050">
+            <a:solidFill>
+              <a:srgbClr val="3FB8C4"/>
+            </a:solidFill>
+            <a:prstDash val="solid"/>
+          </a:ln>
+        </p:spPr>
+      </p:sp>
+      <p:sp>
+        <p:nvSpPr>
+          <p:cNvPr id="24" name="Text 22"/>
+          <p:cNvSpPr/>
+          <p:nvPr/>
+        </p:nvSpPr>
+        <p:spPr>
+          <a:xfrm>
+            <a:off x="2926080" y="2926080"/>
+            <a:ext cx="749808" cy="621792"/>
+          </a:xfrm>
+          <a:prstGeom prst="rect">
+            <a:avLst/>
+          </a:prstGeom>
+          <a:noFill/>
+          <a:ln/>
+        </p:spPr>
+        <p:txBody>
+          <a:bodyPr wrap="square" lIns="0" tIns="0" rIns="0" bIns="0" rtlCol="0" anchor="ctr"/>
+          <a:lstStyle/>
+          <a:p>
+            <a:pPr algn="ctr" indent="0" marL="0">
+              <a:buNone/>
+            </a:pPr>
+            <a:r>
+              <a:rPr lang="en-US" sz="1500" b="1" dirty="0">
                 <a:solidFill>
                   <a:srgbClr val="E7EDF5"/>
                 </a:solidFill>
@@ -5495,88 +7102,302 @@
                 <a:ea typeface="Courier New" pitchFamily="34" charset="-122"/>
                 <a:cs typeface="Courier New" pitchFamily="34" charset="-120"/>
               </a:rPr>
-              <a:t>    for (uint i = 0; i &lt; N; i++)                       // 내 word들 검사</a:t>
-            </a:r>
-            <a:endParaRPr lang="en-US" sz="1200" dirty="0"/>
-          </a:p>
-          <a:p>
-            <a:pPr algn="l" indent="0" marL="0">
-              <a:lnSpc>
-                <a:spcPct val="112000"/>
-              </a:lnSpc>
-              <a:buNone/>
-            </a:pPr>
-            <a:r>
-              <a:rPr lang="en-US" sz="1200" dirty="0">
-                <a:solidFill>
-                  <a:srgbClr val="F2C079"/>
+              <a:t>8</a:t>
+            </a:r>
+            <a:endParaRPr lang="en-US" sz="1500" dirty="0"/>
+          </a:p>
+        </p:txBody>
+      </p:sp>
+      <p:sp>
+        <p:nvSpPr>
+          <p:cNvPr id="25" name="Shape 23"/>
+          <p:cNvSpPr/>
+          <p:nvPr/>
+        </p:nvSpPr>
+        <p:spPr>
+          <a:xfrm>
+            <a:off x="3785616" y="2926080"/>
+            <a:ext cx="749808" cy="621792"/>
+          </a:xfrm>
+          <a:prstGeom prst="roundRect">
+            <a:avLst>
+              <a:gd name="adj" fmla="val 7353"/>
+            </a:avLst>
+          </a:prstGeom>
+          <a:solidFill>
+            <a:srgbClr val="0B1119"/>
+          </a:solidFill>
+          <a:ln w="19050">
+            <a:solidFill>
+              <a:srgbClr val="3FB8C4"/>
+            </a:solidFill>
+            <a:prstDash val="solid"/>
+          </a:ln>
+        </p:spPr>
+      </p:sp>
+      <p:sp>
+        <p:nvSpPr>
+          <p:cNvPr id="26" name="Text 24"/>
+          <p:cNvSpPr/>
+          <p:nvPr/>
+        </p:nvSpPr>
+        <p:spPr>
+          <a:xfrm>
+            <a:off x="3785616" y="2926080"/>
+            <a:ext cx="749808" cy="621792"/>
+          </a:xfrm>
+          <a:prstGeom prst="rect">
+            <a:avLst/>
+          </a:prstGeom>
+          <a:noFill/>
+          <a:ln/>
+        </p:spPr>
+        <p:txBody>
+          <a:bodyPr wrap="square" lIns="0" tIns="0" rIns="0" bIns="0" rtlCol="0" anchor="ctr"/>
+          <a:lstStyle/>
+          <a:p>
+            <a:pPr algn="ctr" indent="0" marL="0">
+              <a:buNone/>
+            </a:pPr>
+            <a:r>
+              <a:rPr lang="en-US" sz="1500" b="1" dirty="0">
+                <a:solidFill>
+                  <a:srgbClr val="E7EDF5"/>
                 </a:solidFill>
                 <a:latin typeface="Courier New" pitchFamily="34" charset="0"/>
                 <a:ea typeface="Courier New" pitchFamily="34" charset="-122"/>
                 <a:cs typeface="Courier New" pitchFamily="34" charset="-120"/>
               </a:rPr>
-              <a:t>        threadErrorCount[threadIdx.x] += BITSDIFF(*(THREAD_ADDRESS(base,N,i)), constant);</a:t>
-            </a:r>
-            <a:endParaRPr lang="en-US" sz="1200" dirty="0"/>
-          </a:p>
-          <a:p>
-            <a:pPr algn="l" indent="0" marL="0">
-              <a:lnSpc>
-                <a:spcPct val="112000"/>
-              </a:lnSpc>
-              <a:buNone/>
-            </a:pPr>
-            <a:endParaRPr lang="en-US" sz="1200" dirty="0"/>
-          </a:p>
-          <a:p>
-            <a:pPr algn="l" indent="0" marL="0">
-              <a:lnSpc>
-                <a:spcPct val="112000"/>
-              </a:lnSpc>
-              <a:buNone/>
-            </a:pPr>
-            <a:r>
-              <a:rPr lang="en-US" sz="1200" dirty="0">
-                <a:solidFill>
-                  <a:srgbClr val="3FB8C4"/>
+              <a:t>10</a:t>
+            </a:r>
+            <a:endParaRPr lang="en-US" sz="1500" dirty="0"/>
+          </a:p>
+        </p:txBody>
+      </p:sp>
+      <p:sp>
+        <p:nvSpPr>
+          <p:cNvPr id="27" name="Shape 25"/>
+          <p:cNvSpPr/>
+          <p:nvPr/>
+        </p:nvSpPr>
+        <p:spPr>
+          <a:xfrm>
+            <a:off x="4645152" y="2926080"/>
+            <a:ext cx="749808" cy="621792"/>
+          </a:xfrm>
+          <a:prstGeom prst="roundRect">
+            <a:avLst>
+              <a:gd name="adj" fmla="val 7353"/>
+            </a:avLst>
+          </a:prstGeom>
+          <a:solidFill>
+            <a:srgbClr val="0B1119"/>
+          </a:solidFill>
+          <a:ln w="12700">
+            <a:solidFill>
+              <a:srgbClr val="2C3A4E"/>
+            </a:solidFill>
+            <a:prstDash val="solid"/>
+          </a:ln>
+        </p:spPr>
+      </p:sp>
+      <p:sp>
+        <p:nvSpPr>
+          <p:cNvPr id="28" name="Text 26"/>
+          <p:cNvSpPr/>
+          <p:nvPr/>
+        </p:nvSpPr>
+        <p:spPr>
+          <a:xfrm>
+            <a:off x="4645152" y="2926080"/>
+            <a:ext cx="749808" cy="621792"/>
+          </a:xfrm>
+          <a:prstGeom prst="rect">
+            <a:avLst/>
+          </a:prstGeom>
+          <a:noFill/>
+          <a:ln/>
+        </p:spPr>
+        <p:txBody>
+          <a:bodyPr wrap="square" lIns="0" tIns="0" rIns="0" bIns="0" rtlCol="0" anchor="ctr"/>
+          <a:lstStyle/>
+          <a:p>
+            <a:pPr algn="ctr" indent="0" marL="0">
+              <a:buNone/>
+            </a:pPr>
+            <a:r>
+              <a:rPr lang="en-US" sz="1500" b="1" dirty="0">
+                <a:solidFill>
+                  <a:srgbClr val="E7EDF5"/>
                 </a:solidFill>
                 <a:latin typeface="Courier New" pitchFamily="34" charset="0"/>
                 <a:ea typeface="Courier New" pitchFamily="34" charset="-122"/>
                 <a:cs typeface="Courier New" pitchFamily="34" charset="-120"/>
               </a:rPr>
-              <a:t>    for (uint stride = blockDim.x&gt;&gt;1; stride &gt; 0; stride &gt;&gt;= 1) {   // 트리 리덕션</a:t>
-            </a:r>
-            <a:endParaRPr lang="en-US" sz="1200" dirty="0"/>
-          </a:p>
-          <a:p>
-            <a:pPr algn="l" indent="0" marL="0">
-              <a:lnSpc>
-                <a:spcPct val="112000"/>
-              </a:lnSpc>
-              <a:buNone/>
-            </a:pPr>
-            <a:r>
-              <a:rPr lang="en-US" sz="1200" dirty="0">
-                <a:solidFill>
-                  <a:srgbClr val="E6604F"/>
+              <a:t>6</a:t>
+            </a:r>
+            <a:endParaRPr lang="en-US" sz="1500" dirty="0"/>
+          </a:p>
+        </p:txBody>
+      </p:sp>
+      <p:sp>
+        <p:nvSpPr>
+          <p:cNvPr id="29" name="Shape 27"/>
+          <p:cNvSpPr/>
+          <p:nvPr/>
+        </p:nvSpPr>
+        <p:spPr>
+          <a:xfrm>
+            <a:off x="5504688" y="2926080"/>
+            <a:ext cx="749808" cy="621792"/>
+          </a:xfrm>
+          <a:prstGeom prst="roundRect">
+            <a:avLst>
+              <a:gd name="adj" fmla="val 7353"/>
+            </a:avLst>
+          </a:prstGeom>
+          <a:solidFill>
+            <a:srgbClr val="0B1119"/>
+          </a:solidFill>
+          <a:ln w="12700">
+            <a:solidFill>
+              <a:srgbClr val="2C3A4E"/>
+            </a:solidFill>
+            <a:prstDash val="solid"/>
+          </a:ln>
+        </p:spPr>
+      </p:sp>
+      <p:sp>
+        <p:nvSpPr>
+          <p:cNvPr id="30" name="Text 28"/>
+          <p:cNvSpPr/>
+          <p:nvPr/>
+        </p:nvSpPr>
+        <p:spPr>
+          <a:xfrm>
+            <a:off x="5504688" y="2926080"/>
+            <a:ext cx="749808" cy="621792"/>
+          </a:xfrm>
+          <a:prstGeom prst="rect">
+            <a:avLst/>
+          </a:prstGeom>
+          <a:noFill/>
+          <a:ln/>
+        </p:spPr>
+        <p:txBody>
+          <a:bodyPr wrap="square" lIns="0" tIns="0" rIns="0" bIns="0" rtlCol="0" anchor="ctr"/>
+          <a:lstStyle/>
+          <a:p>
+            <a:pPr algn="ctr" indent="0" marL="0">
+              <a:buNone/>
+            </a:pPr>
+            <a:r>
+              <a:rPr lang="en-US" sz="1500" b="1" dirty="0">
+                <a:solidFill>
+                  <a:srgbClr val="E7EDF5"/>
                 </a:solidFill>
                 <a:latin typeface="Courier New" pitchFamily="34" charset="0"/>
                 <a:ea typeface="Courier New" pitchFamily="34" charset="-122"/>
                 <a:cs typeface="Courier New" pitchFamily="34" charset="-120"/>
               </a:rPr>
-              <a:t>        __syncthreads();                              // ★ 단계마다 동기화 필수</a:t>
-            </a:r>
-            <a:endParaRPr lang="en-US" sz="1200" dirty="0"/>
-          </a:p>
-          <a:p>
-            <a:pPr algn="l" indent="0" marL="0">
-              <a:lnSpc>
-                <a:spcPct val="112000"/>
-              </a:lnSpc>
-              <a:buNone/>
-            </a:pPr>
-            <a:r>
-              <a:rPr lang="en-US" sz="1200" dirty="0">
+              <a:t>7</a:t>
+            </a:r>
+            <a:endParaRPr lang="en-US" sz="1500" dirty="0"/>
+          </a:p>
+        </p:txBody>
+      </p:sp>
+      <p:sp>
+        <p:nvSpPr>
+          <p:cNvPr id="31" name="Text 29"/>
+          <p:cNvSpPr/>
+          <p:nvPr/>
+        </p:nvSpPr>
+        <p:spPr>
+          <a:xfrm>
+            <a:off x="548640" y="4023360"/>
+            <a:ext cx="2194560" cy="548640"/>
+          </a:xfrm>
+          <a:prstGeom prst="rect">
+            <a:avLst/>
+          </a:prstGeom>
+          <a:noFill/>
+          <a:ln/>
+        </p:spPr>
+        <p:txBody>
+          <a:bodyPr wrap="square" lIns="0" tIns="0" rIns="0" bIns="0" rtlCol="0" anchor="ctr"/>
+          <a:lstStyle/>
+          <a:p>
+            <a:pPr algn="r" indent="0" marL="0">
+              <a:buNone/>
+            </a:pPr>
+            <a:r>
+              <a:rPr lang="en-US" sz="1250" dirty="0">
+                <a:solidFill>
+                  <a:srgbClr val="9FB0C4"/>
+                </a:solidFill>
+                <a:latin typeface="Malgun Gothic" pitchFamily="34" charset="0"/>
+                <a:ea typeface="Malgun Gothic" pitchFamily="34" charset="-122"/>
+                <a:cs typeface="Malgun Gothic" pitchFamily="34" charset="-120"/>
+              </a:rPr>
+              <a:t>2단계 후 (stride=1)</a:t>
+            </a:r>
+            <a:endParaRPr lang="en-US" sz="1250" dirty="0"/>
+          </a:p>
+        </p:txBody>
+      </p:sp>
+      <p:sp>
+        <p:nvSpPr>
+          <p:cNvPr id="32" name="Shape 30"/>
+          <p:cNvSpPr/>
+          <p:nvPr/>
+        </p:nvSpPr>
+        <p:spPr>
+          <a:xfrm>
+            <a:off x="2926080" y="3886200"/>
+            <a:ext cx="749808" cy="621792"/>
+          </a:xfrm>
+          <a:prstGeom prst="roundRect">
+            <a:avLst>
+              <a:gd name="adj" fmla="val 7353"/>
+            </a:avLst>
+          </a:prstGeom>
+          <a:solidFill>
+            <a:srgbClr val="0B1119"/>
+          </a:solidFill>
+          <a:ln w="19050">
+            <a:solidFill>
+              <a:srgbClr val="3FB8C4"/>
+            </a:solidFill>
+            <a:prstDash val="solid"/>
+          </a:ln>
+        </p:spPr>
+      </p:sp>
+      <p:sp>
+        <p:nvSpPr>
+          <p:cNvPr id="33" name="Text 31"/>
+          <p:cNvSpPr/>
+          <p:nvPr/>
+        </p:nvSpPr>
+        <p:spPr>
+          <a:xfrm>
+            <a:off x="2926080" y="3886200"/>
+            <a:ext cx="749808" cy="621792"/>
+          </a:xfrm>
+          <a:prstGeom prst="rect">
+            <a:avLst/>
+          </a:prstGeom>
+          <a:noFill/>
+          <a:ln/>
+        </p:spPr>
+        <p:txBody>
+          <a:bodyPr wrap="square" lIns="0" tIns="0" rIns="0" bIns="0" rtlCol="0" anchor="ctr"/>
+          <a:lstStyle/>
+          <a:p>
+            <a:pPr algn="ctr" indent="0" marL="0">
+              <a:buNone/>
+            </a:pPr>
+            <a:r>
+              <a:rPr lang="en-US" sz="1500" b="1" dirty="0">
                 <a:solidFill>
                   <a:srgbClr val="E7EDF5"/>
                 </a:solidFill>
@@ -5584,19 +7405,65 @@
                 <a:ea typeface="Courier New" pitchFamily="34" charset="-122"/>
                 <a:cs typeface="Courier New" pitchFamily="34" charset="-120"/>
               </a:rPr>
-              <a:t>        if (threadIdx.x &lt; stride)</a:t>
-            </a:r>
-            <a:endParaRPr lang="en-US" sz="1200" dirty="0"/>
-          </a:p>
-          <a:p>
-            <a:pPr algn="l" indent="0" marL="0">
-              <a:lnSpc>
-                <a:spcPct val="112000"/>
-              </a:lnSpc>
-              <a:buNone/>
-            </a:pPr>
-            <a:r>
-              <a:rPr lang="en-US" sz="1200" dirty="0">
+              <a:t>14</a:t>
+            </a:r>
+            <a:endParaRPr lang="en-US" sz="1500" dirty="0"/>
+          </a:p>
+        </p:txBody>
+      </p:sp>
+      <p:sp>
+        <p:nvSpPr>
+          <p:cNvPr id="34" name="Shape 32"/>
+          <p:cNvSpPr/>
+          <p:nvPr/>
+        </p:nvSpPr>
+        <p:spPr>
+          <a:xfrm>
+            <a:off x="3785616" y="3886200"/>
+            <a:ext cx="749808" cy="621792"/>
+          </a:xfrm>
+          <a:prstGeom prst="roundRect">
+            <a:avLst>
+              <a:gd name="adj" fmla="val 7353"/>
+            </a:avLst>
+          </a:prstGeom>
+          <a:solidFill>
+            <a:srgbClr val="0B1119"/>
+          </a:solidFill>
+          <a:ln w="12700">
+            <a:solidFill>
+              <a:srgbClr val="2C3A4E"/>
+            </a:solidFill>
+            <a:prstDash val="solid"/>
+          </a:ln>
+        </p:spPr>
+      </p:sp>
+      <p:sp>
+        <p:nvSpPr>
+          <p:cNvPr id="35" name="Text 33"/>
+          <p:cNvSpPr/>
+          <p:nvPr/>
+        </p:nvSpPr>
+        <p:spPr>
+          <a:xfrm>
+            <a:off x="3785616" y="3886200"/>
+            <a:ext cx="749808" cy="621792"/>
+          </a:xfrm>
+          <a:prstGeom prst="rect">
+            <a:avLst/>
+          </a:prstGeom>
+          <a:noFill/>
+          <a:ln/>
+        </p:spPr>
+        <p:txBody>
+          <a:bodyPr wrap="square" lIns="0" tIns="0" rIns="0" bIns="0" rtlCol="0" anchor="ctr"/>
+          <a:lstStyle/>
+          <a:p>
+            <a:pPr algn="ctr" indent="0" marL="0">
+              <a:buNone/>
+            </a:pPr>
+            <a:r>
+              <a:rPr lang="en-US" sz="1500" b="1" dirty="0">
                 <a:solidFill>
                   <a:srgbClr val="E7EDF5"/>
                 </a:solidFill>
@@ -5604,108 +7471,153 @@
                 <a:ea typeface="Courier New" pitchFamily="34" charset="-122"/>
                 <a:cs typeface="Courier New" pitchFamily="34" charset="-120"/>
               </a:rPr>
-              <a:t>            threadErrorCount[threadIdx.x] += threadErrorCount[threadIdx.x + stride];</a:t>
-            </a:r>
-            <a:endParaRPr lang="en-US" sz="1200" dirty="0"/>
-          </a:p>
-          <a:p>
-            <a:pPr algn="l" indent="0" marL="0">
-              <a:lnSpc>
-                <a:spcPct val="112000"/>
-              </a:lnSpc>
-              <a:buNone/>
-            </a:pPr>
-            <a:r>
-              <a:rPr lang="en-US" sz="1200" dirty="0">
-                <a:solidFill>
-                  <a:srgbClr val="E7EDF5"/>
+              <a:t>17</a:t>
+            </a:r>
+            <a:endParaRPr lang="en-US" sz="1500" dirty="0"/>
+          </a:p>
+        </p:txBody>
+      </p:sp>
+      <p:sp>
+        <p:nvSpPr>
+          <p:cNvPr id="36" name="Text 34"/>
+          <p:cNvSpPr/>
+          <p:nvPr/>
+        </p:nvSpPr>
+        <p:spPr>
+          <a:xfrm>
+            <a:off x="548640" y="4983480"/>
+            <a:ext cx="2194560" cy="548640"/>
+          </a:xfrm>
+          <a:prstGeom prst="rect">
+            <a:avLst/>
+          </a:prstGeom>
+          <a:noFill/>
+          <a:ln/>
+        </p:spPr>
+        <p:txBody>
+          <a:bodyPr wrap="square" lIns="0" tIns="0" rIns="0" bIns="0" rtlCol="0" anchor="ctr"/>
+          <a:lstStyle/>
+          <a:p>
+            <a:pPr algn="r" indent="0" marL="0">
+              <a:buNone/>
+            </a:pPr>
+            <a:r>
+              <a:rPr lang="en-US" sz="1250" b="1" dirty="0">
+                <a:solidFill>
+                  <a:srgbClr val="E8A33D"/>
+                </a:solidFill>
+                <a:latin typeface="Malgun Gothic" pitchFamily="34" charset="0"/>
+                <a:ea typeface="Malgun Gothic" pitchFamily="34" charset="-122"/>
+                <a:cs typeface="Malgun Gothic" pitchFamily="34" charset="-120"/>
+              </a:rPr>
+              <a:t>3단계 후 = 블록 합</a:t>
+            </a:r>
+            <a:endParaRPr lang="en-US" sz="1250" dirty="0"/>
+          </a:p>
+        </p:txBody>
+      </p:sp>
+      <p:sp>
+        <p:nvSpPr>
+          <p:cNvPr id="37" name="Shape 35"/>
+          <p:cNvSpPr/>
+          <p:nvPr/>
+        </p:nvSpPr>
+        <p:spPr>
+          <a:xfrm>
+            <a:off x="2926080" y="4846320"/>
+            <a:ext cx="749808" cy="621792"/>
+          </a:xfrm>
+          <a:prstGeom prst="roundRect">
+            <a:avLst>
+              <a:gd name="adj" fmla="val 7353"/>
+            </a:avLst>
+          </a:prstGeom>
+          <a:solidFill>
+            <a:srgbClr val="241A16"/>
+          </a:solidFill>
+          <a:ln w="19050">
+            <a:solidFill>
+              <a:srgbClr val="E8A33D"/>
+            </a:solidFill>
+            <a:prstDash val="solid"/>
+          </a:ln>
+        </p:spPr>
+      </p:sp>
+      <p:sp>
+        <p:nvSpPr>
+          <p:cNvPr id="38" name="Text 36"/>
+          <p:cNvSpPr/>
+          <p:nvPr/>
+        </p:nvSpPr>
+        <p:spPr>
+          <a:xfrm>
+            <a:off x="2926080" y="4846320"/>
+            <a:ext cx="749808" cy="621792"/>
+          </a:xfrm>
+          <a:prstGeom prst="rect">
+            <a:avLst/>
+          </a:prstGeom>
+          <a:noFill/>
+          <a:ln/>
+        </p:spPr>
+        <p:txBody>
+          <a:bodyPr wrap="square" lIns="0" tIns="0" rIns="0" bIns="0" rtlCol="0" anchor="ctr"/>
+          <a:lstStyle/>
+          <a:p>
+            <a:pPr algn="ctr" indent="0" marL="0">
+              <a:buNone/>
+            </a:pPr>
+            <a:r>
+              <a:rPr lang="en-US" sz="1500" b="1" dirty="0">
+                <a:solidFill>
+                  <a:srgbClr val="E8A33D"/>
                 </a:solidFill>
                 <a:latin typeface="Courier New" pitchFamily="34" charset="0"/>
                 <a:ea typeface="Courier New" pitchFamily="34" charset="-122"/>
                 <a:cs typeface="Courier New" pitchFamily="34" charset="-120"/>
               </a:rPr>
-              <a:t>    }</a:t>
-            </a:r>
-            <a:endParaRPr lang="en-US" sz="1200" dirty="0"/>
-          </a:p>
-          <a:p>
-            <a:pPr algn="l" indent="0" marL="0">
-              <a:lnSpc>
-                <a:spcPct val="112000"/>
-              </a:lnSpc>
-              <a:buNone/>
-            </a:pPr>
-            <a:r>
-              <a:rPr lang="en-US" sz="1200" dirty="0">
-                <a:solidFill>
-                  <a:srgbClr val="F2C079"/>
+              <a:t>31</a:t>
+            </a:r>
+            <a:endParaRPr lang="en-US" sz="1500" dirty="0"/>
+          </a:p>
+        </p:txBody>
+      </p:sp>
+      <p:sp>
+        <p:nvSpPr>
+          <p:cNvPr id="39" name="Text 37"/>
+          <p:cNvSpPr/>
+          <p:nvPr/>
+        </p:nvSpPr>
+        <p:spPr>
+          <a:xfrm>
+            <a:off x="548640" y="5806440"/>
+            <a:ext cx="11064240" cy="365760"/>
+          </a:xfrm>
+          <a:prstGeom prst="rect">
+            <a:avLst/>
+          </a:prstGeom>
+          <a:noFill/>
+          <a:ln/>
+        </p:spPr>
+        <p:txBody>
+          <a:bodyPr wrap="square" lIns="0" tIns="0" rIns="0" bIns="0" rtlCol="0" anchor="ctr"/>
+          <a:lstStyle/>
+          <a:p>
+            <a:pPr algn="ctr" indent="0" marL="0">
+              <a:buNone/>
+            </a:pPr>
+            <a:r>
+              <a:rPr lang="en-US" sz="1250" dirty="0">
+                <a:solidFill>
+                  <a:srgbClr val="3FB8C4"/>
                 </a:solidFill>
                 <a:latin typeface="Courier New" pitchFamily="34" charset="0"/>
                 <a:ea typeface="Courier New" pitchFamily="34" charset="-122"/>
                 <a:cs typeface="Courier New" pitchFamily="34" charset="-120"/>
               </a:rPr>
-              <a:t>    if (threadIdx.x == 0) blockErrorCount[blockIdx.x] = threadErrorCount[0];  // 대표 1개</a:t>
-            </a:r>
-            <a:endParaRPr lang="en-US" sz="1200" dirty="0"/>
-          </a:p>
-          <a:p>
-            <a:pPr algn="l" indent="0" marL="0">
-              <a:lnSpc>
-                <a:spcPct val="112000"/>
-              </a:lnSpc>
-              <a:buNone/>
-            </a:pPr>
-            <a:r>
-              <a:rPr lang="en-US" sz="1200" dirty="0">
-                <a:solidFill>
-                  <a:srgbClr val="E7EDF5"/>
-                </a:solidFill>
-                <a:latin typeface="Courier New" pitchFamily="34" charset="0"/>
-                <a:ea typeface="Courier New" pitchFamily="34" charset="-122"/>
-                <a:cs typeface="Courier New" pitchFamily="34" charset="-120"/>
-              </a:rPr>
-              <a:t>}</a:t>
-            </a:r>
-            <a:endParaRPr lang="en-US" sz="1200" dirty="0"/>
-          </a:p>
-        </p:txBody>
-      </p:sp>
-      <p:sp>
-        <p:nvSpPr>
-          <p:cNvPr id="6" name="Text 4"/>
-          <p:cNvSpPr/>
-          <p:nvPr/>
-        </p:nvSpPr>
-        <p:spPr>
-          <a:xfrm>
-            <a:off x="548640" y="5715000"/>
-            <a:ext cx="11064240" cy="365760"/>
-          </a:xfrm>
-          <a:prstGeom prst="rect">
-            <a:avLst/>
-          </a:prstGeom>
-          <a:noFill/>
-          <a:ln/>
-        </p:spPr>
-        <p:txBody>
-          <a:bodyPr wrap="square" lIns="0" tIns="0" rIns="0" bIns="0" rtlCol="0" anchor="ctr"/>
-          <a:lstStyle/>
-          <a:p>
-            <a:pPr indent="0" marL="0">
-              <a:buNone/>
-            </a:pPr>
-            <a:r>
-              <a:rPr lang="en-US" sz="1300" i="1" dirty="0">
-                <a:solidFill>
-                  <a:srgbClr val="9FB0C4"/>
-                </a:solidFill>
-                <a:latin typeface="Malgun Gothic" pitchFamily="34" charset="0"/>
-                <a:ea typeface="Malgun Gothic" pitchFamily="34" charset="-122"/>
-                <a:cs typeface="Malgun Gothic" pitchFamily="34" charset="-120"/>
-              </a:rPr>
-              <a:t>core.cu:213 — 이 15줄이 세미나 전체에서 가장 밀도 높은 코드입니다.</a:t>
-            </a:r>
-            <a:endParaRPr lang="en-US" sz="1300" dirty="0"/>
+              <a:t>각 단계: threadErrorCount[i] += threadErrorCount[i + stride]  — 절반의 스레드만 일함</a:t>
+            </a:r>
+            <a:endParaRPr lang="en-US" sz="1250" dirty="0"/>
           </a:p>
         </p:txBody>
       </p:sp>
@@ -5778,7 +7690,7 @@
                 <a:ea typeface="Courier New" pitchFamily="34" charset="-122"/>
                 <a:cs typeface="Courier New" pitchFamily="34" charset="-120"/>
               </a:rPr>
-              <a:t>6</a:t>
+              <a:t>5</a:t>
             </a:r>
             <a:endParaRPr lang="en-US" sz="2200" dirty="0"/>
           </a:p>
@@ -5817,7 +7729,7 @@
                 <a:ea typeface="Malgun Gothic" pitchFamily="34" charset="-122"/>
                 <a:cs typeface="Malgun Gothic" pitchFamily="34" charset="-120"/>
               </a:rPr>
-              <a:t>왜 __syncthreads가 없으면 틀리나</a:t>
+              <a:t>코드 완독 · deviceVerifyConstant</a:t>
             </a:r>
             <a:endParaRPr lang="en-US" sz="2900" dirty="0"/>
           </a:p>
@@ -5831,20 +7743,20 @@
         </p:nvSpPr>
         <p:spPr>
           <a:xfrm>
-            <a:off x="548640" y="1645920"/>
-            <a:ext cx="5349240" cy="4023360"/>
+            <a:off x="548640" y="1463040"/>
+            <a:ext cx="11064240" cy="4114800"/>
           </a:xfrm>
           <a:prstGeom prst="roundRect">
             <a:avLst>
-              <a:gd name="adj" fmla="val 1818"/>
+              <a:gd name="adj" fmla="val 1111"/>
             </a:avLst>
           </a:prstGeom>
           <a:solidFill>
-            <a:srgbClr val="18212E"/>
+            <a:srgbClr val="0B1119"/>
           </a:solidFill>
-          <a:ln w="19050">
+          <a:ln w="12700">
             <a:solidFill>
-              <a:srgbClr val="3FB8C4"/>
+              <a:srgbClr val="2C3A4E"/>
             </a:solidFill>
             <a:prstDash val="solid"/>
           </a:ln>
@@ -5858,8 +7770,299 @@
         </p:nvSpPr>
         <p:spPr>
           <a:xfrm>
-            <a:off x="822960" y="1828800"/>
-            <a:ext cx="4800600" cy="457200"/>
+            <a:off x="768096" y="1609344"/>
+            <a:ext cx="10625328" cy="3822192"/>
+          </a:xfrm>
+          <a:prstGeom prst="rect">
+            <a:avLst/>
+          </a:prstGeom>
+          <a:noFill/>
+          <a:ln/>
+        </p:spPr>
+        <p:txBody>
+          <a:bodyPr wrap="square" lIns="0" tIns="0" rIns="0" bIns="0" rtlCol="0" anchor="t"/>
+          <a:lstStyle/>
+          <a:p>
+            <a:pPr algn="l" indent="0" marL="0">
+              <a:lnSpc>
+                <a:spcPct val="112000"/>
+              </a:lnSpc>
+              <a:buNone/>
+            </a:pPr>
+            <a:r>
+              <a:rPr lang="en-US" sz="1200" dirty="0">
+                <a:solidFill>
+                  <a:srgbClr val="E8A33D"/>
+                </a:solidFill>
+                <a:latin typeface="Courier New" pitchFamily="34" charset="0"/>
+                <a:ea typeface="Courier New" pitchFamily="34" charset="-122"/>
+                <a:cs typeface="Courier New" pitchFamily="34" charset="-120"/>
+              </a:rPr>
+              <a:t>__global__ void deviceVerifyConstant(uint* base, uint N, uint constant,</a:t>
+            </a:r>
+            <a:endParaRPr lang="en-US" sz="1200" dirty="0"/>
+          </a:p>
+          <a:p>
+            <a:pPr algn="l" indent="0" marL="0">
+              <a:lnSpc>
+                <a:spcPct val="112000"/>
+              </a:lnSpc>
+              <a:buNone/>
+            </a:pPr>
+            <a:r>
+              <a:rPr lang="en-US" sz="1200" dirty="0">
+                <a:solidFill>
+                  <a:srgbClr val="E8A33D"/>
+                </a:solidFill>
+                <a:latin typeface="Courier New" pitchFamily="34" charset="0"/>
+                <a:ea typeface="Courier New" pitchFamily="34" charset="-122"/>
+                <a:cs typeface="Courier New" pitchFamily="34" charset="-120"/>
+              </a:rPr>
+              <a:t>                                     uint* blockErrorCount) {</a:t>
+            </a:r>
+            <a:endParaRPr lang="en-US" sz="1200" dirty="0"/>
+          </a:p>
+          <a:p>
+            <a:pPr algn="l" indent="0" marL="0">
+              <a:lnSpc>
+                <a:spcPct val="112000"/>
+              </a:lnSpc>
+              <a:buNone/>
+            </a:pPr>
+            <a:r>
+              <a:rPr lang="en-US" sz="1200" dirty="0">
+                <a:solidFill>
+                  <a:srgbClr val="3FB8C4"/>
+                </a:solidFill>
+                <a:latin typeface="Courier New" pitchFamily="34" charset="0"/>
+                <a:ea typeface="Courier New" pitchFamily="34" charset="-122"/>
+                <a:cs typeface="Courier New" pitchFamily="34" charset="-120"/>
+              </a:rPr>
+              <a:t>    extern __shared__ uint threadErrorCount[];        // 블록 공유 버퍼 (512개)</a:t>
+            </a:r>
+            <a:endParaRPr lang="en-US" sz="1200" dirty="0"/>
+          </a:p>
+          <a:p>
+            <a:pPr algn="l" indent="0" marL="0">
+              <a:lnSpc>
+                <a:spcPct val="112000"/>
+              </a:lnSpc>
+              <a:buNone/>
+            </a:pPr>
+            <a:r>
+              <a:rPr lang="en-US" sz="1200" dirty="0">
+                <a:solidFill>
+                  <a:srgbClr val="E7EDF5"/>
+                </a:solidFill>
+                <a:latin typeface="Courier New" pitchFamily="34" charset="0"/>
+                <a:ea typeface="Courier New" pitchFamily="34" charset="-122"/>
+                <a:cs typeface="Courier New" pitchFamily="34" charset="-120"/>
+              </a:rPr>
+              <a:t>    threadErrorCount[threadIdx.x] = 0;</a:t>
+            </a:r>
+            <a:endParaRPr lang="en-US" sz="1200" dirty="0"/>
+          </a:p>
+          <a:p>
+            <a:pPr algn="l" indent="0" marL="0">
+              <a:lnSpc>
+                <a:spcPct val="112000"/>
+              </a:lnSpc>
+              <a:buNone/>
+            </a:pPr>
+            <a:r>
+              <a:rPr lang="en-US" sz="1200" dirty="0">
+                <a:solidFill>
+                  <a:srgbClr val="E7EDF5"/>
+                </a:solidFill>
+                <a:latin typeface="Courier New" pitchFamily="34" charset="0"/>
+                <a:ea typeface="Courier New" pitchFamily="34" charset="-122"/>
+                <a:cs typeface="Courier New" pitchFamily="34" charset="-120"/>
+              </a:rPr>
+              <a:t>    for (uint i = 0; i &lt; N; i++)                       // 내 word들 검사</a:t>
+            </a:r>
+            <a:endParaRPr lang="en-US" sz="1200" dirty="0"/>
+          </a:p>
+          <a:p>
+            <a:pPr algn="l" indent="0" marL="0">
+              <a:lnSpc>
+                <a:spcPct val="112000"/>
+              </a:lnSpc>
+              <a:buNone/>
+            </a:pPr>
+            <a:r>
+              <a:rPr lang="en-US" sz="1200" dirty="0">
+                <a:solidFill>
+                  <a:srgbClr val="F2C079"/>
+                </a:solidFill>
+                <a:latin typeface="Courier New" pitchFamily="34" charset="0"/>
+                <a:ea typeface="Courier New" pitchFamily="34" charset="-122"/>
+                <a:cs typeface="Courier New" pitchFamily="34" charset="-120"/>
+              </a:rPr>
+              <a:t>        threadErrorCount[threadIdx.x] += BITSDIFF(*(THREAD_ADDRESS(base,N,i)), constant);</a:t>
+            </a:r>
+            <a:endParaRPr lang="en-US" sz="1200" dirty="0"/>
+          </a:p>
+          <a:p>
+            <a:pPr algn="l" indent="0" marL="0">
+              <a:lnSpc>
+                <a:spcPct val="112000"/>
+              </a:lnSpc>
+              <a:buNone/>
+            </a:pPr>
+            <a:endParaRPr lang="en-US" sz="1200" dirty="0"/>
+          </a:p>
+          <a:p>
+            <a:pPr algn="l" indent="0" marL="0">
+              <a:lnSpc>
+                <a:spcPct val="112000"/>
+              </a:lnSpc>
+              <a:buNone/>
+            </a:pPr>
+            <a:r>
+              <a:rPr lang="en-US" sz="1200" dirty="0">
+                <a:solidFill>
+                  <a:srgbClr val="3FB8C4"/>
+                </a:solidFill>
+                <a:latin typeface="Courier New" pitchFamily="34" charset="0"/>
+                <a:ea typeface="Courier New" pitchFamily="34" charset="-122"/>
+                <a:cs typeface="Courier New" pitchFamily="34" charset="-120"/>
+              </a:rPr>
+              <a:t>    for (uint stride = blockDim.x&gt;&gt;1; stride &gt; 0; stride &gt;&gt;= 1) {   // 트리 리덕션</a:t>
+            </a:r>
+            <a:endParaRPr lang="en-US" sz="1200" dirty="0"/>
+          </a:p>
+          <a:p>
+            <a:pPr algn="l" indent="0" marL="0">
+              <a:lnSpc>
+                <a:spcPct val="112000"/>
+              </a:lnSpc>
+              <a:buNone/>
+            </a:pPr>
+            <a:r>
+              <a:rPr lang="en-US" sz="1200" dirty="0">
+                <a:solidFill>
+                  <a:srgbClr val="E6604F"/>
+                </a:solidFill>
+                <a:latin typeface="Courier New" pitchFamily="34" charset="0"/>
+                <a:ea typeface="Courier New" pitchFamily="34" charset="-122"/>
+                <a:cs typeface="Courier New" pitchFamily="34" charset="-120"/>
+              </a:rPr>
+              <a:t>        __syncthreads();                              // ★ 단계마다 동기화 필수</a:t>
+            </a:r>
+            <a:endParaRPr lang="en-US" sz="1200" dirty="0"/>
+          </a:p>
+          <a:p>
+            <a:pPr algn="l" indent="0" marL="0">
+              <a:lnSpc>
+                <a:spcPct val="112000"/>
+              </a:lnSpc>
+              <a:buNone/>
+            </a:pPr>
+            <a:r>
+              <a:rPr lang="en-US" sz="1200" dirty="0">
+                <a:solidFill>
+                  <a:srgbClr val="E7EDF5"/>
+                </a:solidFill>
+                <a:latin typeface="Courier New" pitchFamily="34" charset="0"/>
+                <a:ea typeface="Courier New" pitchFamily="34" charset="-122"/>
+                <a:cs typeface="Courier New" pitchFamily="34" charset="-120"/>
+              </a:rPr>
+              <a:t>        if (threadIdx.x &lt; stride)</a:t>
+            </a:r>
+            <a:endParaRPr lang="en-US" sz="1200" dirty="0"/>
+          </a:p>
+          <a:p>
+            <a:pPr algn="l" indent="0" marL="0">
+              <a:lnSpc>
+                <a:spcPct val="112000"/>
+              </a:lnSpc>
+              <a:buNone/>
+            </a:pPr>
+            <a:r>
+              <a:rPr lang="en-US" sz="1200" dirty="0">
+                <a:solidFill>
+                  <a:srgbClr val="E7EDF5"/>
+                </a:solidFill>
+                <a:latin typeface="Courier New" pitchFamily="34" charset="0"/>
+                <a:ea typeface="Courier New" pitchFamily="34" charset="-122"/>
+                <a:cs typeface="Courier New" pitchFamily="34" charset="-120"/>
+              </a:rPr>
+              <a:t>            threadErrorCount[threadIdx.x] += threadErrorCount[threadIdx.x + stride];</a:t>
+            </a:r>
+            <a:endParaRPr lang="en-US" sz="1200" dirty="0"/>
+          </a:p>
+          <a:p>
+            <a:pPr algn="l" indent="0" marL="0">
+              <a:lnSpc>
+                <a:spcPct val="112000"/>
+              </a:lnSpc>
+              <a:buNone/>
+            </a:pPr>
+            <a:r>
+              <a:rPr lang="en-US" sz="1200" dirty="0">
+                <a:solidFill>
+                  <a:srgbClr val="E7EDF5"/>
+                </a:solidFill>
+                <a:latin typeface="Courier New" pitchFamily="34" charset="0"/>
+                <a:ea typeface="Courier New" pitchFamily="34" charset="-122"/>
+                <a:cs typeface="Courier New" pitchFamily="34" charset="-120"/>
+              </a:rPr>
+              <a:t>    }</a:t>
+            </a:r>
+            <a:endParaRPr lang="en-US" sz="1200" dirty="0"/>
+          </a:p>
+          <a:p>
+            <a:pPr algn="l" indent="0" marL="0">
+              <a:lnSpc>
+                <a:spcPct val="112000"/>
+              </a:lnSpc>
+              <a:buNone/>
+            </a:pPr>
+            <a:r>
+              <a:rPr lang="en-US" sz="1200" dirty="0">
+                <a:solidFill>
+                  <a:srgbClr val="F2C079"/>
+                </a:solidFill>
+                <a:latin typeface="Courier New" pitchFamily="34" charset="0"/>
+                <a:ea typeface="Courier New" pitchFamily="34" charset="-122"/>
+                <a:cs typeface="Courier New" pitchFamily="34" charset="-120"/>
+              </a:rPr>
+              <a:t>    if (threadIdx.x == 0) blockErrorCount[blockIdx.x] = threadErrorCount[0];  // 대표 1개</a:t>
+            </a:r>
+            <a:endParaRPr lang="en-US" sz="1200" dirty="0"/>
+          </a:p>
+          <a:p>
+            <a:pPr algn="l" indent="0" marL="0">
+              <a:lnSpc>
+                <a:spcPct val="112000"/>
+              </a:lnSpc>
+              <a:buNone/>
+            </a:pPr>
+            <a:r>
+              <a:rPr lang="en-US" sz="1200" dirty="0">
+                <a:solidFill>
+                  <a:srgbClr val="E7EDF5"/>
+                </a:solidFill>
+                <a:latin typeface="Courier New" pitchFamily="34" charset="0"/>
+                <a:ea typeface="Courier New" pitchFamily="34" charset="-122"/>
+                <a:cs typeface="Courier New" pitchFamily="34" charset="-120"/>
+              </a:rPr>
+              <a:t>}</a:t>
+            </a:r>
+            <a:endParaRPr lang="en-US" sz="1200" dirty="0"/>
+          </a:p>
+        </p:txBody>
+      </p:sp>
+      <p:sp>
+        <p:nvSpPr>
+          <p:cNvPr id="6" name="Text 4"/>
+          <p:cNvSpPr/>
+          <p:nvPr/>
+        </p:nvSpPr>
+        <p:spPr>
+          <a:xfrm>
+            <a:off x="548640" y="5715000"/>
+            <a:ext cx="11064240" cy="365760"/>
           </a:xfrm>
           <a:prstGeom prst="rect">
             <a:avLst/>
@@ -5875,319 +8078,17 @@
               <a:buNone/>
             </a:pPr>
             <a:r>
-              <a:rPr lang="en-US" sz="1800" b="1" dirty="0">
-                <a:solidFill>
-                  <a:srgbClr val="3FB8C4"/>
+              <a:rPr lang="en-US" sz="1300" i="1" dirty="0">
+                <a:solidFill>
+                  <a:srgbClr val="9FB0C4"/>
                 </a:solidFill>
                 <a:latin typeface="Malgun Gothic" pitchFamily="34" charset="0"/>
                 <a:ea typeface="Malgun Gothic" pitchFamily="34" charset="-122"/>
                 <a:cs typeface="Malgun Gothic" pitchFamily="34" charset="-120"/>
               </a:rPr>
-              <a:t>__syncthreads() 의 역할</a:t>
-            </a:r>
-            <a:endParaRPr lang="en-US" sz="1800" dirty="0"/>
-          </a:p>
-        </p:txBody>
-      </p:sp>
-      <p:sp>
-        <p:nvSpPr>
-          <p:cNvPr id="6" name="Text 4"/>
-          <p:cNvSpPr/>
-          <p:nvPr/>
-        </p:nvSpPr>
-        <p:spPr>
-          <a:xfrm>
-            <a:off x="822960" y="2377440"/>
-            <a:ext cx="4800600" cy="3200400"/>
-          </a:xfrm>
-          <a:prstGeom prst="rect">
-            <a:avLst/>
-          </a:prstGeom>
-          <a:noFill/>
-          <a:ln/>
-        </p:spPr>
-        <p:txBody>
-          <a:bodyPr wrap="square" lIns="0" tIns="0" rIns="0" bIns="0" rtlCol="0" anchor="t"/>
-          <a:lstStyle/>
-          <a:p>
-            <a:pPr marL="342900" indent="-342900">
-              <a:lnSpc>
-                <a:spcPct val="105000"/>
-              </a:lnSpc>
-              <a:spcAft>
-                <a:spcPts val="1200"/>
-              </a:spcAft>
-              <a:buSzPct val="100000"/>
-              <a:buChar char="•"/>
-            </a:pPr>
-            <a:r>
-              <a:rPr lang="en-US" sz="1450" dirty="0">
-                <a:solidFill>
-                  <a:srgbClr val="E7EDF5"/>
-                </a:solidFill>
-                <a:latin typeface="Malgun Gothic" pitchFamily="34" charset="0"/>
-                <a:ea typeface="Malgun Gothic" pitchFamily="34" charset="-122"/>
-                <a:cs typeface="Malgun Gothic" pitchFamily="34" charset="-120"/>
-              </a:rPr>
-              <a:t>블록 안 모든 스레드가 이 지점에 도달할 때까지 대기</a:t>
-            </a:r>
-            <a:endParaRPr lang="en-US" sz="1450" dirty="0"/>
-          </a:p>
-          <a:p>
-            <a:pPr marL="342900" indent="-342900">
-              <a:lnSpc>
-                <a:spcPct val="105000"/>
-              </a:lnSpc>
-              <a:spcAft>
-                <a:spcPts val="1200"/>
-              </a:spcAft>
-              <a:buSzPct val="100000"/>
-              <a:buChar char="•"/>
-            </a:pPr>
-            <a:r>
-              <a:rPr lang="en-US" sz="1450" dirty="0">
-                <a:solidFill>
-                  <a:srgbClr val="E7EDF5"/>
-                </a:solidFill>
-                <a:latin typeface="Malgun Gothic" pitchFamily="34" charset="0"/>
-                <a:ea typeface="Malgun Gothic" pitchFamily="34" charset="-122"/>
-                <a:cs typeface="Malgun Gothic" pitchFamily="34" charset="-120"/>
-              </a:rPr>
-              <a:t>= 공유 메모리 쓰기가 서로에게 보이도록 보장하는 배리어</a:t>
-            </a:r>
-            <a:endParaRPr lang="en-US" sz="1450" dirty="0"/>
-          </a:p>
-          <a:p>
-            <a:pPr marL="342900" indent="-342900">
-              <a:lnSpc>
-                <a:spcPct val="105000"/>
-              </a:lnSpc>
-              <a:spcAft>
-                <a:spcPts val="1200"/>
-              </a:spcAft>
-              <a:buSzPct val="100000"/>
-              <a:buChar char="•"/>
-            </a:pPr>
-            <a:r>
-              <a:rPr lang="en-US" sz="1450" dirty="0">
-                <a:solidFill>
-                  <a:srgbClr val="E7EDF5"/>
-                </a:solidFill>
-                <a:latin typeface="Malgun Gothic" pitchFamily="34" charset="0"/>
-                <a:ea typeface="Malgun Gothic" pitchFamily="34" charset="-122"/>
-                <a:cs typeface="Malgun Gothic" pitchFamily="34" charset="-120"/>
-              </a:rPr>
-              <a:t>다음 stride 단계는 이전 단계 결과에 의존</a:t>
-            </a:r>
-            <a:endParaRPr lang="en-US" sz="1450" dirty="0"/>
-          </a:p>
-          <a:p>
-            <a:pPr marL="342900" indent="-342900">
-              <a:lnSpc>
-                <a:spcPct val="105000"/>
-              </a:lnSpc>
-              <a:spcAft>
-                <a:spcPts val="1200"/>
-              </a:spcAft>
-              <a:buSzPct val="100000"/>
-              <a:buChar char="•"/>
-            </a:pPr>
-            <a:r>
-              <a:rPr lang="en-US" sz="1450" dirty="0">
-                <a:solidFill>
-                  <a:srgbClr val="E7EDF5"/>
-                </a:solidFill>
-                <a:latin typeface="Malgun Gothic" pitchFamily="34" charset="0"/>
-                <a:ea typeface="Malgun Gothic" pitchFamily="34" charset="-122"/>
-                <a:cs typeface="Malgun Gothic" pitchFamily="34" charset="-120"/>
-              </a:rPr>
-              <a:t>동기화 없이 읽으면 아직 안 써진 값을 읽음</a:t>
-            </a:r>
-            <a:endParaRPr lang="en-US" sz="1450" dirty="0"/>
-          </a:p>
-        </p:txBody>
-      </p:sp>
-      <p:sp>
-        <p:nvSpPr>
-          <p:cNvPr id="7" name="Shape 5"/>
-          <p:cNvSpPr/>
-          <p:nvPr/>
-        </p:nvSpPr>
-        <p:spPr>
-          <a:xfrm>
-            <a:off x="6263640" y="1645920"/>
-            <a:ext cx="5349240" cy="4023360"/>
-          </a:xfrm>
-          <a:prstGeom prst="roundRect">
-            <a:avLst>
-              <a:gd name="adj" fmla="val 1818"/>
-            </a:avLst>
-          </a:prstGeom>
-          <a:solidFill>
-            <a:srgbClr val="18212E"/>
-          </a:solidFill>
-          <a:ln w="19050">
-            <a:solidFill>
-              <a:srgbClr val="E6604F"/>
-            </a:solidFill>
-            <a:prstDash val="solid"/>
-          </a:ln>
-        </p:spPr>
-      </p:sp>
-      <p:sp>
-        <p:nvSpPr>
-          <p:cNvPr id="8" name="Text 6"/>
-          <p:cNvSpPr/>
-          <p:nvPr/>
-        </p:nvSpPr>
-        <p:spPr>
-          <a:xfrm>
-            <a:off x="6537960" y="1828800"/>
-            <a:ext cx="4800600" cy="457200"/>
-          </a:xfrm>
-          <a:prstGeom prst="rect">
-            <a:avLst/>
-          </a:prstGeom>
-          <a:noFill/>
-          <a:ln/>
-        </p:spPr>
-        <p:txBody>
-          <a:bodyPr wrap="square" lIns="0" tIns="0" rIns="0" bIns="0" rtlCol="0" anchor="ctr"/>
-          <a:lstStyle/>
-          <a:p>
-            <a:pPr indent="0" marL="0">
-              <a:buNone/>
-            </a:pPr>
-            <a:r>
-              <a:rPr lang="en-US" sz="1800" b="1" dirty="0">
-                <a:solidFill>
-                  <a:srgbClr val="E6604F"/>
-                </a:solidFill>
-                <a:latin typeface="Malgun Gothic" pitchFamily="34" charset="0"/>
-                <a:ea typeface="Malgun Gothic" pitchFamily="34" charset="-122"/>
-                <a:cs typeface="Malgun Gothic" pitchFamily="34" charset="-120"/>
-              </a:rPr>
-              <a:t>빠뜨리면?</a:t>
-            </a:r>
-            <a:endParaRPr lang="en-US" sz="1800" dirty="0"/>
-          </a:p>
-        </p:txBody>
-      </p:sp>
-      <p:sp>
-        <p:nvSpPr>
-          <p:cNvPr id="9" name="Text 7"/>
-          <p:cNvSpPr/>
-          <p:nvPr/>
-        </p:nvSpPr>
-        <p:spPr>
-          <a:xfrm>
-            <a:off x="6537960" y="2377440"/>
-            <a:ext cx="4800600" cy="3200400"/>
-          </a:xfrm>
-          <a:prstGeom prst="rect">
-            <a:avLst/>
-          </a:prstGeom>
-          <a:noFill/>
-          <a:ln/>
-        </p:spPr>
-        <p:txBody>
-          <a:bodyPr wrap="square" lIns="0" tIns="0" rIns="0" bIns="0" rtlCol="0" anchor="t"/>
-          <a:lstStyle/>
-          <a:p>
-            <a:pPr marL="342900" indent="-342900">
-              <a:lnSpc>
-                <a:spcPct val="105000"/>
-              </a:lnSpc>
-              <a:spcAft>
-                <a:spcPts val="1200"/>
-              </a:spcAft>
-              <a:buSzPct val="100000"/>
-              <a:buChar char="•"/>
-            </a:pPr>
-            <a:r>
-              <a:rPr lang="en-US" sz="1450" dirty="0">
-                <a:solidFill>
-                  <a:srgbClr val="E7EDF5"/>
-                </a:solidFill>
-                <a:latin typeface="Malgun Gothic" pitchFamily="34" charset="0"/>
-                <a:ea typeface="Malgun Gothic" pitchFamily="34" charset="-122"/>
-                <a:cs typeface="Malgun Gothic" pitchFamily="34" charset="-120"/>
-              </a:rPr>
-              <a:t>일부 스레드가 앞서가 이웃의 옛 값을 더함</a:t>
-            </a:r>
-            <a:endParaRPr lang="en-US" sz="1450" dirty="0"/>
-          </a:p>
-          <a:p>
-            <a:pPr marL="342900" indent="-342900">
-              <a:lnSpc>
-                <a:spcPct val="105000"/>
-              </a:lnSpc>
-              <a:spcAft>
-                <a:spcPts val="1200"/>
-              </a:spcAft>
-              <a:buSzPct val="100000"/>
-              <a:buChar char="•"/>
-            </a:pPr>
-            <a:r>
-              <a:rPr lang="en-US" sz="1450" dirty="0">
-                <a:solidFill>
-                  <a:srgbClr val="E7EDF5"/>
-                </a:solidFill>
-                <a:latin typeface="Malgun Gothic" pitchFamily="34" charset="0"/>
-                <a:ea typeface="Malgun Gothic" pitchFamily="34" charset="-122"/>
-                <a:cs typeface="Malgun Gothic" pitchFamily="34" charset="-120"/>
-              </a:rPr>
-              <a:t>합계가 실행마다 달라짐 (비결정적)</a:t>
-            </a:r>
-            <a:endParaRPr lang="en-US" sz="1450" dirty="0"/>
-          </a:p>
-          <a:p>
-            <a:pPr marL="342900" indent="-342900">
-              <a:lnSpc>
-                <a:spcPct val="105000"/>
-              </a:lnSpc>
-              <a:spcAft>
-                <a:spcPts val="1200"/>
-              </a:spcAft>
-              <a:buSzPct val="100000"/>
-              <a:buChar char="•"/>
-            </a:pPr>
-            <a:r>
-              <a:rPr lang="en-US" sz="1450" dirty="0">
-                <a:solidFill>
-                  <a:srgbClr val="E7EDF5"/>
-                </a:solidFill>
-                <a:latin typeface="Malgun Gothic" pitchFamily="34" charset="0"/>
-                <a:ea typeface="Malgun Gothic" pitchFamily="34" charset="-122"/>
-                <a:cs typeface="Malgun Gothic" pitchFamily="34" charset="-120"/>
-              </a:rPr>
-              <a:t>오류가 0인데 0이 아니게 나오거나 그 반대</a:t>
-            </a:r>
-            <a:endParaRPr lang="en-US" sz="1450" dirty="0"/>
-          </a:p>
-          <a:p>
-            <a:pPr marL="342900" indent="-342900">
-              <a:lnSpc>
-                <a:spcPct val="105000"/>
-              </a:lnSpc>
-              <a:spcAft>
-                <a:spcPts val="1200"/>
-              </a:spcAft>
-              <a:buSzPct val="100000"/>
-              <a:buChar char="•"/>
-            </a:pPr>
-            <a:r>
-              <a:rPr lang="en-US" sz="1450" dirty="0">
-                <a:solidFill>
-                  <a:srgbClr val="E7EDF5"/>
-                </a:solidFill>
-                <a:latin typeface="Malgun Gothic" pitchFamily="34" charset="0"/>
-                <a:ea typeface="Malgun Gothic" pitchFamily="34" charset="-122"/>
-                <a:cs typeface="Malgun Gothic" pitchFamily="34" charset="-120"/>
-              </a:rPr>
-              <a:t>디버깅이 극도로 어려운 종류의 버그</a:t>
-            </a:r>
-            <a:endParaRPr lang="en-US" sz="1450" dirty="0"/>
+              <a:t>core.cu:213 — 이 15줄이 세미나 전체에서 가장 밀도 높은 코드입니다.</a:t>
+            </a:r>
+            <a:endParaRPr lang="en-US" sz="1300" dirty="0"/>
           </a:p>
         </p:txBody>
       </p:sp>
@@ -6260,7 +8161,7 @@
                 <a:ea typeface="Courier New" pitchFamily="34" charset="-122"/>
                 <a:cs typeface="Courier New" pitchFamily="34" charset="-120"/>
               </a:rPr>
-              <a:t>7</a:t>
+              <a:t>6</a:t>
             </a:r>
             <a:endParaRPr lang="en-US" sz="2200" dirty="0"/>
           </a:p>
@@ -6299,7 +8200,7 @@
                 <a:ea typeface="Malgun Gothic" pitchFamily="34" charset="-122"/>
                 <a:cs typeface="Malgun Gothic" pitchFamily="34" charset="-120"/>
               </a:rPr>
-              <a:t>3단계: 호스트가 마무리 · 공유 메모리 재활용</a:t>
+              <a:t>왜 __syncthreads가 없으면 틀리나</a:t>
             </a:r>
             <a:endParaRPr lang="en-US" sz="2900" dirty="0"/>
           </a:p>
@@ -6313,200 +8214,12 @@
         </p:nvSpPr>
         <p:spPr>
           <a:xfrm>
-            <a:off x="548640" y="1508760"/>
-            <a:ext cx="11064240" cy="1737360"/>
+            <a:off x="548640" y="1645920"/>
+            <a:ext cx="5349240" cy="4023360"/>
           </a:xfrm>
           <a:prstGeom prst="roundRect">
             <a:avLst>
-              <a:gd name="adj" fmla="val 2632"/>
-            </a:avLst>
-          </a:prstGeom>
-          <a:solidFill>
-            <a:srgbClr val="0B1119"/>
-          </a:solidFill>
-          <a:ln w="12700">
-            <a:solidFill>
-              <a:srgbClr val="2C3A4E"/>
-            </a:solidFill>
-            <a:prstDash val="solid"/>
-          </a:ln>
-        </p:spPr>
-      </p:sp>
-      <p:sp>
-        <p:nvSpPr>
-          <p:cNvPr id="5" name="Text 3"/>
-          <p:cNvSpPr/>
-          <p:nvPr/>
-        </p:nvSpPr>
-        <p:spPr>
-          <a:xfrm>
-            <a:off x="768096" y="1655064"/>
-            <a:ext cx="10625328" cy="1444752"/>
-          </a:xfrm>
-          <a:prstGeom prst="rect">
-            <a:avLst/>
-          </a:prstGeom>
-          <a:noFill/>
-          <a:ln/>
-        </p:spPr>
-        <p:txBody>
-          <a:bodyPr wrap="square" lIns="0" tIns="0" rIns="0" bIns="0" rtlCol="0" anchor="t"/>
-          <a:lstStyle/>
-          <a:p>
-            <a:pPr algn="l" indent="0" marL="0">
-              <a:lnSpc>
-                <a:spcPct val="110000"/>
-              </a:lnSpc>
-              <a:buNone/>
-            </a:pPr>
-            <a:r>
-              <a:rPr lang="en-US" sz="1300" dirty="0">
-                <a:solidFill>
-                  <a:srgbClr val="6B7D94"/>
-                </a:solidFill>
-                <a:latin typeface="Courier New" pitchFamily="34" charset="0"/>
-                <a:ea typeface="Courier New" pitchFamily="34" charset="-122"/>
-                <a:cs typeface="Courier New" pitchFamily="34" charset="-120"/>
-              </a:rPr>
-              <a:t>// core.cu:195 — gpuVerifyConstant (호스트)</a:t>
-            </a:r>
-            <a:endParaRPr lang="en-US" sz="1300" dirty="0"/>
-          </a:p>
-          <a:p>
-            <a:pPr algn="l" indent="0" marL="0">
-              <a:lnSpc>
-                <a:spcPct val="110000"/>
-              </a:lnSpc>
-              <a:buNone/>
-            </a:pPr>
-            <a:r>
-              <a:rPr lang="en-US" sz="1300" dirty="0">
-                <a:solidFill>
-                  <a:srgbClr val="3FB8C4"/>
-                </a:solidFill>
-                <a:latin typeface="Courier New" pitchFamily="34" charset="0"/>
-                <a:ea typeface="Courier New" pitchFamily="34" charset="-122"/>
-                <a:cs typeface="Courier New" pitchFamily="34" charset="-120"/>
-              </a:rPr>
-              <a:t>cudaMemcpy(errorCounts, blockErrorCount, sizeof(uint)*nBlocks, D2H);  // 1024개만</a:t>
-            </a:r>
-            <a:endParaRPr lang="en-US" sz="1300" dirty="0"/>
-          </a:p>
-          <a:p>
-            <a:pPr algn="l" indent="0" marL="0">
-              <a:lnSpc>
-                <a:spcPct val="110000"/>
-              </a:lnSpc>
-              <a:buNone/>
-            </a:pPr>
-            <a:r>
-              <a:rPr lang="en-US" sz="1300" dirty="0">
-                <a:solidFill>
-                  <a:srgbClr val="E7EDF5"/>
-                </a:solidFill>
-                <a:latin typeface="Courier New" pitchFamily="34" charset="0"/>
-                <a:ea typeface="Courier New" pitchFamily="34" charset="-122"/>
-                <a:cs typeface="Courier New" pitchFamily="34" charset="-120"/>
-              </a:rPr>
-              <a:t>uint totalErrors = 0;</a:t>
-            </a:r>
-            <a:endParaRPr lang="en-US" sz="1300" dirty="0"/>
-          </a:p>
-          <a:p>
-            <a:pPr algn="l" indent="0" marL="0">
-              <a:lnSpc>
-                <a:spcPct val="110000"/>
-              </a:lnSpc>
-              <a:buNone/>
-            </a:pPr>
-            <a:r>
-              <a:rPr lang="en-US" sz="1300" dirty="0">
-                <a:solidFill>
-                  <a:srgbClr val="F2C079"/>
-                </a:solidFill>
-                <a:latin typeface="Courier New" pitchFamily="34" charset="0"/>
-                <a:ea typeface="Courier New" pitchFamily="34" charset="-122"/>
-                <a:cs typeface="Courier New" pitchFamily="34" charset="-120"/>
-              </a:rPr>
-              <a:t>for (uint i = 0; i &lt; nBlocks; i++) totalErrors += errorCounts[i];    // ~1k 합산</a:t>
-            </a:r>
-            <a:endParaRPr lang="en-US" sz="1300" dirty="0"/>
-          </a:p>
-          <a:p>
-            <a:pPr algn="l" indent="0" marL="0">
-              <a:lnSpc>
-                <a:spcPct val="110000"/>
-              </a:lnSpc>
-              <a:buNone/>
-            </a:pPr>
-            <a:r>
-              <a:rPr lang="en-US" sz="1300" dirty="0">
-                <a:solidFill>
-                  <a:srgbClr val="E7EDF5"/>
-                </a:solidFill>
-                <a:latin typeface="Courier New" pitchFamily="34" charset="0"/>
-                <a:ea typeface="Courier New" pitchFamily="34" charset="-122"/>
-                <a:cs typeface="Courier New" pitchFamily="34" charset="-120"/>
-              </a:rPr>
-              <a:t>return totalErrors;</a:t>
-            </a:r>
-            <a:endParaRPr lang="en-US" sz="1300" dirty="0"/>
-          </a:p>
-        </p:txBody>
-      </p:sp>
-      <p:sp>
-        <p:nvSpPr>
-          <p:cNvPr id="6" name="Text 4"/>
-          <p:cNvSpPr/>
-          <p:nvPr/>
-        </p:nvSpPr>
-        <p:spPr>
-          <a:xfrm>
-            <a:off x="548640" y="3383280"/>
-            <a:ext cx="11064240" cy="457200"/>
-          </a:xfrm>
-          <a:prstGeom prst="rect">
-            <a:avLst/>
-          </a:prstGeom>
-          <a:noFill/>
-          <a:ln/>
-        </p:spPr>
-        <p:txBody>
-          <a:bodyPr wrap="square" lIns="0" tIns="0" rIns="0" bIns="0" rtlCol="0" anchor="ctr"/>
-          <a:lstStyle/>
-          <a:p>
-            <a:pPr indent="0" marL="0">
-              <a:buNone/>
-            </a:pPr>
-            <a:r>
-              <a:rPr lang="en-US" sz="1550" dirty="0">
-                <a:solidFill>
-                  <a:srgbClr val="9FB0C4"/>
-                </a:solidFill>
-                <a:latin typeface="Malgun Gothic" pitchFamily="34" charset="0"/>
-                <a:ea typeface="Malgun Gothic" pitchFamily="34" charset="-122"/>
-                <a:cs typeface="Malgun Gothic" pitchFamily="34" charset="-120"/>
-              </a:rPr>
-              <a:t>GPU는 52만 → 1024로 줄이고, CPU는 그 1024개만 더합니다. 각자 잘하는 일을 맡습니다.</a:t>
-            </a:r>
-            <a:endParaRPr lang="en-US" sz="1550" dirty="0"/>
-          </a:p>
-        </p:txBody>
-      </p:sp>
-      <p:sp>
-        <p:nvSpPr>
-          <p:cNvPr id="7" name="Shape 5"/>
-          <p:cNvSpPr/>
-          <p:nvPr/>
-        </p:nvSpPr>
-        <p:spPr>
-          <a:xfrm>
-            <a:off x="548640" y="3977640"/>
-            <a:ext cx="11064240" cy="1737360"/>
-          </a:xfrm>
-          <a:prstGeom prst="roundRect">
-            <a:avLst>
-              <a:gd name="adj" fmla="val 4211"/>
+              <a:gd name="adj" fmla="val 1818"/>
             </a:avLst>
           </a:prstGeom>
           <a:solidFill>
@@ -6514,7 +8227,7 @@
           </a:solidFill>
           <a:ln w="19050">
             <a:solidFill>
-              <a:srgbClr val="E8A33D"/>
+              <a:srgbClr val="3FB8C4"/>
             </a:solidFill>
             <a:prstDash val="solid"/>
           </a:ln>
@@ -6522,14 +8235,14 @@
       </p:sp>
       <p:sp>
         <p:nvSpPr>
-          <p:cNvPr id="8" name="Text 6"/>
-          <p:cNvSpPr/>
-          <p:nvPr/>
-        </p:nvSpPr>
-        <p:spPr>
-          <a:xfrm>
-            <a:off x="822960" y="4160520"/>
-            <a:ext cx="10515600" cy="365760"/>
+          <p:cNvPr id="5" name="Text 3"/>
+          <p:cNvSpPr/>
+          <p:nvPr/>
+        </p:nvSpPr>
+        <p:spPr>
+          <a:xfrm>
+            <a:off x="822960" y="1828800"/>
+            <a:ext cx="4800600" cy="457200"/>
           </a:xfrm>
           <a:prstGeom prst="rect">
             <a:avLst/>
@@ -6545,30 +8258,30 @@
               <a:buNone/>
             </a:pPr>
             <a:r>
-              <a:rPr lang="en-US" sz="1500" b="1" dirty="0">
-                <a:solidFill>
-                  <a:srgbClr val="E8A33D"/>
+              <a:rPr lang="en-US" sz="1800" b="1" dirty="0">
+                <a:solidFill>
+                  <a:srgbClr val="3FB8C4"/>
                 </a:solidFill>
                 <a:latin typeface="Malgun Gothic" pitchFamily="34" charset="0"/>
                 <a:ea typeface="Malgun Gothic" pitchFamily="34" charset="-122"/>
                 <a:cs typeface="Malgun Gothic" pitchFamily="34" charset="-120"/>
               </a:rPr>
-              <a:t>같은 공유 메모리, 다른 쓰임 — 세션 3에서 함께 보는 두 사례</a:t>
-            </a:r>
-            <a:endParaRPr lang="en-US" sz="1500" dirty="0"/>
-          </a:p>
-        </p:txBody>
-      </p:sp>
-      <p:sp>
-        <p:nvSpPr>
-          <p:cNvPr id="9" name="Text 7"/>
-          <p:cNvSpPr/>
-          <p:nvPr/>
-        </p:nvSpPr>
-        <p:spPr>
-          <a:xfrm>
-            <a:off x="822960" y="4617720"/>
-            <a:ext cx="10515600" cy="1005840"/>
+              <a:t>__syncthreads() 의 역할</a:t>
+            </a:r>
+            <a:endParaRPr lang="en-US" sz="1800" dirty="0"/>
+          </a:p>
+        </p:txBody>
+      </p:sp>
+      <p:sp>
+        <p:nvSpPr>
+          <p:cNvPr id="6" name="Text 4"/>
+          <p:cNvSpPr/>
+          <p:nvPr/>
+        </p:nvSpPr>
+        <p:spPr>
+          <a:xfrm>
+            <a:off x="822960" y="2377440"/>
+            <a:ext cx="4800600" cy="3200400"/>
           </a:xfrm>
           <a:prstGeom prst="rect">
             <a:avLst/>
@@ -6585,13 +8298,13 @@
                 <a:spcPct val="105000"/>
               </a:lnSpc>
               <a:spcAft>
-                <a:spcPts val="800"/>
+                <a:spcPts val="1200"/>
               </a:spcAft>
               <a:buSzPct val="100000"/>
               <a:buChar char="•"/>
             </a:pPr>
             <a:r>
-              <a:rPr lang="en-US" sz="1350" dirty="0">
+              <a:rPr lang="en-US" sz="1450" dirty="0">
                 <a:solidFill>
                   <a:srgbClr val="E7EDF5"/>
                 </a:solidFill>
@@ -6599,9 +8312,9 @@
                 <a:ea typeface="Malgun Gothic" pitchFamily="34" charset="-122"/>
                 <a:cs typeface="Malgun Gothic" pitchFamily="34" charset="-120"/>
               </a:rPr>
-              <a:t>deviceShortLCG0Shmem (core.cu:346) — LCG 중간값을 공유 메모리에 둬 셰이더 오버클럭 오류에 민감</a:t>
-            </a:r>
-            <a:endParaRPr lang="en-US" sz="1350" dirty="0"/>
+              <a:t>블록 안 모든 스레드가 이 지점에 도달할 때까지 대기</a:t>
+            </a:r>
+            <a:endParaRPr lang="en-US" sz="1450" dirty="0"/>
           </a:p>
           <a:p>
             <a:pPr marL="342900" indent="-342900">
@@ -6609,13 +8322,13 @@
                 <a:spcPct val="105000"/>
               </a:lnSpc>
               <a:spcAft>
-                <a:spcPts val="800"/>
+                <a:spcPts val="1200"/>
               </a:spcAft>
               <a:buSzPct val="100000"/>
               <a:buChar char="•"/>
             </a:pPr>
             <a:r>
-              <a:rPr lang="en-US" sz="1350" dirty="0">
+              <a:rPr lang="en-US" sz="1450" dirty="0">
                 <a:solidFill>
                   <a:srgbClr val="E7EDF5"/>
                 </a:solidFill>
@@ -6623,9 +8336,241 @@
                 <a:ea typeface="Malgun Gothic" pitchFamily="34" charset="-122"/>
                 <a:cs typeface="Malgun Gothic" pitchFamily="34" charset="-120"/>
               </a:rPr>
-              <a:t>deviceWriteRandomBlocks (core.cu:723) — 공유 메모리로 난수 블록을 병렬 생성 후 전역에 기록</a:t>
-            </a:r>
-            <a:endParaRPr lang="en-US" sz="1350" dirty="0"/>
+              <a:t>= 공유 메모리 쓰기가 서로에게 보이도록 보장하는 배리어</a:t>
+            </a:r>
+            <a:endParaRPr lang="en-US" sz="1450" dirty="0"/>
+          </a:p>
+          <a:p>
+            <a:pPr marL="342900" indent="-342900">
+              <a:lnSpc>
+                <a:spcPct val="105000"/>
+              </a:lnSpc>
+              <a:spcAft>
+                <a:spcPts val="1200"/>
+              </a:spcAft>
+              <a:buSzPct val="100000"/>
+              <a:buChar char="•"/>
+            </a:pPr>
+            <a:r>
+              <a:rPr lang="en-US" sz="1450" dirty="0">
+                <a:solidFill>
+                  <a:srgbClr val="E7EDF5"/>
+                </a:solidFill>
+                <a:latin typeface="Malgun Gothic" pitchFamily="34" charset="0"/>
+                <a:ea typeface="Malgun Gothic" pitchFamily="34" charset="-122"/>
+                <a:cs typeface="Malgun Gothic" pitchFamily="34" charset="-120"/>
+              </a:rPr>
+              <a:t>다음 stride 단계는 이전 단계 결과에 의존</a:t>
+            </a:r>
+            <a:endParaRPr lang="en-US" sz="1450" dirty="0"/>
+          </a:p>
+          <a:p>
+            <a:pPr marL="342900" indent="-342900">
+              <a:lnSpc>
+                <a:spcPct val="105000"/>
+              </a:lnSpc>
+              <a:spcAft>
+                <a:spcPts val="1200"/>
+              </a:spcAft>
+              <a:buSzPct val="100000"/>
+              <a:buChar char="•"/>
+            </a:pPr>
+            <a:r>
+              <a:rPr lang="en-US" sz="1450" dirty="0">
+                <a:solidFill>
+                  <a:srgbClr val="E7EDF5"/>
+                </a:solidFill>
+                <a:latin typeface="Malgun Gothic" pitchFamily="34" charset="0"/>
+                <a:ea typeface="Malgun Gothic" pitchFamily="34" charset="-122"/>
+                <a:cs typeface="Malgun Gothic" pitchFamily="34" charset="-120"/>
+              </a:rPr>
+              <a:t>동기화 없이 읽으면 아직 안 써진 값을 읽음</a:t>
+            </a:r>
+            <a:endParaRPr lang="en-US" sz="1450" dirty="0"/>
+          </a:p>
+        </p:txBody>
+      </p:sp>
+      <p:sp>
+        <p:nvSpPr>
+          <p:cNvPr id="7" name="Shape 5"/>
+          <p:cNvSpPr/>
+          <p:nvPr/>
+        </p:nvSpPr>
+        <p:spPr>
+          <a:xfrm>
+            <a:off x="6263640" y="1645920"/>
+            <a:ext cx="5349240" cy="4023360"/>
+          </a:xfrm>
+          <a:prstGeom prst="roundRect">
+            <a:avLst>
+              <a:gd name="adj" fmla="val 1818"/>
+            </a:avLst>
+          </a:prstGeom>
+          <a:solidFill>
+            <a:srgbClr val="18212E"/>
+          </a:solidFill>
+          <a:ln w="19050">
+            <a:solidFill>
+              <a:srgbClr val="E6604F"/>
+            </a:solidFill>
+            <a:prstDash val="solid"/>
+          </a:ln>
+        </p:spPr>
+      </p:sp>
+      <p:sp>
+        <p:nvSpPr>
+          <p:cNvPr id="8" name="Text 6"/>
+          <p:cNvSpPr/>
+          <p:nvPr/>
+        </p:nvSpPr>
+        <p:spPr>
+          <a:xfrm>
+            <a:off x="6537960" y="1828800"/>
+            <a:ext cx="4800600" cy="457200"/>
+          </a:xfrm>
+          <a:prstGeom prst="rect">
+            <a:avLst/>
+          </a:prstGeom>
+          <a:noFill/>
+          <a:ln/>
+        </p:spPr>
+        <p:txBody>
+          <a:bodyPr wrap="square" lIns="0" tIns="0" rIns="0" bIns="0" rtlCol="0" anchor="ctr"/>
+          <a:lstStyle/>
+          <a:p>
+            <a:pPr indent="0" marL="0">
+              <a:buNone/>
+            </a:pPr>
+            <a:r>
+              <a:rPr lang="en-US" sz="1800" b="1" dirty="0">
+                <a:solidFill>
+                  <a:srgbClr val="E6604F"/>
+                </a:solidFill>
+                <a:latin typeface="Malgun Gothic" pitchFamily="34" charset="0"/>
+                <a:ea typeface="Malgun Gothic" pitchFamily="34" charset="-122"/>
+                <a:cs typeface="Malgun Gothic" pitchFamily="34" charset="-120"/>
+              </a:rPr>
+              <a:t>빠뜨리면?</a:t>
+            </a:r>
+            <a:endParaRPr lang="en-US" sz="1800" dirty="0"/>
+          </a:p>
+        </p:txBody>
+      </p:sp>
+      <p:sp>
+        <p:nvSpPr>
+          <p:cNvPr id="9" name="Text 7"/>
+          <p:cNvSpPr/>
+          <p:nvPr/>
+        </p:nvSpPr>
+        <p:spPr>
+          <a:xfrm>
+            <a:off x="6537960" y="2377440"/>
+            <a:ext cx="4800600" cy="3200400"/>
+          </a:xfrm>
+          <a:prstGeom prst="rect">
+            <a:avLst/>
+          </a:prstGeom>
+          <a:noFill/>
+          <a:ln/>
+        </p:spPr>
+        <p:txBody>
+          <a:bodyPr wrap="square" lIns="0" tIns="0" rIns="0" bIns="0" rtlCol="0" anchor="t"/>
+          <a:lstStyle/>
+          <a:p>
+            <a:pPr marL="342900" indent="-342900">
+              <a:lnSpc>
+                <a:spcPct val="105000"/>
+              </a:lnSpc>
+              <a:spcAft>
+                <a:spcPts val="1200"/>
+              </a:spcAft>
+              <a:buSzPct val="100000"/>
+              <a:buChar char="•"/>
+            </a:pPr>
+            <a:r>
+              <a:rPr lang="en-US" sz="1450" dirty="0">
+                <a:solidFill>
+                  <a:srgbClr val="E7EDF5"/>
+                </a:solidFill>
+                <a:latin typeface="Malgun Gothic" pitchFamily="34" charset="0"/>
+                <a:ea typeface="Malgun Gothic" pitchFamily="34" charset="-122"/>
+                <a:cs typeface="Malgun Gothic" pitchFamily="34" charset="-120"/>
+              </a:rPr>
+              <a:t>일부 스레드가 앞서가 이웃의 옛 값을 더함</a:t>
+            </a:r>
+            <a:endParaRPr lang="en-US" sz="1450" dirty="0"/>
+          </a:p>
+          <a:p>
+            <a:pPr marL="342900" indent="-342900">
+              <a:lnSpc>
+                <a:spcPct val="105000"/>
+              </a:lnSpc>
+              <a:spcAft>
+                <a:spcPts val="1200"/>
+              </a:spcAft>
+              <a:buSzPct val="100000"/>
+              <a:buChar char="•"/>
+            </a:pPr>
+            <a:r>
+              <a:rPr lang="en-US" sz="1450" dirty="0">
+                <a:solidFill>
+                  <a:srgbClr val="E7EDF5"/>
+                </a:solidFill>
+                <a:latin typeface="Malgun Gothic" pitchFamily="34" charset="0"/>
+                <a:ea typeface="Malgun Gothic" pitchFamily="34" charset="-122"/>
+                <a:cs typeface="Malgun Gothic" pitchFamily="34" charset="-120"/>
+              </a:rPr>
+              <a:t>합계가 실행마다 달라짐 (비결정적)</a:t>
+            </a:r>
+            <a:endParaRPr lang="en-US" sz="1450" dirty="0"/>
+          </a:p>
+          <a:p>
+            <a:pPr marL="342900" indent="-342900">
+              <a:lnSpc>
+                <a:spcPct val="105000"/>
+              </a:lnSpc>
+              <a:spcAft>
+                <a:spcPts val="1200"/>
+              </a:spcAft>
+              <a:buSzPct val="100000"/>
+              <a:buChar char="•"/>
+            </a:pPr>
+            <a:r>
+              <a:rPr lang="en-US" sz="1450" dirty="0">
+                <a:solidFill>
+                  <a:srgbClr val="E7EDF5"/>
+                </a:solidFill>
+                <a:latin typeface="Malgun Gothic" pitchFamily="34" charset="0"/>
+                <a:ea typeface="Malgun Gothic" pitchFamily="34" charset="-122"/>
+                <a:cs typeface="Malgun Gothic" pitchFamily="34" charset="-120"/>
+              </a:rPr>
+              <a:t>오류가 0인데 0이 아니게 나오거나 그 반대</a:t>
+            </a:r>
+            <a:endParaRPr lang="en-US" sz="1450" dirty="0"/>
+          </a:p>
+          <a:p>
+            <a:pPr marL="342900" indent="-342900">
+              <a:lnSpc>
+                <a:spcPct val="105000"/>
+              </a:lnSpc>
+              <a:spcAft>
+                <a:spcPts val="1200"/>
+              </a:spcAft>
+              <a:buSzPct val="100000"/>
+              <a:buChar char="•"/>
+            </a:pPr>
+            <a:r>
+              <a:rPr lang="en-US" sz="1450" dirty="0">
+                <a:solidFill>
+                  <a:srgbClr val="E7EDF5"/>
+                </a:solidFill>
+                <a:latin typeface="Malgun Gothic" pitchFamily="34" charset="0"/>
+                <a:ea typeface="Malgun Gothic" pitchFamily="34" charset="-122"/>
+                <a:cs typeface="Malgun Gothic" pitchFamily="34" charset="-120"/>
+              </a:rPr>
+              <a:t>디버깅이 극도로 어려운 종류의 버그</a:t>
+            </a:r>
+            <a:endParaRPr lang="en-US" sz="1450" dirty="0"/>
           </a:p>
         </p:txBody>
       </p:sp>
@@ -6698,7 +8643,7 @@
                 <a:ea typeface="Courier New" pitchFamily="34" charset="-122"/>
                 <a:cs typeface="Courier New" pitchFamily="34" charset="-120"/>
               </a:rPr>
-              <a:t>8</a:t>
+              <a:t>7</a:t>
             </a:r>
             <a:endParaRPr lang="en-US" sz="2200" dirty="0"/>
           </a:p>
@@ -6737,7 +8682,7 @@
                 <a:ea typeface="Malgun Gothic" pitchFamily="34" charset="-122"/>
                 <a:cs typeface="Malgun Gothic" pitchFamily="34" charset="-120"/>
               </a:rPr>
-              <a:t>실습 미리보기 · Lab 3</a:t>
+              <a:t>3단계: 호스트가 마무리 · 공유 메모리 재활용</a:t>
             </a:r>
             <a:endParaRPr lang="en-US" sz="2900" dirty="0"/>
           </a:p>
@@ -6751,112 +8696,262 @@
         </p:nvSpPr>
         <p:spPr>
           <a:xfrm>
-            <a:off x="548640" y="1600200"/>
-            <a:ext cx="5303520" cy="1920240"/>
+            <a:off x="548640" y="1508760"/>
+            <a:ext cx="11064240" cy="1737360"/>
           </a:xfrm>
           <a:prstGeom prst="roundRect">
             <a:avLst>
-              <a:gd name="adj" fmla="val 3810"/>
+              <a:gd name="adj" fmla="val 2632"/>
+            </a:avLst>
+          </a:prstGeom>
+          <a:solidFill>
+            <a:srgbClr val="0B1119"/>
+          </a:solidFill>
+          <a:ln w="12700">
+            <a:solidFill>
+              <a:srgbClr val="2C3A4E"/>
+            </a:solidFill>
+            <a:prstDash val="solid"/>
+          </a:ln>
+        </p:spPr>
+      </p:sp>
+      <p:sp>
+        <p:nvSpPr>
+          <p:cNvPr id="5" name="Text 3"/>
+          <p:cNvSpPr/>
+          <p:nvPr/>
+        </p:nvSpPr>
+        <p:spPr>
+          <a:xfrm>
+            <a:off x="768096" y="1655064"/>
+            <a:ext cx="10625328" cy="1444752"/>
+          </a:xfrm>
+          <a:prstGeom prst="rect">
+            <a:avLst/>
+          </a:prstGeom>
+          <a:noFill/>
+          <a:ln/>
+        </p:spPr>
+        <p:txBody>
+          <a:bodyPr wrap="square" lIns="0" tIns="0" rIns="0" bIns="0" rtlCol="0" anchor="t"/>
+          <a:lstStyle/>
+          <a:p>
+            <a:pPr algn="l" indent="0" marL="0">
+              <a:lnSpc>
+                <a:spcPct val="110000"/>
+              </a:lnSpc>
+              <a:buNone/>
+            </a:pPr>
+            <a:r>
+              <a:rPr lang="en-US" sz="1300" dirty="0">
+                <a:solidFill>
+                  <a:srgbClr val="6B7D94"/>
+                </a:solidFill>
+                <a:latin typeface="Courier New" pitchFamily="34" charset="0"/>
+                <a:ea typeface="Courier New" pitchFamily="34" charset="-122"/>
+                <a:cs typeface="Courier New" pitchFamily="34" charset="-120"/>
+              </a:rPr>
+              <a:t>// core.cu:195 — gpuVerifyConstant (호스트)</a:t>
+            </a:r>
+            <a:endParaRPr lang="en-US" sz="1300" dirty="0"/>
+          </a:p>
+          <a:p>
+            <a:pPr algn="l" indent="0" marL="0">
+              <a:lnSpc>
+                <a:spcPct val="110000"/>
+              </a:lnSpc>
+              <a:buNone/>
+            </a:pPr>
+            <a:r>
+              <a:rPr lang="en-US" sz="1300" dirty="0">
+                <a:solidFill>
+                  <a:srgbClr val="3FB8C4"/>
+                </a:solidFill>
+                <a:latin typeface="Courier New" pitchFamily="34" charset="0"/>
+                <a:ea typeface="Courier New" pitchFamily="34" charset="-122"/>
+                <a:cs typeface="Courier New" pitchFamily="34" charset="-120"/>
+              </a:rPr>
+              <a:t>cudaMemcpy(errorCounts, blockErrorCount, sizeof(uint)*nBlocks, D2H);  // 1024개만</a:t>
+            </a:r>
+            <a:endParaRPr lang="en-US" sz="1300" dirty="0"/>
+          </a:p>
+          <a:p>
+            <a:pPr algn="l" indent="0" marL="0">
+              <a:lnSpc>
+                <a:spcPct val="110000"/>
+              </a:lnSpc>
+              <a:buNone/>
+            </a:pPr>
+            <a:r>
+              <a:rPr lang="en-US" sz="1300" dirty="0">
+                <a:solidFill>
+                  <a:srgbClr val="E7EDF5"/>
+                </a:solidFill>
+                <a:latin typeface="Courier New" pitchFamily="34" charset="0"/>
+                <a:ea typeface="Courier New" pitchFamily="34" charset="-122"/>
+                <a:cs typeface="Courier New" pitchFamily="34" charset="-120"/>
+              </a:rPr>
+              <a:t>uint totalErrors = 0;</a:t>
+            </a:r>
+            <a:endParaRPr lang="en-US" sz="1300" dirty="0"/>
+          </a:p>
+          <a:p>
+            <a:pPr algn="l" indent="0" marL="0">
+              <a:lnSpc>
+                <a:spcPct val="110000"/>
+              </a:lnSpc>
+              <a:buNone/>
+            </a:pPr>
+            <a:r>
+              <a:rPr lang="en-US" sz="1300" dirty="0">
+                <a:solidFill>
+                  <a:srgbClr val="F2C079"/>
+                </a:solidFill>
+                <a:latin typeface="Courier New" pitchFamily="34" charset="0"/>
+                <a:ea typeface="Courier New" pitchFamily="34" charset="-122"/>
+                <a:cs typeface="Courier New" pitchFamily="34" charset="-120"/>
+              </a:rPr>
+              <a:t>for (uint i = 0; i &lt; nBlocks; i++) totalErrors += errorCounts[i];    // ~1k 합산</a:t>
+            </a:r>
+            <a:endParaRPr lang="en-US" sz="1300" dirty="0"/>
+          </a:p>
+          <a:p>
+            <a:pPr algn="l" indent="0" marL="0">
+              <a:lnSpc>
+                <a:spcPct val="110000"/>
+              </a:lnSpc>
+              <a:buNone/>
+            </a:pPr>
+            <a:r>
+              <a:rPr lang="en-US" sz="1300" dirty="0">
+                <a:solidFill>
+                  <a:srgbClr val="E7EDF5"/>
+                </a:solidFill>
+                <a:latin typeface="Courier New" pitchFamily="34" charset="0"/>
+                <a:ea typeface="Courier New" pitchFamily="34" charset="-122"/>
+                <a:cs typeface="Courier New" pitchFamily="34" charset="-120"/>
+              </a:rPr>
+              <a:t>return totalErrors;</a:t>
+            </a:r>
+            <a:endParaRPr lang="en-US" sz="1300" dirty="0"/>
+          </a:p>
+        </p:txBody>
+      </p:sp>
+      <p:sp>
+        <p:nvSpPr>
+          <p:cNvPr id="6" name="Text 4"/>
+          <p:cNvSpPr/>
+          <p:nvPr/>
+        </p:nvSpPr>
+        <p:spPr>
+          <a:xfrm>
+            <a:off x="548640" y="3383280"/>
+            <a:ext cx="11064240" cy="457200"/>
+          </a:xfrm>
+          <a:prstGeom prst="rect">
+            <a:avLst/>
+          </a:prstGeom>
+          <a:noFill/>
+          <a:ln/>
+        </p:spPr>
+        <p:txBody>
+          <a:bodyPr wrap="square" lIns="0" tIns="0" rIns="0" bIns="0" rtlCol="0" anchor="ctr"/>
+          <a:lstStyle/>
+          <a:p>
+            <a:pPr indent="0" marL="0">
+              <a:buNone/>
+            </a:pPr>
+            <a:r>
+              <a:rPr lang="en-US" sz="1550" dirty="0">
+                <a:solidFill>
+                  <a:srgbClr val="9FB0C4"/>
+                </a:solidFill>
+                <a:latin typeface="Malgun Gothic" pitchFamily="34" charset="0"/>
+                <a:ea typeface="Malgun Gothic" pitchFamily="34" charset="-122"/>
+                <a:cs typeface="Malgun Gothic" pitchFamily="34" charset="-120"/>
+              </a:rPr>
+              <a:t>GPU는 52만 → 1024로 줄이고, CPU는 그 1024개만 더합니다. 각자 잘하는 일을 맡습니다.</a:t>
+            </a:r>
+            <a:endParaRPr lang="en-US" sz="1550" dirty="0"/>
+          </a:p>
+        </p:txBody>
+      </p:sp>
+      <p:sp>
+        <p:nvSpPr>
+          <p:cNvPr id="7" name="Shape 5"/>
+          <p:cNvSpPr/>
+          <p:nvPr/>
+        </p:nvSpPr>
+        <p:spPr>
+          <a:xfrm>
+            <a:off x="548640" y="3977640"/>
+            <a:ext cx="11064240" cy="1737360"/>
+          </a:xfrm>
+          <a:prstGeom prst="roundRect">
+            <a:avLst>
+              <a:gd name="adj" fmla="val 4211"/>
             </a:avLst>
           </a:prstGeom>
           <a:solidFill>
             <a:srgbClr val="18212E"/>
           </a:solidFill>
-          <a:ln/>
-        </p:spPr>
-      </p:sp>
-      <p:sp>
-        <p:nvSpPr>
-          <p:cNvPr id="5" name="Text 3"/>
-          <p:cNvSpPr/>
-          <p:nvPr/>
-        </p:nvSpPr>
-        <p:spPr>
-          <a:xfrm>
-            <a:off x="804672" y="1801368"/>
-            <a:ext cx="1417320" cy="502920"/>
-          </a:xfrm>
-          <a:prstGeom prst="roundRect">
-            <a:avLst>
-              <a:gd name="adj" fmla="val 14545"/>
-            </a:avLst>
-          </a:prstGeom>
-          <a:solidFill>
-            <a:srgbClr val="E6604F"/>
-          </a:solidFill>
-          <a:ln/>
-        </p:spPr>
-        <p:txBody>
-          <a:bodyPr wrap="square" rtlCol="0" anchor="ctr"/>
-          <a:lstStyle/>
-          <a:p>
-            <a:pPr algn="ctr" indent="0" marL="0">
+          <a:ln w="19050">
+            <a:solidFill>
+              <a:srgbClr val="E8A33D"/>
+            </a:solidFill>
+            <a:prstDash val="solid"/>
+          </a:ln>
+        </p:spPr>
+      </p:sp>
+      <p:sp>
+        <p:nvSpPr>
+          <p:cNvPr id="8" name="Text 6"/>
+          <p:cNvSpPr/>
+          <p:nvPr/>
+        </p:nvSpPr>
+        <p:spPr>
+          <a:xfrm>
+            <a:off x="822960" y="4160520"/>
+            <a:ext cx="10515600" cy="365760"/>
+          </a:xfrm>
+          <a:prstGeom prst="rect">
+            <a:avLst/>
+          </a:prstGeom>
+          <a:noFill/>
+          <a:ln/>
+        </p:spPr>
+        <p:txBody>
+          <a:bodyPr wrap="square" lIns="0" tIns="0" rIns="0" bIns="0" rtlCol="0" anchor="ctr"/>
+          <a:lstStyle/>
+          <a:p>
+            <a:pPr indent="0" marL="0">
               <a:buNone/>
             </a:pPr>
             <a:r>
               <a:rPr lang="en-US" sz="1500" b="1" dirty="0">
                 <a:solidFill>
-                  <a:srgbClr val="101722"/>
-                </a:solidFill>
-                <a:latin typeface="Courier New" pitchFamily="34" charset="0"/>
-                <a:ea typeface="Courier New" pitchFamily="34" charset="-122"/>
-                <a:cs typeface="Courier New" pitchFamily="34" charset="-120"/>
-              </a:rPr>
-              <a:t>Ex 1</a:t>
-            </a:r>
-            <a:endParaRPr lang="en-US" sz="1500" dirty="0"/>
-          </a:p>
-        </p:txBody>
-      </p:sp>
-      <p:sp>
-        <p:nvSpPr>
-          <p:cNvPr id="6" name="Text 4"/>
-          <p:cNvSpPr/>
-          <p:nvPr/>
-        </p:nvSpPr>
-        <p:spPr>
-          <a:xfrm>
-            <a:off x="2377440" y="1819656"/>
-            <a:ext cx="3246120" cy="822960"/>
-          </a:xfrm>
-          <a:prstGeom prst="rect">
-            <a:avLst/>
-          </a:prstGeom>
-          <a:noFill/>
-          <a:ln/>
-        </p:spPr>
-        <p:txBody>
-          <a:bodyPr wrap="square" lIns="0" tIns="0" rIns="0" bIns="0" rtlCol="0" anchor="t"/>
-          <a:lstStyle/>
-          <a:p>
-            <a:pPr indent="0" marL="0">
-              <a:buNone/>
-            </a:pPr>
-            <a:r>
-              <a:rPr lang="en-US" sz="1700" b="1" dirty="0">
-                <a:solidFill>
-                  <a:srgbClr val="E7EDF5"/>
+                  <a:srgbClr val="E8A33D"/>
                 </a:solidFill>
                 <a:latin typeface="Malgun Gothic" pitchFamily="34" charset="0"/>
                 <a:ea typeface="Malgun Gothic" pitchFamily="34" charset="-122"/>
                 <a:cs typeface="Malgun Gothic" pitchFamily="34" charset="-120"/>
               </a:rPr>
-              <a:t>__syncthreads 빼보기</a:t>
-            </a:r>
-            <a:endParaRPr lang="en-US" sz="1700" dirty="0"/>
-          </a:p>
-        </p:txBody>
-      </p:sp>
-      <p:sp>
-        <p:nvSpPr>
-          <p:cNvPr id="7" name="Text 5"/>
-          <p:cNvSpPr/>
-          <p:nvPr/>
-        </p:nvSpPr>
-        <p:spPr>
-          <a:xfrm>
-            <a:off x="804672" y="2697480"/>
-            <a:ext cx="4791456" cy="731520"/>
+              <a:t>같은 공유 메모리, 다른 쓰임 — 세션 3에서 함께 보는 두 사례</a:t>
+            </a:r>
+            <a:endParaRPr lang="en-US" sz="1500" dirty="0"/>
+          </a:p>
+        </p:txBody>
+      </p:sp>
+      <p:sp>
+        <p:nvSpPr>
+          <p:cNvPr id="9" name="Text 7"/>
+          <p:cNvSpPr/>
+          <p:nvPr/>
+        </p:nvSpPr>
+        <p:spPr>
+          <a:xfrm>
+            <a:off x="822960" y="4617720"/>
+            <a:ext cx="10515600" cy="1005840"/>
           </a:xfrm>
           <a:prstGeom prst="rect">
             <a:avLst/>
@@ -6868,118 +8963,42 @@
           <a:bodyPr wrap="square" lIns="0" tIns="0" rIns="0" bIns="0" rtlCol="0" anchor="t"/>
           <a:lstStyle/>
           <a:p>
-            <a:pPr indent="0" marL="0">
+            <a:pPr marL="342900" indent="-342900">
               <a:lnSpc>
-                <a:spcPct val="110000"/>
+                <a:spcPct val="105000"/>
               </a:lnSpc>
-              <a:buNone/>
+              <a:spcAft>
+                <a:spcPts val="800"/>
+              </a:spcAft>
+              <a:buSzPct val="100000"/>
+              <a:buChar char="•"/>
             </a:pPr>
             <a:r>
               <a:rPr lang="en-US" sz="1350" dirty="0">
                 <a:solidFill>
-                  <a:srgbClr val="9FB0C4"/>
+                  <a:srgbClr val="E7EDF5"/>
                 </a:solidFill>
                 <a:latin typeface="Malgun Gothic" pitchFamily="34" charset="0"/>
                 <a:ea typeface="Malgun Gothic" pitchFamily="34" charset="-122"/>
                 <a:cs typeface="Malgun Gothic" pitchFamily="34" charset="-120"/>
               </a:rPr>
-              <a:t>리덕션 동기화를 지워 합계가 흔들리는지 관찰</a:t>
+              <a:t>deviceShortLCG0Shmem (core.cu:346) — LCG 중간값을 공유 메모리에 둬 셰이더 오버클럭 오류에 민감</a:t>
             </a:r>
             <a:endParaRPr lang="en-US" sz="1350" dirty="0"/>
           </a:p>
-        </p:txBody>
-      </p:sp>
-      <p:sp>
-        <p:nvSpPr>
-          <p:cNvPr id="8" name="Shape 6"/>
-          <p:cNvSpPr/>
-          <p:nvPr/>
-        </p:nvSpPr>
-        <p:spPr>
-          <a:xfrm>
-            <a:off x="6309360" y="1600200"/>
-            <a:ext cx="5303520" cy="1920240"/>
-          </a:xfrm>
-          <a:prstGeom prst="roundRect">
-            <a:avLst>
-              <a:gd name="adj" fmla="val 3810"/>
-            </a:avLst>
-          </a:prstGeom>
-          <a:solidFill>
-            <a:srgbClr val="18212E"/>
-          </a:solidFill>
-          <a:ln/>
-        </p:spPr>
-      </p:sp>
-      <p:sp>
-        <p:nvSpPr>
-          <p:cNvPr id="9" name="Text 7"/>
-          <p:cNvSpPr/>
-          <p:nvPr/>
-        </p:nvSpPr>
-        <p:spPr>
-          <a:xfrm>
-            <a:off x="6565392" y="1801368"/>
-            <a:ext cx="1417320" cy="502920"/>
-          </a:xfrm>
-          <a:prstGeom prst="roundRect">
-            <a:avLst>
-              <a:gd name="adj" fmla="val 14545"/>
-            </a:avLst>
-          </a:prstGeom>
-          <a:solidFill>
-            <a:srgbClr val="E8A33D"/>
-          </a:solidFill>
-          <a:ln/>
-        </p:spPr>
-        <p:txBody>
-          <a:bodyPr wrap="square" rtlCol="0" anchor="ctr"/>
-          <a:lstStyle/>
-          <a:p>
-            <a:pPr algn="ctr" indent="0" marL="0">
-              <a:buNone/>
-            </a:pPr>
-            <a:r>
-              <a:rPr lang="en-US" sz="1500" b="1" dirty="0">
-                <a:solidFill>
-                  <a:srgbClr val="101722"/>
-                </a:solidFill>
-                <a:latin typeface="Courier New" pitchFamily="34" charset="0"/>
-                <a:ea typeface="Courier New" pitchFamily="34" charset="-122"/>
-                <a:cs typeface="Courier New" pitchFamily="34" charset="-120"/>
-              </a:rPr>
-              <a:t>Ex 2</a:t>
-            </a:r>
-            <a:endParaRPr lang="en-US" sz="1500" dirty="0"/>
-          </a:p>
-        </p:txBody>
-      </p:sp>
-      <p:sp>
-        <p:nvSpPr>
-          <p:cNvPr id="10" name="Text 8"/>
-          <p:cNvSpPr/>
-          <p:nvPr/>
-        </p:nvSpPr>
-        <p:spPr>
-          <a:xfrm>
-            <a:off x="8138160" y="1819656"/>
-            <a:ext cx="3246120" cy="822960"/>
-          </a:xfrm>
-          <a:prstGeom prst="rect">
-            <a:avLst/>
-          </a:prstGeom>
-          <a:noFill/>
-          <a:ln/>
-        </p:spPr>
-        <p:txBody>
-          <a:bodyPr wrap="square" lIns="0" tIns="0" rIns="0" bIns="0" rtlCol="0" anchor="t"/>
-          <a:lstStyle/>
-          <a:p>
-            <a:pPr indent="0" marL="0">
-              <a:buNone/>
-            </a:pPr>
-            <a:r>
-              <a:rPr lang="en-US" sz="1700" b="1" dirty="0">
+          <a:p>
+            <a:pPr marL="342900" indent="-342900">
+              <a:lnSpc>
+                <a:spcPct val="105000"/>
+              </a:lnSpc>
+              <a:spcAft>
+                <a:spcPts val="800"/>
+              </a:spcAft>
+              <a:buSzPct val="100000"/>
+              <a:buChar char="•"/>
+            </a:pPr>
+            <a:r>
+              <a:rPr lang="en-US" sz="1350" dirty="0">
                 <a:solidFill>
                   <a:srgbClr val="E7EDF5"/>
                 </a:solidFill>
@@ -6987,341 +9006,7 @@
                 <a:ea typeface="Malgun Gothic" pitchFamily="34" charset="-122"/>
                 <a:cs typeface="Malgun Gothic" pitchFamily="34" charset="-120"/>
               </a:rPr>
-              <a:t>__popc 확인</a:t>
-            </a:r>
-            <a:endParaRPr lang="en-US" sz="1700" dirty="0"/>
-          </a:p>
-        </p:txBody>
-      </p:sp>
-      <p:sp>
-        <p:nvSpPr>
-          <p:cNvPr id="11" name="Text 9"/>
-          <p:cNvSpPr/>
-          <p:nvPr/>
-        </p:nvSpPr>
-        <p:spPr>
-          <a:xfrm>
-            <a:off x="6565392" y="2697480"/>
-            <a:ext cx="4791456" cy="731520"/>
-          </a:xfrm>
-          <a:prstGeom prst="rect">
-            <a:avLst/>
-          </a:prstGeom>
-          <a:noFill/>
-          <a:ln/>
-        </p:spPr>
-        <p:txBody>
-          <a:bodyPr wrap="square" lIns="0" tIns="0" rIns="0" bIns="0" rtlCol="0" anchor="t"/>
-          <a:lstStyle/>
-          <a:p>
-            <a:pPr indent="0" marL="0">
-              <a:lnSpc>
-                <a:spcPct val="110000"/>
-              </a:lnSpc>
-              <a:buNone/>
-            </a:pPr>
-            <a:r>
-              <a:rPr lang="en-US" sz="1350" dirty="0">
-                <a:solidFill>
-                  <a:srgbClr val="9FB0C4"/>
-                </a:solidFill>
-                <a:latin typeface="Malgun Gothic" pitchFamily="34" charset="0"/>
-                <a:ea typeface="Malgun Gothic" pitchFamily="34" charset="-122"/>
-                <a:cs typeface="Malgun Gothic" pitchFamily="34" charset="-120"/>
-              </a:rPr>
-              <a:t>손상 비트 수와 집계 오류 수가 일치하는지</a:t>
-            </a:r>
-            <a:endParaRPr lang="en-US" sz="1350" dirty="0"/>
-          </a:p>
-        </p:txBody>
-      </p:sp>
-      <p:sp>
-        <p:nvSpPr>
-          <p:cNvPr id="12" name="Shape 10"/>
-          <p:cNvSpPr/>
-          <p:nvPr/>
-        </p:nvSpPr>
-        <p:spPr>
-          <a:xfrm>
-            <a:off x="548640" y="3840480"/>
-            <a:ext cx="5303520" cy="1920240"/>
-          </a:xfrm>
-          <a:prstGeom prst="roundRect">
-            <a:avLst>
-              <a:gd name="adj" fmla="val 3810"/>
-            </a:avLst>
-          </a:prstGeom>
-          <a:solidFill>
-            <a:srgbClr val="18212E"/>
-          </a:solidFill>
-          <a:ln/>
-        </p:spPr>
-      </p:sp>
-      <p:sp>
-        <p:nvSpPr>
-          <p:cNvPr id="13" name="Text 11"/>
-          <p:cNvSpPr/>
-          <p:nvPr/>
-        </p:nvSpPr>
-        <p:spPr>
-          <a:xfrm>
-            <a:off x="804672" y="4041648"/>
-            <a:ext cx="1417320" cy="502920"/>
-          </a:xfrm>
-          <a:prstGeom prst="roundRect">
-            <a:avLst>
-              <a:gd name="adj" fmla="val 14545"/>
-            </a:avLst>
-          </a:prstGeom>
-          <a:solidFill>
-            <a:srgbClr val="3FB8C4"/>
-          </a:solidFill>
-          <a:ln/>
-        </p:spPr>
-        <p:txBody>
-          <a:bodyPr wrap="square" rtlCol="0" anchor="ctr"/>
-          <a:lstStyle/>
-          <a:p>
-            <a:pPr algn="ctr" indent="0" marL="0">
-              <a:buNone/>
-            </a:pPr>
-            <a:r>
-              <a:rPr lang="en-US" sz="1500" b="1" dirty="0">
-                <a:solidFill>
-                  <a:srgbClr val="101722"/>
-                </a:solidFill>
-                <a:latin typeface="Courier New" pitchFamily="34" charset="0"/>
-                <a:ea typeface="Courier New" pitchFamily="34" charset="-122"/>
-                <a:cs typeface="Courier New" pitchFamily="34" charset="-120"/>
-              </a:rPr>
-              <a:t>Ex 3</a:t>
-            </a:r>
-            <a:endParaRPr lang="en-US" sz="1500" dirty="0"/>
-          </a:p>
-        </p:txBody>
-      </p:sp>
-      <p:sp>
-        <p:nvSpPr>
-          <p:cNvPr id="14" name="Text 12"/>
-          <p:cNvSpPr/>
-          <p:nvPr/>
-        </p:nvSpPr>
-        <p:spPr>
-          <a:xfrm>
-            <a:off x="2377440" y="4059936"/>
-            <a:ext cx="3246120" cy="822960"/>
-          </a:xfrm>
-          <a:prstGeom prst="rect">
-            <a:avLst/>
-          </a:prstGeom>
-          <a:noFill/>
-          <a:ln/>
-        </p:spPr>
-        <p:txBody>
-          <a:bodyPr wrap="square" lIns="0" tIns="0" rIns="0" bIns="0" rtlCol="0" anchor="t"/>
-          <a:lstStyle/>
-          <a:p>
-            <a:pPr indent="0" marL="0">
-              <a:buNone/>
-            </a:pPr>
-            <a:r>
-              <a:rPr lang="en-US" sz="1700" b="1" dirty="0">
-                <a:solidFill>
-                  <a:srgbClr val="E7EDF5"/>
-                </a:solidFill>
-                <a:latin typeface="Malgun Gothic" pitchFamily="34" charset="0"/>
-                <a:ea typeface="Malgun Gothic" pitchFamily="34" charset="-122"/>
-                <a:cs typeface="Malgun Gothic" pitchFamily="34" charset="-120"/>
-              </a:rPr>
-              <a:t>블록 합 훔쳐보기</a:t>
-            </a:r>
-            <a:endParaRPr lang="en-US" sz="1700" dirty="0"/>
-          </a:p>
-        </p:txBody>
-      </p:sp>
-      <p:sp>
-        <p:nvSpPr>
-          <p:cNvPr id="15" name="Text 13"/>
-          <p:cNvSpPr/>
-          <p:nvPr/>
-        </p:nvSpPr>
-        <p:spPr>
-          <a:xfrm>
-            <a:off x="804672" y="4937760"/>
-            <a:ext cx="4791456" cy="731520"/>
-          </a:xfrm>
-          <a:prstGeom prst="rect">
-            <a:avLst/>
-          </a:prstGeom>
-          <a:noFill/>
-          <a:ln/>
-        </p:spPr>
-        <p:txBody>
-          <a:bodyPr wrap="square" lIns="0" tIns="0" rIns="0" bIns="0" rtlCol="0" anchor="t"/>
-          <a:lstStyle/>
-          <a:p>
-            <a:pPr indent="0" marL="0">
-              <a:lnSpc>
-                <a:spcPct val="110000"/>
-              </a:lnSpc>
-              <a:buNone/>
-            </a:pPr>
-            <a:r>
-              <a:rPr lang="en-US" sz="1350" dirty="0">
-                <a:solidFill>
-                  <a:srgbClr val="9FB0C4"/>
-                </a:solidFill>
-                <a:latin typeface="Malgun Gothic" pitchFamily="34" charset="0"/>
-                <a:ea typeface="Malgun Gothic" pitchFamily="34" charset="-122"/>
-                <a:cs typeface="Malgun Gothic" pitchFamily="34" charset="-120"/>
-              </a:rPr>
-              <a:t>blockErrorCount를 출력해 분포 확인</a:t>
-            </a:r>
-            <a:endParaRPr lang="en-US" sz="1350" dirty="0"/>
-          </a:p>
-        </p:txBody>
-      </p:sp>
-      <p:sp>
-        <p:nvSpPr>
-          <p:cNvPr id="16" name="Shape 14"/>
-          <p:cNvSpPr/>
-          <p:nvPr/>
-        </p:nvSpPr>
-        <p:spPr>
-          <a:xfrm>
-            <a:off x="6309360" y="3840480"/>
-            <a:ext cx="5303520" cy="1920240"/>
-          </a:xfrm>
-          <a:prstGeom prst="roundRect">
-            <a:avLst>
-              <a:gd name="adj" fmla="val 3810"/>
-            </a:avLst>
-          </a:prstGeom>
-          <a:solidFill>
-            <a:srgbClr val="18212E"/>
-          </a:solidFill>
-          <a:ln/>
-        </p:spPr>
-      </p:sp>
-      <p:sp>
-        <p:nvSpPr>
-          <p:cNvPr id="17" name="Text 15"/>
-          <p:cNvSpPr/>
-          <p:nvPr/>
-        </p:nvSpPr>
-        <p:spPr>
-          <a:xfrm>
-            <a:off x="6565392" y="4041648"/>
-            <a:ext cx="1417320" cy="502920"/>
-          </a:xfrm>
-          <a:prstGeom prst="roundRect">
-            <a:avLst>
-              <a:gd name="adj" fmla="val 14545"/>
-            </a:avLst>
-          </a:prstGeom>
-          <a:solidFill>
-            <a:srgbClr val="E8A33D"/>
-          </a:solidFill>
-          <a:ln/>
-        </p:spPr>
-        <p:txBody>
-          <a:bodyPr wrap="square" rtlCol="0" anchor="ctr"/>
-          <a:lstStyle/>
-          <a:p>
-            <a:pPr algn="ctr" indent="0" marL="0">
-              <a:buNone/>
-            </a:pPr>
-            <a:r>
-              <a:rPr lang="en-US" sz="1500" b="1" dirty="0">
-                <a:solidFill>
-                  <a:srgbClr val="101722"/>
-                </a:solidFill>
-                <a:latin typeface="Courier New" pitchFamily="34" charset="0"/>
-                <a:ea typeface="Courier New" pitchFamily="34" charset="-122"/>
-                <a:cs typeface="Courier New" pitchFamily="34" charset="-120"/>
-              </a:rPr>
-              <a:t>Ex 4</a:t>
-            </a:r>
-            <a:endParaRPr lang="en-US" sz="1500" dirty="0"/>
-          </a:p>
-        </p:txBody>
-      </p:sp>
-      <p:sp>
-        <p:nvSpPr>
-          <p:cNvPr id="18" name="Text 16"/>
-          <p:cNvSpPr/>
-          <p:nvPr/>
-        </p:nvSpPr>
-        <p:spPr>
-          <a:xfrm>
-            <a:off x="8138160" y="4059936"/>
-            <a:ext cx="3246120" cy="822960"/>
-          </a:xfrm>
-          <a:prstGeom prst="rect">
-            <a:avLst/>
-          </a:prstGeom>
-          <a:noFill/>
-          <a:ln/>
-        </p:spPr>
-        <p:txBody>
-          <a:bodyPr wrap="square" lIns="0" tIns="0" rIns="0" bIns="0" rtlCol="0" anchor="t"/>
-          <a:lstStyle/>
-          <a:p>
-            <a:pPr indent="0" marL="0">
-              <a:buNone/>
-            </a:pPr>
-            <a:r>
-              <a:rPr lang="en-US" sz="1700" b="1" dirty="0">
-                <a:solidFill>
-                  <a:srgbClr val="E7EDF5"/>
-                </a:solidFill>
-                <a:latin typeface="Malgun Gothic" pitchFamily="34" charset="0"/>
-                <a:ea typeface="Malgun Gothic" pitchFamily="34" charset="-122"/>
-                <a:cs typeface="Malgun Gothic" pitchFamily="34" charset="-120"/>
-              </a:rPr>
-              <a:t>shmem 크기 실험</a:t>
-            </a:r>
-            <a:endParaRPr lang="en-US" sz="1700" dirty="0"/>
-          </a:p>
-        </p:txBody>
-      </p:sp>
-      <p:sp>
-        <p:nvSpPr>
-          <p:cNvPr id="19" name="Text 17"/>
-          <p:cNvSpPr/>
-          <p:nvPr/>
-        </p:nvSpPr>
-        <p:spPr>
-          <a:xfrm>
-            <a:off x="6565392" y="4937760"/>
-            <a:ext cx="4791456" cy="731520"/>
-          </a:xfrm>
-          <a:prstGeom prst="rect">
-            <a:avLst/>
-          </a:prstGeom>
-          <a:noFill/>
-          <a:ln/>
-        </p:spPr>
-        <p:txBody>
-          <a:bodyPr wrap="square" lIns="0" tIns="0" rIns="0" bIns="0" rtlCol="0" anchor="t"/>
-          <a:lstStyle/>
-          <a:p>
-            <a:pPr indent="0" marL="0">
-              <a:lnSpc>
-                <a:spcPct val="110000"/>
-              </a:lnSpc>
-              <a:buNone/>
-            </a:pPr>
-            <a:r>
-              <a:rPr lang="en-US" sz="1350" dirty="0">
-                <a:solidFill>
-                  <a:srgbClr val="9FB0C4"/>
-                </a:solidFill>
-                <a:latin typeface="Malgun Gothic" pitchFamily="34" charset="0"/>
-                <a:ea typeface="Malgun Gothic" pitchFamily="34" charset="-122"/>
-                <a:cs typeface="Malgun Gothic" pitchFamily="34" charset="-120"/>
-              </a:rPr>
-              <a:t>공유 메모리 지정을 바꿔 동작 변화 관찰</a:t>
+              <a:t>deviceWriteRandomBlocks (core.cu:723) — 공유 메모리로 난수 블록을 병렬 생성 후 전역에 기록</a:t>
             </a:r>
             <a:endParaRPr lang="en-US" sz="1350" dirty="0"/>
           </a:p>
